--- a/docs/figs/Landscape_Causal_Discovery_Bnlearn_for_python.pptx
+++ b/docs/figs/Landscape_Causal_Discovery_Bnlearn_for_python.pptx
@@ -261,7 +261,7 @@
           <a:p>
             <a:fld id="{38773C79-E55F-43DB-B2E4-E2C2AD643910}" type="datetimeFigureOut">
               <a:rPr lang="nl-NL" smtClean="0"/>
-              <a:t>31-10-2025</a:t>
+              <a:t>16-9-2026</a:t>
             </a:fld>
             <a:endParaRPr lang="nl-NL"/>
           </a:p>
@@ -431,7 +431,7 @@
           <a:p>
             <a:fld id="{38773C79-E55F-43DB-B2E4-E2C2AD643910}" type="datetimeFigureOut">
               <a:rPr lang="nl-NL" smtClean="0"/>
-              <a:t>31-10-2025</a:t>
+              <a:t>16-9-2026</a:t>
             </a:fld>
             <a:endParaRPr lang="nl-NL"/>
           </a:p>
@@ -611,7 +611,7 @@
           <a:p>
             <a:fld id="{38773C79-E55F-43DB-B2E4-E2C2AD643910}" type="datetimeFigureOut">
               <a:rPr lang="nl-NL" smtClean="0"/>
-              <a:t>31-10-2025</a:t>
+              <a:t>16-9-2026</a:t>
             </a:fld>
             <a:endParaRPr lang="nl-NL"/>
           </a:p>
@@ -781,7 +781,7 @@
           <a:p>
             <a:fld id="{38773C79-E55F-43DB-B2E4-E2C2AD643910}" type="datetimeFigureOut">
               <a:rPr lang="nl-NL" smtClean="0"/>
-              <a:t>31-10-2025</a:t>
+              <a:t>16-9-2026</a:t>
             </a:fld>
             <a:endParaRPr lang="nl-NL"/>
           </a:p>
@@ -1027,7 +1027,7 @@
           <a:p>
             <a:fld id="{38773C79-E55F-43DB-B2E4-E2C2AD643910}" type="datetimeFigureOut">
               <a:rPr lang="nl-NL" smtClean="0"/>
-              <a:t>31-10-2025</a:t>
+              <a:t>16-9-2026</a:t>
             </a:fld>
             <a:endParaRPr lang="nl-NL"/>
           </a:p>
@@ -1259,7 +1259,7 @@
           <a:p>
             <a:fld id="{38773C79-E55F-43DB-B2E4-E2C2AD643910}" type="datetimeFigureOut">
               <a:rPr lang="nl-NL" smtClean="0"/>
-              <a:t>31-10-2025</a:t>
+              <a:t>16-9-2026</a:t>
             </a:fld>
             <a:endParaRPr lang="nl-NL"/>
           </a:p>
@@ -1626,7 +1626,7 @@
           <a:p>
             <a:fld id="{38773C79-E55F-43DB-B2E4-E2C2AD643910}" type="datetimeFigureOut">
               <a:rPr lang="nl-NL" smtClean="0"/>
-              <a:t>31-10-2025</a:t>
+              <a:t>16-9-2026</a:t>
             </a:fld>
             <a:endParaRPr lang="nl-NL"/>
           </a:p>
@@ -1744,7 +1744,7 @@
           <a:p>
             <a:fld id="{38773C79-E55F-43DB-B2E4-E2C2AD643910}" type="datetimeFigureOut">
               <a:rPr lang="nl-NL" smtClean="0"/>
-              <a:t>31-10-2025</a:t>
+              <a:t>16-9-2026</a:t>
             </a:fld>
             <a:endParaRPr lang="nl-NL"/>
           </a:p>
@@ -1839,7 +1839,7 @@
           <a:p>
             <a:fld id="{38773C79-E55F-43DB-B2E4-E2C2AD643910}" type="datetimeFigureOut">
               <a:rPr lang="nl-NL" smtClean="0"/>
-              <a:t>31-10-2025</a:t>
+              <a:t>16-9-2026</a:t>
             </a:fld>
             <a:endParaRPr lang="nl-NL"/>
           </a:p>
@@ -2116,7 +2116,7 @@
           <a:p>
             <a:fld id="{38773C79-E55F-43DB-B2E4-E2C2AD643910}" type="datetimeFigureOut">
               <a:rPr lang="nl-NL" smtClean="0"/>
-              <a:t>31-10-2025</a:t>
+              <a:t>16-9-2026</a:t>
             </a:fld>
             <a:endParaRPr lang="nl-NL"/>
           </a:p>
@@ -2373,7 +2373,7 @@
           <a:p>
             <a:fld id="{38773C79-E55F-43DB-B2E4-E2C2AD643910}" type="datetimeFigureOut">
               <a:rPr lang="nl-NL" smtClean="0"/>
-              <a:t>31-10-2025</a:t>
+              <a:t>16-9-2026</a:t>
             </a:fld>
             <a:endParaRPr lang="nl-NL"/>
           </a:p>
@@ -2586,7 +2586,7 @@
           <a:p>
             <a:fld id="{38773C79-E55F-43DB-B2E4-E2C2AD643910}" type="datetimeFigureOut">
               <a:rPr lang="nl-NL" smtClean="0"/>
-              <a:t>31-10-2025</a:t>
+              <a:t>16-9-2026</a:t>
             </a:fld>
             <a:endParaRPr lang="nl-NL"/>
           </a:p>
@@ -3205,7 +3205,7 @@
         </p:nvSpPr>
         <p:spPr>
           <a:xfrm>
-            <a:off x="2217025" y="715218"/>
+            <a:off x="2217025" y="513089"/>
             <a:ext cx="6154325" cy="3390581"/>
           </a:xfrm>
           <a:custGeom>
@@ -3341,7 +3341,7 @@
         </p:nvSpPr>
         <p:spPr>
           <a:xfrm>
-            <a:off x="2962605" y="1973618"/>
+            <a:off x="2962605" y="1771489"/>
             <a:ext cx="4939690" cy="1916995"/>
           </a:xfrm>
           <a:custGeom>
@@ -3506,8 +3506,8 @@
         </p:nvSpPr>
         <p:spPr>
           <a:xfrm>
-            <a:off x="1415010" y="2622682"/>
-            <a:ext cx="16491989" cy="7634899"/>
+            <a:off x="1415010" y="2443084"/>
+            <a:ext cx="16680485" cy="7814498"/>
           </a:xfrm>
           <a:custGeom>
             <a:avLst/>
@@ -4030,7 +4030,7 @@
         </p:nvSpPr>
         <p:spPr>
           <a:xfrm>
-            <a:off x="4800968" y="826381"/>
+            <a:off x="4800968" y="624252"/>
             <a:ext cx="3091103" cy="1077218"/>
           </a:xfrm>
           <a:prstGeom prst="rect">
@@ -4813,8 +4813,8 @@
         </p:nvCxnSpPr>
         <p:spPr>
           <a:xfrm flipH="1" flipV="1">
-            <a:off x="5221488" y="5769968"/>
-            <a:ext cx="1515576" cy="406444"/>
+            <a:off x="5428648" y="5786948"/>
+            <a:ext cx="1308416" cy="389464"/>
           </a:xfrm>
           <a:prstGeom prst="straightConnector1">
             <a:avLst/>
@@ -4853,7 +4853,7 @@
         </p:nvSpPr>
         <p:spPr>
           <a:xfrm>
-            <a:off x="2994421" y="1276892"/>
+            <a:off x="2994421" y="1074763"/>
             <a:ext cx="1807614" cy="463190"/>
           </a:xfrm>
           <a:prstGeom prst="roundRect">
@@ -4929,7 +4929,7 @@
         </p:nvSpPr>
         <p:spPr>
           <a:xfrm>
-            <a:off x="2217025" y="1879871"/>
+            <a:off x="2217025" y="1677742"/>
             <a:ext cx="1490675" cy="830997"/>
           </a:xfrm>
           <a:prstGeom prst="rect">
@@ -5298,7 +5298,7 @@
         </p:nvGrpSpPr>
         <p:grpSpPr>
           <a:xfrm>
-            <a:off x="13341495" y="6209532"/>
+            <a:off x="12721292" y="5584416"/>
             <a:ext cx="1936906" cy="1016516"/>
             <a:chOff x="4100114" y="5116561"/>
             <a:chExt cx="1936906" cy="1016516"/>
@@ -5431,7 +5431,7 @@
         </p:nvGrpSpPr>
         <p:grpSpPr>
           <a:xfrm>
-            <a:off x="13984094" y="8141008"/>
+            <a:off x="13613661" y="7412089"/>
             <a:ext cx="1936906" cy="1016516"/>
             <a:chOff x="4100114" y="5116561"/>
             <a:chExt cx="1936906" cy="1016516"/>
@@ -5613,8 +5613,8 @@
         </p:nvCxnSpPr>
         <p:spPr>
           <a:xfrm>
-            <a:off x="14645498" y="7341035"/>
-            <a:ext cx="118554" cy="643656"/>
+            <a:off x="13989495" y="6682456"/>
+            <a:ext cx="178892" cy="642369"/>
           </a:xfrm>
           <a:prstGeom prst="straightConnector1">
             <a:avLst/>
@@ -5626,90 +5626,6 @@
               </a:schemeClr>
             </a:solidFill>
             <a:headEnd type="none" w="med" len="med"/>
-            <a:tailEnd type="triangle" w="med" len="med"/>
-          </a:ln>
-        </p:spPr>
-        <p:style>
-          <a:lnRef idx="1">
-            <a:schemeClr val="dk1"/>
-          </a:lnRef>
-          <a:fillRef idx="0">
-            <a:schemeClr val="dk1"/>
-          </a:fillRef>
-          <a:effectRef idx="0">
-            <a:schemeClr val="dk1"/>
-          </a:effectRef>
-          <a:fontRef idx="minor">
-            <a:schemeClr val="tx1"/>
-          </a:fontRef>
-        </p:style>
-      </p:cxnSp>
-      <p:cxnSp>
-        <p:nvCxnSpPr>
-          <p:cNvPr id="46" name="Straight Arrow Connector 45">
-            <a:extLst>
-              <a:ext uri="{FF2B5EF4-FFF2-40B4-BE49-F238E27FC236}">
-                <a16:creationId xmlns:a16="http://schemas.microsoft.com/office/drawing/2014/main" id="{034AA2DA-8E22-8059-0512-B3445DB612ED}"/>
-              </a:ext>
-            </a:extLst>
-          </p:cNvPr>
-          <p:cNvCxnSpPr>
-            <a:cxnSpLocks/>
-          </p:cNvCxnSpPr>
-          <p:nvPr/>
-        </p:nvCxnSpPr>
-        <p:spPr>
-          <a:xfrm flipH="1">
-            <a:off x="4684157" y="7532492"/>
-            <a:ext cx="2013925" cy="113788"/>
-          </a:xfrm>
-          <a:prstGeom prst="straightConnector1">
-            <a:avLst/>
-          </a:prstGeom>
-          <a:ln w="76200">
-            <a:headEnd type="triangle" w="med" len="med"/>
-            <a:tailEnd type="triangle" w="med" len="med"/>
-          </a:ln>
-        </p:spPr>
-        <p:style>
-          <a:lnRef idx="1">
-            <a:schemeClr val="dk1"/>
-          </a:lnRef>
-          <a:fillRef idx="0">
-            <a:schemeClr val="dk1"/>
-          </a:fillRef>
-          <a:effectRef idx="0">
-            <a:schemeClr val="dk1"/>
-          </a:effectRef>
-          <a:fontRef idx="minor">
-            <a:schemeClr val="tx1"/>
-          </a:fontRef>
-        </p:style>
-      </p:cxnSp>
-      <p:cxnSp>
-        <p:nvCxnSpPr>
-          <p:cNvPr id="47" name="Straight Arrow Connector 46">
-            <a:extLst>
-              <a:ext uri="{FF2B5EF4-FFF2-40B4-BE49-F238E27FC236}">
-                <a16:creationId xmlns:a16="http://schemas.microsoft.com/office/drawing/2014/main" id="{C29A3E2D-FF6B-4A1A-FE9C-E2D3A85BC715}"/>
-              </a:ext>
-            </a:extLst>
-          </p:cNvPr>
-          <p:cNvCxnSpPr>
-            <a:cxnSpLocks/>
-          </p:cNvCxnSpPr>
-          <p:nvPr/>
-        </p:nvCxnSpPr>
-        <p:spPr>
-          <a:xfrm flipH="1">
-            <a:off x="6753384" y="8070660"/>
-            <a:ext cx="457182" cy="529853"/>
-          </a:xfrm>
-          <a:prstGeom prst="straightConnector1">
-            <a:avLst/>
-          </a:prstGeom>
-          <a:ln w="76200">
-            <a:headEnd type="triangle" w="med" len="med"/>
             <a:tailEnd type="triangle" w="med" len="med"/>
           </a:ln>
         </p:spPr>
@@ -5831,8 +5747,8 @@
         </p:nvSpPr>
         <p:spPr>
           <a:xfrm>
-            <a:off x="2277421" y="4558187"/>
-            <a:ext cx="3120900" cy="2135385"/>
+            <a:off x="1780158" y="4297273"/>
+            <a:ext cx="4173978" cy="2494541"/>
           </a:xfrm>
           <a:custGeom>
             <a:avLst/>
@@ -5956,8 +5872,8 @@
         </p:nvSpPr>
         <p:spPr>
           <a:xfrm>
-            <a:off x="2984324" y="4965606"/>
-            <a:ext cx="779396" cy="463190"/>
+            <a:off x="4383700" y="5873170"/>
+            <a:ext cx="610364" cy="463190"/>
           </a:xfrm>
           <a:prstGeom prst="roundRect">
             <a:avLst/>
@@ -6027,8 +5943,8 @@
         </p:nvSpPr>
         <p:spPr>
           <a:xfrm>
-            <a:off x="3448173" y="5999848"/>
-            <a:ext cx="779396" cy="463190"/>
+            <a:off x="3810521" y="5337524"/>
+            <a:ext cx="636862" cy="463190"/>
           </a:xfrm>
           <a:prstGeom prst="roundRect">
             <a:avLst/>
@@ -6106,8 +6022,8 @@
         </p:nvSpPr>
         <p:spPr>
           <a:xfrm>
-            <a:off x="4014924" y="5414089"/>
-            <a:ext cx="779396" cy="463190"/>
+            <a:off x="4325762" y="4719558"/>
+            <a:ext cx="563446" cy="463190"/>
           </a:xfrm>
           <a:prstGeom prst="roundRect">
             <a:avLst/>
@@ -6177,7 +6093,7 @@
         </p:nvSpPr>
         <p:spPr>
           <a:xfrm>
-            <a:off x="2524497" y="5542817"/>
+            <a:off x="4522159" y="5294329"/>
             <a:ext cx="889751" cy="463190"/>
           </a:xfrm>
           <a:prstGeom prst="roundRect">
@@ -6248,8 +6164,8 @@
         </p:nvSpPr>
         <p:spPr>
           <a:xfrm>
-            <a:off x="4243189" y="4778358"/>
-            <a:ext cx="779396" cy="463190"/>
+            <a:off x="4957697" y="4709989"/>
+            <a:ext cx="759987" cy="463190"/>
           </a:xfrm>
           <a:prstGeom prst="roundRect">
             <a:avLst/>
@@ -6302,639 +6218,6 @@
                 <a:schemeClr val="tx1"/>
               </a:solidFill>
             </a:endParaRPr>
-          </a:p>
-        </p:txBody>
-      </p:sp>
-      <p:sp>
-        <p:nvSpPr>
-          <p:cNvPr id="56" name="Freeform: Shape 55">
-            <a:extLst>
-              <a:ext uri="{FF2B5EF4-FFF2-40B4-BE49-F238E27FC236}">
-                <a16:creationId xmlns:a16="http://schemas.microsoft.com/office/drawing/2014/main" id="{F5663194-0C77-17A8-B536-99D3498DB519}"/>
-              </a:ext>
-            </a:extLst>
-          </p:cNvPr>
-          <p:cNvSpPr/>
-          <p:nvPr/>
-        </p:nvSpPr>
-        <p:spPr>
-          <a:xfrm>
-            <a:off x="1677775" y="6834186"/>
-            <a:ext cx="2951455" cy="1595978"/>
-          </a:xfrm>
-          <a:custGeom>
-            <a:avLst/>
-            <a:gdLst>
-              <a:gd name="connsiteX0" fmla="*/ 141598 w 2641744"/>
-              <a:gd name="connsiteY0" fmla="*/ 233717 h 1589333"/>
-              <a:gd name="connsiteX1" fmla="*/ 170627 w 2641744"/>
-              <a:gd name="connsiteY1" fmla="*/ 1336803 h 1589333"/>
-              <a:gd name="connsiteX2" fmla="*/ 1622055 w 2641744"/>
-              <a:gd name="connsiteY2" fmla="*/ 1583546 h 1589333"/>
-              <a:gd name="connsiteX3" fmla="*/ 2449370 w 2641744"/>
-              <a:gd name="connsiteY3" fmla="*/ 1191660 h 1589333"/>
-              <a:gd name="connsiteX4" fmla="*/ 2536455 w 2641744"/>
-              <a:gd name="connsiteY4" fmla="*/ 204688 h 1589333"/>
-              <a:gd name="connsiteX5" fmla="*/ 1186627 w 2641744"/>
-              <a:gd name="connsiteY5" fmla="*/ 1488 h 1589333"/>
-              <a:gd name="connsiteX6" fmla="*/ 141598 w 2641744"/>
-              <a:gd name="connsiteY6" fmla="*/ 233717 h 1589333"/>
-            </a:gdLst>
-            <a:ahLst/>
-            <a:cxnLst>
-              <a:cxn ang="0">
-                <a:pos x="connsiteX0" y="connsiteY0"/>
-              </a:cxn>
-              <a:cxn ang="0">
-                <a:pos x="connsiteX1" y="connsiteY1"/>
-              </a:cxn>
-              <a:cxn ang="0">
-                <a:pos x="connsiteX2" y="connsiteY2"/>
-              </a:cxn>
-              <a:cxn ang="0">
-                <a:pos x="connsiteX3" y="connsiteY3"/>
-              </a:cxn>
-              <a:cxn ang="0">
-                <a:pos x="connsiteX4" y="connsiteY4"/>
-              </a:cxn>
-              <a:cxn ang="0">
-                <a:pos x="connsiteX5" y="connsiteY5"/>
-              </a:cxn>
-              <a:cxn ang="0">
-                <a:pos x="connsiteX6" y="connsiteY6"/>
-              </a:cxn>
-            </a:cxnLst>
-            <a:rect l="l" t="t" r="r" b="b"/>
-            <a:pathLst>
-              <a:path w="2641744" h="1589333">
-                <a:moveTo>
-                  <a:pt x="141598" y="233717"/>
-                </a:moveTo>
-                <a:cubicBezTo>
-                  <a:pt x="-27735" y="456270"/>
-                  <a:pt x="-76116" y="1111832"/>
-                  <a:pt x="170627" y="1336803"/>
-                </a:cubicBezTo>
-                <a:cubicBezTo>
-                  <a:pt x="417370" y="1561775"/>
-                  <a:pt x="1242265" y="1607736"/>
-                  <a:pt x="1622055" y="1583546"/>
-                </a:cubicBezTo>
-                <a:cubicBezTo>
-                  <a:pt x="2001845" y="1559356"/>
-                  <a:pt x="2296970" y="1421470"/>
-                  <a:pt x="2449370" y="1191660"/>
-                </a:cubicBezTo>
-                <a:cubicBezTo>
-                  <a:pt x="2601770" y="961850"/>
-                  <a:pt x="2746912" y="403050"/>
-                  <a:pt x="2536455" y="204688"/>
-                </a:cubicBezTo>
-                <a:cubicBezTo>
-                  <a:pt x="2325998" y="6326"/>
-                  <a:pt x="1585770" y="-5769"/>
-                  <a:pt x="1186627" y="1488"/>
-                </a:cubicBezTo>
-                <a:cubicBezTo>
-                  <a:pt x="787484" y="8745"/>
-                  <a:pt x="310931" y="11164"/>
-                  <a:pt x="141598" y="233717"/>
-                </a:cubicBezTo>
-                <a:close/>
-              </a:path>
-            </a:pathLst>
-          </a:custGeom>
-          <a:solidFill>
-            <a:schemeClr val="bg1">
-              <a:alpha val="46000"/>
-            </a:schemeClr>
-          </a:solidFill>
-          <a:ln>
-            <a:solidFill>
-              <a:schemeClr val="bg1"/>
-            </a:solidFill>
-          </a:ln>
-        </p:spPr>
-        <p:style>
-          <a:lnRef idx="2">
-            <a:schemeClr val="accent1">
-              <a:shade val="15000"/>
-            </a:schemeClr>
-          </a:lnRef>
-          <a:fillRef idx="1">
-            <a:schemeClr val="accent1"/>
-          </a:fillRef>
-          <a:effectRef idx="0">
-            <a:schemeClr val="accent1"/>
-          </a:effectRef>
-          <a:fontRef idx="minor">
-            <a:schemeClr val="lt1"/>
-          </a:fontRef>
-        </p:style>
-        <p:txBody>
-          <a:bodyPr rtlCol="0" anchor="ctr"/>
-          <a:lstStyle/>
-          <a:p>
-            <a:pPr algn="ctr"/>
-            <a:endParaRPr lang="nl-NL"/>
-          </a:p>
-        </p:txBody>
-      </p:sp>
-      <p:sp>
-        <p:nvSpPr>
-          <p:cNvPr id="57" name="TextBox 56">
-            <a:extLst>
-              <a:ext uri="{FF2B5EF4-FFF2-40B4-BE49-F238E27FC236}">
-                <a16:creationId xmlns:a16="http://schemas.microsoft.com/office/drawing/2014/main" id="{A6FDD617-2FF8-3FA0-0149-3CBCD849343C}"/>
-              </a:ext>
-            </a:extLst>
-          </p:cNvPr>
-          <p:cNvSpPr txBox="1"/>
-          <p:nvPr/>
-        </p:nvSpPr>
-        <p:spPr>
-          <a:xfrm>
-            <a:off x="1583222" y="7100865"/>
-            <a:ext cx="1631865" cy="584775"/>
-          </a:xfrm>
-          <a:prstGeom prst="rect">
-            <a:avLst/>
-          </a:prstGeom>
-          <a:noFill/>
-        </p:spPr>
-        <p:txBody>
-          <a:bodyPr wrap="square" rtlCol="0">
-            <a:spAutoFit/>
-          </a:bodyPr>
-          <a:lstStyle/>
-          <a:p>
-            <a:pPr algn="r" defTabSz="1097280">
-              <a:defRPr/>
-            </a:pPr>
-            <a:r>
-              <a:rPr lang="en-US" sz="1600" i="1" kern="0" dirty="0">
-                <a:solidFill>
-                  <a:prstClr val="black"/>
-                </a:solidFill>
-                <a:latin typeface="Calibri" panose="020F0502020204030204" pitchFamily="34" charset="0"/>
-                <a:ea typeface="Calibri" panose="020F0502020204030204" pitchFamily="34" charset="0"/>
-                <a:cs typeface="Calibri" panose="020F0502020204030204" pitchFamily="34" charset="0"/>
-              </a:rPr>
-              <a:t>Search methods</a:t>
-            </a:r>
-          </a:p>
-          <a:p>
-            <a:pPr algn="r" defTabSz="1097280">
-              <a:defRPr/>
-            </a:pPr>
-            <a:r>
-              <a:rPr lang="en-US" sz="1600" i="1" kern="0" dirty="0">
-                <a:solidFill>
-                  <a:prstClr val="black"/>
-                </a:solidFill>
-                <a:latin typeface="Calibri" panose="020F0502020204030204" pitchFamily="34" charset="0"/>
-                <a:ea typeface="Calibri" panose="020F0502020204030204" pitchFamily="34" charset="0"/>
-                <a:cs typeface="Calibri" panose="020F0502020204030204" pitchFamily="34" charset="0"/>
-              </a:rPr>
-              <a:t>Discrete datasets</a:t>
-            </a:r>
-          </a:p>
-        </p:txBody>
-      </p:sp>
-      <p:sp>
-        <p:nvSpPr>
-          <p:cNvPr id="58" name="Rectangle: Rounded Corners 57">
-            <a:extLst>
-              <a:ext uri="{FF2B5EF4-FFF2-40B4-BE49-F238E27FC236}">
-                <a16:creationId xmlns:a16="http://schemas.microsoft.com/office/drawing/2014/main" id="{675B00C7-1D1E-D0A0-E46F-6F72C257F168}"/>
-              </a:ext>
-            </a:extLst>
-          </p:cNvPr>
-          <p:cNvSpPr/>
-          <p:nvPr/>
-        </p:nvSpPr>
-        <p:spPr>
-          <a:xfrm>
-            <a:off x="2277421" y="7778496"/>
-            <a:ext cx="1807614" cy="463190"/>
-          </a:xfrm>
-          <a:prstGeom prst="roundRect">
-            <a:avLst/>
-          </a:prstGeom>
-          <a:solidFill>
-            <a:schemeClr val="bg1">
-              <a:lumMod val="95000"/>
-            </a:schemeClr>
-          </a:solidFill>
-          <a:ln>
-            <a:solidFill>
-              <a:schemeClr val="tx2">
-                <a:lumMod val="90000"/>
-                <a:lumOff val="10000"/>
-              </a:schemeClr>
-            </a:solidFill>
-          </a:ln>
-        </p:spPr>
-        <p:style>
-          <a:lnRef idx="2">
-            <a:schemeClr val="accent1">
-              <a:shade val="15000"/>
-            </a:schemeClr>
-          </a:lnRef>
-          <a:fillRef idx="1">
-            <a:schemeClr val="accent1"/>
-          </a:fillRef>
-          <a:effectRef idx="0">
-            <a:schemeClr val="accent1"/>
-          </a:effectRef>
-          <a:fontRef idx="minor">
-            <a:schemeClr val="lt1"/>
-          </a:fontRef>
-        </p:style>
-        <p:txBody>
-          <a:bodyPr rtlCol="0" anchor="ctr"/>
-          <a:lstStyle/>
-          <a:p>
-            <a:pPr algn="ctr"/>
-            <a:r>
-              <a:rPr lang="en-US" kern="0" dirty="0">
-                <a:solidFill>
-                  <a:prstClr val="black"/>
-                </a:solidFill>
-                <a:latin typeface="Calibri" panose="020F0502020204030204" pitchFamily="34" charset="0"/>
-                <a:ea typeface="Calibri" panose="020F0502020204030204" pitchFamily="34" charset="0"/>
-                <a:cs typeface="Calibri" panose="020F0502020204030204" pitchFamily="34" charset="0"/>
-              </a:rPr>
-              <a:t>Hill-</a:t>
-            </a:r>
-            <a:r>
-              <a:rPr lang="en-US" kern="0" dirty="0" err="1">
-                <a:solidFill>
-                  <a:prstClr val="black"/>
-                </a:solidFill>
-                <a:latin typeface="Calibri" panose="020F0502020204030204" pitchFamily="34" charset="0"/>
-                <a:ea typeface="Calibri" panose="020F0502020204030204" pitchFamily="34" charset="0"/>
-                <a:cs typeface="Calibri" panose="020F0502020204030204" pitchFamily="34" charset="0"/>
-              </a:rPr>
-              <a:t>Climbsearch</a:t>
-            </a:r>
-            <a:endParaRPr lang="nl-NL" kern="0" dirty="0">
-              <a:solidFill>
-                <a:prstClr val="black"/>
-              </a:solidFill>
-              <a:latin typeface="Calibri" panose="020F0502020204030204" pitchFamily="34" charset="0"/>
-              <a:ea typeface="Calibri" panose="020F0502020204030204" pitchFamily="34" charset="0"/>
-              <a:cs typeface="Calibri" panose="020F0502020204030204" pitchFamily="34" charset="0"/>
-            </a:endParaRPr>
-          </a:p>
-        </p:txBody>
-      </p:sp>
-      <p:sp>
-        <p:nvSpPr>
-          <p:cNvPr id="59" name="Rectangle: Rounded Corners 58">
-            <a:extLst>
-              <a:ext uri="{FF2B5EF4-FFF2-40B4-BE49-F238E27FC236}">
-                <a16:creationId xmlns:a16="http://schemas.microsoft.com/office/drawing/2014/main" id="{6B12E27C-1CDF-EACD-B875-312D35F91B4F}"/>
-              </a:ext>
-            </a:extLst>
-          </p:cNvPr>
-          <p:cNvSpPr/>
-          <p:nvPr/>
-        </p:nvSpPr>
-        <p:spPr>
-          <a:xfrm>
-            <a:off x="3223412" y="7183090"/>
-            <a:ext cx="1260036" cy="463190"/>
-          </a:xfrm>
-          <a:prstGeom prst="roundRect">
-            <a:avLst/>
-          </a:prstGeom>
-          <a:solidFill>
-            <a:schemeClr val="bg1">
-              <a:lumMod val="95000"/>
-            </a:schemeClr>
-          </a:solidFill>
-          <a:ln>
-            <a:solidFill>
-              <a:schemeClr val="tx2">
-                <a:lumMod val="90000"/>
-                <a:lumOff val="10000"/>
-              </a:schemeClr>
-            </a:solidFill>
-          </a:ln>
-        </p:spPr>
-        <p:style>
-          <a:lnRef idx="2">
-            <a:schemeClr val="accent1">
-              <a:shade val="15000"/>
-            </a:schemeClr>
-          </a:lnRef>
-          <a:fillRef idx="1">
-            <a:schemeClr val="accent1"/>
-          </a:fillRef>
-          <a:effectRef idx="0">
-            <a:schemeClr val="accent1"/>
-          </a:effectRef>
-          <a:fontRef idx="minor">
-            <a:schemeClr val="lt1"/>
-          </a:fontRef>
-        </p:style>
-        <p:txBody>
-          <a:bodyPr rtlCol="0" anchor="ctr"/>
-          <a:lstStyle/>
-          <a:p>
-            <a:pPr algn="ctr" defTabSz="1097280">
-              <a:defRPr/>
-            </a:pPr>
-            <a:r>
-              <a:rPr lang="en-US" kern="0" dirty="0">
-                <a:solidFill>
-                  <a:prstClr val="black"/>
-                </a:solidFill>
-                <a:latin typeface="Calibri" panose="020F0502020204030204" pitchFamily="34" charset="0"/>
-                <a:ea typeface="Calibri" panose="020F0502020204030204" pitchFamily="34" charset="0"/>
-                <a:cs typeface="Calibri" panose="020F0502020204030204" pitchFamily="34" charset="0"/>
-              </a:rPr>
-              <a:t>Exhaustive</a:t>
-            </a:r>
-            <a:endParaRPr lang="nl-NL" kern="0" dirty="0">
-              <a:solidFill>
-                <a:prstClr val="black"/>
-              </a:solidFill>
-              <a:latin typeface="Calibri" panose="020F0502020204030204" pitchFamily="34" charset="0"/>
-              <a:ea typeface="Calibri" panose="020F0502020204030204" pitchFamily="34" charset="0"/>
-              <a:cs typeface="Calibri" panose="020F0502020204030204" pitchFamily="34" charset="0"/>
-            </a:endParaRPr>
-          </a:p>
-        </p:txBody>
-      </p:sp>
-      <p:sp>
-        <p:nvSpPr>
-          <p:cNvPr id="60" name="Freeform: Shape 59">
-            <a:extLst>
-              <a:ext uri="{FF2B5EF4-FFF2-40B4-BE49-F238E27FC236}">
-                <a16:creationId xmlns:a16="http://schemas.microsoft.com/office/drawing/2014/main" id="{636CCB27-B636-6A79-570A-587D49EA23EA}"/>
-              </a:ext>
-            </a:extLst>
-          </p:cNvPr>
-          <p:cNvSpPr/>
-          <p:nvPr/>
-        </p:nvSpPr>
-        <p:spPr>
-          <a:xfrm>
-            <a:off x="3522595" y="8274291"/>
-            <a:ext cx="3858111" cy="1578966"/>
-          </a:xfrm>
-          <a:custGeom>
-            <a:avLst/>
-            <a:gdLst>
-              <a:gd name="connsiteX0" fmla="*/ 1969648 w 3570927"/>
-              <a:gd name="connsiteY0" fmla="*/ 26711 h 1366043"/>
-              <a:gd name="connsiteX1" fmla="*/ 619819 w 3570927"/>
-              <a:gd name="connsiteY1" fmla="*/ 142825 h 1366043"/>
-              <a:gd name="connsiteX2" fmla="*/ 111819 w 3570927"/>
-              <a:gd name="connsiteY2" fmla="*/ 752425 h 1366043"/>
-              <a:gd name="connsiteX3" fmla="*/ 97305 w 3570927"/>
-              <a:gd name="connsiteY3" fmla="*/ 1303968 h 1366043"/>
-              <a:gd name="connsiteX4" fmla="*/ 1185877 w 3570927"/>
-              <a:gd name="connsiteY4" fmla="*/ 1318483 h 1366043"/>
-              <a:gd name="connsiteX5" fmla="*/ 3392048 w 3570927"/>
-              <a:gd name="connsiteY5" fmla="*/ 1303968 h 1366043"/>
-              <a:gd name="connsiteX6" fmla="*/ 3275934 w 3570927"/>
-              <a:gd name="connsiteY6" fmla="*/ 534711 h 1366043"/>
-              <a:gd name="connsiteX7" fmla="*/ 1969648 w 3570927"/>
-              <a:gd name="connsiteY7" fmla="*/ 26711 h 1366043"/>
-            </a:gdLst>
-            <a:ahLst/>
-            <a:cxnLst>
-              <a:cxn ang="0">
-                <a:pos x="connsiteX0" y="connsiteY0"/>
-              </a:cxn>
-              <a:cxn ang="0">
-                <a:pos x="connsiteX1" y="connsiteY1"/>
-              </a:cxn>
-              <a:cxn ang="0">
-                <a:pos x="connsiteX2" y="connsiteY2"/>
-              </a:cxn>
-              <a:cxn ang="0">
-                <a:pos x="connsiteX3" y="connsiteY3"/>
-              </a:cxn>
-              <a:cxn ang="0">
-                <a:pos x="connsiteX4" y="connsiteY4"/>
-              </a:cxn>
-              <a:cxn ang="0">
-                <a:pos x="connsiteX5" y="connsiteY5"/>
-              </a:cxn>
-              <a:cxn ang="0">
-                <a:pos x="connsiteX6" y="connsiteY6"/>
-              </a:cxn>
-              <a:cxn ang="0">
-                <a:pos x="connsiteX7" y="connsiteY7"/>
-              </a:cxn>
-            </a:cxnLst>
-            <a:rect l="l" t="t" r="r" b="b"/>
-            <a:pathLst>
-              <a:path w="3570927" h="1366043">
-                <a:moveTo>
-                  <a:pt x="1969648" y="26711"/>
-                </a:moveTo>
-                <a:cubicBezTo>
-                  <a:pt x="1526962" y="-38603"/>
-                  <a:pt x="929457" y="21873"/>
-                  <a:pt x="619819" y="142825"/>
-                </a:cubicBezTo>
-                <a:cubicBezTo>
-                  <a:pt x="310181" y="263777"/>
-                  <a:pt x="198905" y="558901"/>
-                  <a:pt x="111819" y="752425"/>
-                </a:cubicBezTo>
-                <a:cubicBezTo>
-                  <a:pt x="24733" y="945949"/>
-                  <a:pt x="-81705" y="1209625"/>
-                  <a:pt x="97305" y="1303968"/>
-                </a:cubicBezTo>
-                <a:cubicBezTo>
-                  <a:pt x="276315" y="1398311"/>
-                  <a:pt x="1185877" y="1318483"/>
-                  <a:pt x="1185877" y="1318483"/>
-                </a:cubicBezTo>
-                <a:cubicBezTo>
-                  <a:pt x="1735001" y="1318483"/>
-                  <a:pt x="3043705" y="1434597"/>
-                  <a:pt x="3392048" y="1303968"/>
-                </a:cubicBezTo>
-                <a:cubicBezTo>
-                  <a:pt x="3740391" y="1173339"/>
-                  <a:pt x="3513001" y="745168"/>
-                  <a:pt x="3275934" y="534711"/>
-                </a:cubicBezTo>
-                <a:cubicBezTo>
-                  <a:pt x="3038867" y="324254"/>
-                  <a:pt x="2412334" y="92025"/>
-                  <a:pt x="1969648" y="26711"/>
-                </a:cubicBezTo>
-                <a:close/>
-              </a:path>
-            </a:pathLst>
-          </a:custGeom>
-          <a:solidFill>
-            <a:schemeClr val="bg1">
-              <a:alpha val="46000"/>
-            </a:schemeClr>
-          </a:solidFill>
-          <a:ln>
-            <a:solidFill>
-              <a:schemeClr val="bg1"/>
-            </a:solidFill>
-          </a:ln>
-        </p:spPr>
-        <p:style>
-          <a:lnRef idx="2">
-            <a:schemeClr val="accent1">
-              <a:shade val="15000"/>
-            </a:schemeClr>
-          </a:lnRef>
-          <a:fillRef idx="1">
-            <a:schemeClr val="accent1"/>
-          </a:fillRef>
-          <a:effectRef idx="0">
-            <a:schemeClr val="accent1"/>
-          </a:effectRef>
-          <a:fontRef idx="minor">
-            <a:schemeClr val="lt1"/>
-          </a:fontRef>
-        </p:style>
-        <p:txBody>
-          <a:bodyPr rtlCol="0" anchor="ctr"/>
-          <a:lstStyle/>
-          <a:p>
-            <a:pPr algn="ctr"/>
-            <a:endParaRPr lang="nl-NL"/>
-          </a:p>
-        </p:txBody>
-      </p:sp>
-      <p:sp>
-        <p:nvSpPr>
-          <p:cNvPr id="61" name="Freeform: Shape 60">
-            <a:extLst>
-              <a:ext uri="{FF2B5EF4-FFF2-40B4-BE49-F238E27FC236}">
-                <a16:creationId xmlns:a16="http://schemas.microsoft.com/office/drawing/2014/main" id="{11A9D2ED-5E85-BE87-2B10-FCD3F7307233}"/>
-              </a:ext>
-            </a:extLst>
-          </p:cNvPr>
-          <p:cNvSpPr/>
-          <p:nvPr/>
-        </p:nvSpPr>
-        <p:spPr>
-          <a:xfrm>
-            <a:off x="8042219" y="8631702"/>
-            <a:ext cx="5130561" cy="1462806"/>
-          </a:xfrm>
-          <a:custGeom>
-            <a:avLst/>
-            <a:gdLst>
-              <a:gd name="connsiteX0" fmla="*/ 1342459 w 4905055"/>
-              <a:gd name="connsiteY0" fmla="*/ 33883 h 1462806"/>
-              <a:gd name="connsiteX1" fmla="*/ 413544 w 4905055"/>
-              <a:gd name="connsiteY1" fmla="*/ 556398 h 1462806"/>
-              <a:gd name="connsiteX2" fmla="*/ 311944 w 4905055"/>
-              <a:gd name="connsiteY2" fmla="*/ 1296626 h 1462806"/>
-              <a:gd name="connsiteX3" fmla="*/ 4463030 w 4905055"/>
-              <a:gd name="connsiteY3" fmla="*/ 1369198 h 1462806"/>
-              <a:gd name="connsiteX4" fmla="*/ 4434001 w 4905055"/>
-              <a:gd name="connsiteY4" fmla="*/ 193541 h 1462806"/>
-              <a:gd name="connsiteX5" fmla="*/ 1342459 w 4905055"/>
-              <a:gd name="connsiteY5" fmla="*/ 33883 h 1462806"/>
-            </a:gdLst>
-            <a:ahLst/>
-            <a:cxnLst>
-              <a:cxn ang="0">
-                <a:pos x="connsiteX0" y="connsiteY0"/>
-              </a:cxn>
-              <a:cxn ang="0">
-                <a:pos x="connsiteX1" y="connsiteY1"/>
-              </a:cxn>
-              <a:cxn ang="0">
-                <a:pos x="connsiteX2" y="connsiteY2"/>
-              </a:cxn>
-              <a:cxn ang="0">
-                <a:pos x="connsiteX3" y="connsiteY3"/>
-              </a:cxn>
-              <a:cxn ang="0">
-                <a:pos x="connsiteX4" y="connsiteY4"/>
-              </a:cxn>
-              <a:cxn ang="0">
-                <a:pos x="connsiteX5" y="connsiteY5"/>
-              </a:cxn>
-            </a:cxnLst>
-            <a:rect l="l" t="t" r="r" b="b"/>
-            <a:pathLst>
-              <a:path w="4905055" h="1462806">
-                <a:moveTo>
-                  <a:pt x="1342459" y="33883"/>
-                </a:moveTo>
-                <a:cubicBezTo>
-                  <a:pt x="672383" y="94359"/>
-                  <a:pt x="585296" y="345941"/>
-                  <a:pt x="413544" y="556398"/>
-                </a:cubicBezTo>
-                <a:cubicBezTo>
-                  <a:pt x="241792" y="766855"/>
-                  <a:pt x="-362970" y="1161159"/>
-                  <a:pt x="311944" y="1296626"/>
-                </a:cubicBezTo>
-                <a:cubicBezTo>
-                  <a:pt x="986858" y="1432093"/>
-                  <a:pt x="3776021" y="1553046"/>
-                  <a:pt x="4463030" y="1369198"/>
-                </a:cubicBezTo>
-                <a:cubicBezTo>
-                  <a:pt x="5150040" y="1185351"/>
-                  <a:pt x="4954096" y="411255"/>
-                  <a:pt x="4434001" y="193541"/>
-                </a:cubicBezTo>
-                <a:cubicBezTo>
-                  <a:pt x="3913906" y="-24173"/>
-                  <a:pt x="2012535" y="-26593"/>
-                  <a:pt x="1342459" y="33883"/>
-                </a:cubicBezTo>
-                <a:close/>
-              </a:path>
-            </a:pathLst>
-          </a:custGeom>
-          <a:solidFill>
-            <a:schemeClr val="bg1">
-              <a:alpha val="46000"/>
-            </a:schemeClr>
-          </a:solidFill>
-          <a:ln>
-            <a:solidFill>
-              <a:schemeClr val="bg1"/>
-            </a:solidFill>
-          </a:ln>
-        </p:spPr>
-        <p:style>
-          <a:lnRef idx="2">
-            <a:schemeClr val="accent1">
-              <a:shade val="15000"/>
-            </a:schemeClr>
-          </a:lnRef>
-          <a:fillRef idx="1">
-            <a:schemeClr val="accent1"/>
-          </a:fillRef>
-          <a:effectRef idx="0">
-            <a:schemeClr val="accent1"/>
-          </a:effectRef>
-          <a:fontRef idx="minor">
-            <a:schemeClr val="lt1"/>
-          </a:fontRef>
-        </p:style>
-        <p:txBody>
-          <a:bodyPr rtlCol="0" anchor="ctr"/>
-          <a:lstStyle/>
-          <a:p>
-            <a:pPr algn="ctr"/>
-            <a:endParaRPr lang="nl-NL"/>
           </a:p>
         </p:txBody>
       </p:sp>
@@ -7075,97 +6358,20 @@
       </p:sp>
       <p:sp>
         <p:nvSpPr>
-          <p:cNvPr id="63" name="TextBox 62">
-            <a:extLst>
-              <a:ext uri="{FF2B5EF4-FFF2-40B4-BE49-F238E27FC236}">
-                <a16:creationId xmlns:a16="http://schemas.microsoft.com/office/drawing/2014/main" id="{2EC81742-F4D8-B5E2-F7AD-8C0BAB13089F}"/>
-              </a:ext>
-            </a:extLst>
-          </p:cNvPr>
-          <p:cNvSpPr txBox="1"/>
+          <p:cNvPr id="263" name="Rectangle: Rounded Corners 262">
+            <a:extLst>
+              <a:ext uri="{FF2B5EF4-FFF2-40B4-BE49-F238E27FC236}">
+                <a16:creationId xmlns:a16="http://schemas.microsoft.com/office/drawing/2014/main" id="{960ED84A-F1EB-D8CB-BC5F-0F71608A9518}"/>
+              </a:ext>
+            </a:extLst>
+          </p:cNvPr>
+          <p:cNvSpPr/>
           <p:nvPr/>
         </p:nvSpPr>
         <p:spPr>
           <a:xfrm>
-            <a:off x="3664527" y="8969828"/>
-            <a:ext cx="1569661" cy="830997"/>
-          </a:xfrm>
-          <a:prstGeom prst="rect">
-            <a:avLst/>
-          </a:prstGeom>
-          <a:noFill/>
-        </p:spPr>
-        <p:txBody>
-          <a:bodyPr wrap="none" rtlCol="0">
-            <a:spAutoFit/>
-          </a:bodyPr>
-          <a:lstStyle/>
-          <a:p>
-            <a:pPr algn="r" defTabSz="1097280">
-              <a:defRPr/>
-            </a:pPr>
-            <a:r>
-              <a:rPr lang="en-US" sz="1600" i="1" kern="0" dirty="0">
-                <a:solidFill>
-                  <a:prstClr val="black"/>
-                </a:solidFill>
-                <a:latin typeface="Calibri" panose="020F0502020204030204" pitchFamily="34" charset="0"/>
-                <a:ea typeface="Calibri" panose="020F0502020204030204" pitchFamily="34" charset="0"/>
-                <a:cs typeface="Calibri" panose="020F0502020204030204" pitchFamily="34" charset="0"/>
-              </a:rPr>
-              <a:t>Search methods</a:t>
-            </a:r>
-          </a:p>
-          <a:p>
-            <a:pPr algn="r" defTabSz="1097280">
-              <a:defRPr/>
-            </a:pPr>
-            <a:r>
-              <a:rPr lang="en-US" sz="1600" i="1" kern="0" dirty="0">
-                <a:solidFill>
-                  <a:prstClr val="black"/>
-                </a:solidFill>
-                <a:latin typeface="Calibri" panose="020F0502020204030204" pitchFamily="34" charset="0"/>
-                <a:ea typeface="Calibri" panose="020F0502020204030204" pitchFamily="34" charset="0"/>
-                <a:cs typeface="Calibri" panose="020F0502020204030204" pitchFamily="34" charset="0"/>
-              </a:rPr>
-              <a:t>Continuous and</a:t>
-            </a:r>
-          </a:p>
-          <a:p>
-            <a:pPr algn="r" defTabSz="1097280">
-              <a:defRPr/>
-            </a:pPr>
-            <a:r>
-              <a:rPr lang="en-US" sz="1600" i="1" kern="0" dirty="0">
-                <a:solidFill>
-                  <a:prstClr val="black"/>
-                </a:solidFill>
-                <a:latin typeface="Calibri" panose="020F0502020204030204" pitchFamily="34" charset="0"/>
-                <a:ea typeface="Calibri" panose="020F0502020204030204" pitchFamily="34" charset="0"/>
-                <a:cs typeface="Calibri" panose="020F0502020204030204" pitchFamily="34" charset="0"/>
-              </a:rPr>
-              <a:t>hybrid datasets</a:t>
-            </a:r>
-          </a:p>
-        </p:txBody>
-      </p:sp>
-      <p:sp>
-        <p:nvSpPr>
-          <p:cNvPr id="256" name="Rectangle: Rounded Corners 255">
-            <a:extLst>
-              <a:ext uri="{FF2B5EF4-FFF2-40B4-BE49-F238E27FC236}">
-                <a16:creationId xmlns:a16="http://schemas.microsoft.com/office/drawing/2014/main" id="{DF32CDBC-7785-4B24-778E-969EAAFEB232}"/>
-              </a:ext>
-            </a:extLst>
-          </p:cNvPr>
-          <p:cNvSpPr/>
-          <p:nvPr/>
-        </p:nvSpPr>
-        <p:spPr>
-          <a:xfrm>
-            <a:off x="4377984" y="8500470"/>
-            <a:ext cx="1778123" cy="463190"/>
+            <a:off x="13859346" y="3500385"/>
+            <a:ext cx="798852" cy="463190"/>
           </a:xfrm>
           <a:prstGeom prst="roundRect">
             <a:avLst/>
@@ -7216,20 +6422,9 @@
                 <a:ea typeface="Calibri" panose="020F0502020204030204" pitchFamily="34" charset="0"/>
                 <a:cs typeface="Calibri" panose="020F0502020204030204" pitchFamily="34" charset="0"/>
               </a:rPr>
-              <a:t>Direct-</a:t>
+              <a:t>Chi2</a:t>
             </a:r>
-            <a:r>
-              <a:rPr lang="en-US" kern="0" dirty="0" err="1">
-                <a:solidFill>
-                  <a:prstClr val="black"/>
-                </a:solidFill>
-                <a:latin typeface="Calibri" panose="020F0502020204030204" pitchFamily="34" charset="0"/>
-                <a:ea typeface="Calibri" panose="020F0502020204030204" pitchFamily="34" charset="0"/>
-                <a:cs typeface="Calibri" panose="020F0502020204030204" pitchFamily="34" charset="0"/>
-              </a:rPr>
-              <a:t>LiNGAM</a:t>
-            </a:r>
-            <a:endParaRPr lang="en-US" kern="0" dirty="0">
+            <a:endParaRPr lang="nl-NL" kern="0" dirty="0">
               <a:solidFill>
                 <a:prstClr val="black"/>
               </a:solidFill>
@@ -7242,10 +6437,10 @@
       </p:sp>
       <p:sp>
         <p:nvSpPr>
-          <p:cNvPr id="257" name="Rectangle: Rounded Corners 256">
-            <a:extLst>
-              <a:ext uri="{FF2B5EF4-FFF2-40B4-BE49-F238E27FC236}">
-                <a16:creationId xmlns:a16="http://schemas.microsoft.com/office/drawing/2014/main" id="{1E012FE1-4E90-7E05-F754-687CD023E869}"/>
+          <p:cNvPr id="264" name="Rectangle: Rounded Corners 263">
+            <a:extLst>
+              <a:ext uri="{FF2B5EF4-FFF2-40B4-BE49-F238E27FC236}">
+                <a16:creationId xmlns:a16="http://schemas.microsoft.com/office/drawing/2014/main" id="{D3B8595E-F5CB-7DDD-ACE5-5A0A9672BC0A}"/>
               </a:ext>
             </a:extLst>
           </p:cNvPr>
@@ -7254,8 +6449,8 @@
         </p:nvSpPr>
         <p:spPr>
           <a:xfrm>
-            <a:off x="5323636" y="9112294"/>
-            <a:ext cx="1778123" cy="463190"/>
+            <a:off x="6393084" y="2512755"/>
+            <a:ext cx="798852" cy="463190"/>
           </a:xfrm>
           <a:prstGeom prst="roundRect">
             <a:avLst/>
@@ -7306,20 +6501,9 @@
                 <a:ea typeface="Calibri" panose="020F0502020204030204" pitchFamily="34" charset="0"/>
                 <a:cs typeface="Calibri" panose="020F0502020204030204" pitchFamily="34" charset="0"/>
               </a:rPr>
-              <a:t>ICA-</a:t>
+              <a:t>Chi2</a:t>
             </a:r>
-            <a:r>
-              <a:rPr lang="en-US" kern="0" dirty="0" err="1">
-                <a:solidFill>
-                  <a:prstClr val="black"/>
-                </a:solidFill>
-                <a:latin typeface="Calibri" panose="020F0502020204030204" pitchFamily="34" charset="0"/>
-                <a:ea typeface="Calibri" panose="020F0502020204030204" pitchFamily="34" charset="0"/>
-                <a:cs typeface="Calibri" panose="020F0502020204030204" pitchFamily="34" charset="0"/>
-              </a:rPr>
-              <a:t>LiNGAM</a:t>
-            </a:r>
-            <a:endParaRPr lang="en-US" kern="0" dirty="0">
+            <a:endParaRPr lang="nl-NL" kern="0" dirty="0">
               <a:solidFill>
                 <a:prstClr val="black"/>
               </a:solidFill>
@@ -7332,113 +6516,20 @@
       </p:sp>
       <p:sp>
         <p:nvSpPr>
-          <p:cNvPr id="258" name="TextBox 257">
-            <a:extLst>
-              <a:ext uri="{FF2B5EF4-FFF2-40B4-BE49-F238E27FC236}">
-                <a16:creationId xmlns:a16="http://schemas.microsoft.com/office/drawing/2014/main" id="{F31F9E1C-35B5-EB4D-C2D7-57BB03F075ED}"/>
-              </a:ext>
-            </a:extLst>
-          </p:cNvPr>
-          <p:cNvSpPr txBox="1"/>
+          <p:cNvPr id="265" name="Rectangle: Rounded Corners 264">
+            <a:extLst>
+              <a:ext uri="{FF2B5EF4-FFF2-40B4-BE49-F238E27FC236}">
+                <a16:creationId xmlns:a16="http://schemas.microsoft.com/office/drawing/2014/main" id="{4752000E-4727-F8BB-F594-8933A05F3CCF}"/>
+              </a:ext>
+            </a:extLst>
+          </p:cNvPr>
+          <p:cNvSpPr/>
           <p:nvPr/>
         </p:nvSpPr>
         <p:spPr>
           <a:xfrm>
-            <a:off x="11386227" y="8910199"/>
-            <a:ext cx="1627753" cy="1077218"/>
-          </a:xfrm>
-          <a:prstGeom prst="rect">
-            <a:avLst/>
-          </a:prstGeom>
-          <a:noFill/>
-        </p:spPr>
-        <p:txBody>
-          <a:bodyPr wrap="square" rtlCol="0">
-            <a:spAutoFit/>
-          </a:bodyPr>
-          <a:lstStyle/>
-          <a:p>
-            <a:pPr defTabSz="1097280">
-              <a:defRPr/>
-            </a:pPr>
-            <a:r>
-              <a:rPr lang="en-US" sz="1600" i="1" kern="0" dirty="0">
-                <a:solidFill>
-                  <a:prstClr val="black"/>
-                </a:solidFill>
-                <a:latin typeface="Calibri" panose="020F0502020204030204" pitchFamily="34" charset="0"/>
-                <a:ea typeface="Calibri" panose="020F0502020204030204" pitchFamily="34" charset="0"/>
-                <a:cs typeface="Calibri" panose="020F0502020204030204" pitchFamily="34" charset="0"/>
-              </a:rPr>
-              <a:t>Search methods</a:t>
-            </a:r>
-          </a:p>
-          <a:p>
-            <a:pPr defTabSz="1097280">
-              <a:defRPr/>
-            </a:pPr>
-            <a:r>
-              <a:rPr lang="en-US" sz="1600" i="1" kern="0" dirty="0">
-                <a:solidFill>
-                  <a:prstClr val="black"/>
-                </a:solidFill>
-                <a:latin typeface="Calibri" panose="020F0502020204030204" pitchFamily="34" charset="0"/>
-                <a:ea typeface="Calibri" panose="020F0502020204030204" pitchFamily="34" charset="0"/>
-                <a:cs typeface="Calibri" panose="020F0502020204030204" pitchFamily="34" charset="0"/>
-              </a:rPr>
-              <a:t>Discrete datasets</a:t>
-            </a:r>
-          </a:p>
-          <a:p>
-            <a:pPr defTabSz="1097280">
-              <a:defRPr/>
-            </a:pPr>
-            <a:r>
-              <a:rPr lang="en-US" sz="1600" i="1" kern="0" dirty="0">
-                <a:solidFill>
-                  <a:prstClr val="black"/>
-                </a:solidFill>
-                <a:latin typeface="Calibri" panose="020F0502020204030204" pitchFamily="34" charset="0"/>
-                <a:ea typeface="Calibri" panose="020F0502020204030204" pitchFamily="34" charset="0"/>
-                <a:cs typeface="Calibri" panose="020F0502020204030204" pitchFamily="34" charset="0"/>
-              </a:rPr>
-              <a:t>Requires setting</a:t>
-            </a:r>
-          </a:p>
-          <a:p>
-            <a:pPr defTabSz="1097280">
-              <a:defRPr/>
-            </a:pPr>
-            <a:r>
-              <a:rPr lang="en-US" sz="1600" i="1" kern="0" dirty="0">
-                <a:solidFill>
-                  <a:prstClr val="black"/>
-                </a:solidFill>
-                <a:latin typeface="Calibri" panose="020F0502020204030204" pitchFamily="34" charset="0"/>
-                <a:ea typeface="Calibri" panose="020F0502020204030204" pitchFamily="34" charset="0"/>
-                <a:cs typeface="Calibri" panose="020F0502020204030204" pitchFamily="34" charset="0"/>
-              </a:rPr>
-              <a:t>Root node</a:t>
-            </a:r>
-          </a:p>
-        </p:txBody>
-      </p:sp>
-      <p:sp>
-        <p:nvSpPr>
-          <p:cNvPr id="259" name="Rectangle: Rounded Corners 258">
-            <a:extLst>
-              <a:ext uri="{FF2B5EF4-FFF2-40B4-BE49-F238E27FC236}">
-                <a16:creationId xmlns:a16="http://schemas.microsoft.com/office/drawing/2014/main" id="{2D7B7C3E-B7DD-4F9F-FDDA-AB9CDE163A86}"/>
-              </a:ext>
-            </a:extLst>
-          </p:cNvPr>
-          <p:cNvSpPr/>
-          <p:nvPr/>
-        </p:nvSpPr>
-        <p:spPr>
-          <a:xfrm>
-            <a:off x="8573170" y="9357360"/>
-            <a:ext cx="1047568" cy="463190"/>
+            <a:off x="4308472" y="1994751"/>
+            <a:ext cx="1660450" cy="463190"/>
           </a:xfrm>
           <a:prstGeom prst="roundRect">
             <a:avLst/>
@@ -7489,17 +6580,25 @@
                 <a:ea typeface="Calibri" panose="020F0502020204030204" pitchFamily="34" charset="0"/>
                 <a:cs typeface="Calibri" panose="020F0502020204030204" pitchFamily="34" charset="0"/>
               </a:rPr>
-              <a:t>TAN</a:t>
+              <a:t>Log Likelihood</a:t>
             </a:r>
+            <a:endParaRPr lang="nl-NL" kern="0" dirty="0">
+              <a:solidFill>
+                <a:prstClr val="black"/>
+              </a:solidFill>
+              <a:latin typeface="Calibri" panose="020F0502020204030204" pitchFamily="34" charset="0"/>
+              <a:ea typeface="Calibri" panose="020F0502020204030204" pitchFamily="34" charset="0"/>
+              <a:cs typeface="Calibri" panose="020F0502020204030204" pitchFamily="34" charset="0"/>
+            </a:endParaRPr>
           </a:p>
         </p:txBody>
       </p:sp>
       <p:sp>
         <p:nvSpPr>
-          <p:cNvPr id="260" name="Rectangle: Rounded Corners 259">
-            <a:extLst>
-              <a:ext uri="{FF2B5EF4-FFF2-40B4-BE49-F238E27FC236}">
-                <a16:creationId xmlns:a16="http://schemas.microsoft.com/office/drawing/2014/main" id="{EE6E3C20-F68F-19FE-60A2-8579DE9FBF10}"/>
+          <p:cNvPr id="266" name="Rectangle: Rounded Corners 265">
+            <a:extLst>
+              <a:ext uri="{FF2B5EF4-FFF2-40B4-BE49-F238E27FC236}">
+                <a16:creationId xmlns:a16="http://schemas.microsoft.com/office/drawing/2014/main" id="{C42A6560-4DC6-BA6F-D0C9-8D304F6B1475}"/>
               </a:ext>
             </a:extLst>
           </p:cNvPr>
@@ -7508,8 +6607,8 @@
         </p:nvSpPr>
         <p:spPr>
           <a:xfrm>
-            <a:off x="9853040" y="9473383"/>
-            <a:ext cx="1345712" cy="463190"/>
+            <a:off x="5073050" y="2512755"/>
+            <a:ext cx="1242408" cy="463190"/>
           </a:xfrm>
           <a:prstGeom prst="roundRect">
             <a:avLst/>
@@ -7552,7 +6651,7 @@
               <a:defRPr/>
             </a:pPr>
             <a:r>
-              <a:rPr lang="en-US" kern="0" dirty="0" err="1">
+              <a:rPr lang="en-US" kern="0" dirty="0">
                 <a:solidFill>
                   <a:prstClr val="black"/>
                 </a:solidFill>
@@ -7560,7 +6659,7 @@
                 <a:ea typeface="Calibri" panose="020F0502020204030204" pitchFamily="34" charset="0"/>
                 <a:cs typeface="Calibri" panose="020F0502020204030204" pitchFamily="34" charset="0"/>
               </a:rPr>
-              <a:t>NaiveBayes</a:t>
+              <a:t>Pearson R</a:t>
             </a:r>
             <a:endParaRPr lang="nl-NL" kern="0" dirty="0">
               <a:solidFill>
@@ -7575,10 +6674,10 @@
       </p:sp>
       <p:sp>
         <p:nvSpPr>
-          <p:cNvPr id="261" name="Rectangle: Rounded Corners 260">
-            <a:extLst>
-              <a:ext uri="{FF2B5EF4-FFF2-40B4-BE49-F238E27FC236}">
-                <a16:creationId xmlns:a16="http://schemas.microsoft.com/office/drawing/2014/main" id="{30A82E05-FFEA-2E66-3745-69441B9C6E36}"/>
+          <p:cNvPr id="267" name="Rectangle: Rounded Corners 266">
+            <a:extLst>
+              <a:ext uri="{FF2B5EF4-FFF2-40B4-BE49-F238E27FC236}">
+                <a16:creationId xmlns:a16="http://schemas.microsoft.com/office/drawing/2014/main" id="{7994DAC7-6E40-9CBB-69FE-1885C589F922}"/>
               </a:ext>
             </a:extLst>
           </p:cNvPr>
@@ -7587,8 +6686,8 @@
         </p:nvSpPr>
         <p:spPr>
           <a:xfrm>
-            <a:off x="9646821" y="8816116"/>
-            <a:ext cx="1627753" cy="463190"/>
+            <a:off x="3100316" y="3041005"/>
+            <a:ext cx="1780019" cy="463190"/>
           </a:xfrm>
           <a:prstGeom prst="roundRect">
             <a:avLst/>
@@ -7639,7 +6738,7 @@
                 <a:ea typeface="Calibri" panose="020F0502020204030204" pitchFamily="34" charset="0"/>
                 <a:cs typeface="Calibri" panose="020F0502020204030204" pitchFamily="34" charset="0"/>
               </a:rPr>
-              <a:t>Chow-Liu</a:t>
+              <a:t>Freeman Tuckey</a:t>
             </a:r>
             <a:endParaRPr lang="nl-NL" kern="0" dirty="0">
               <a:solidFill>
@@ -7652,55 +6751,12 @@
           </a:p>
         </p:txBody>
       </p:sp>
-      <p:cxnSp>
-        <p:nvCxnSpPr>
-          <p:cNvPr id="262" name="Straight Arrow Connector 261">
-            <a:extLst>
-              <a:ext uri="{FF2B5EF4-FFF2-40B4-BE49-F238E27FC236}">
-                <a16:creationId xmlns:a16="http://schemas.microsoft.com/office/drawing/2014/main" id="{D5C0B5FC-9103-8999-148B-B3EE9AD6E823}"/>
-              </a:ext>
-            </a:extLst>
-          </p:cNvPr>
-          <p:cNvCxnSpPr>
-            <a:cxnSpLocks/>
-            <a:stCxn id="6" idx="2"/>
-          </p:cNvCxnSpPr>
-          <p:nvPr/>
-        </p:nvCxnSpPr>
-        <p:spPr>
-          <a:xfrm>
-            <a:off x="8931827" y="8062710"/>
-            <a:ext cx="318383" cy="593489"/>
-          </a:xfrm>
-          <a:prstGeom prst="straightConnector1">
-            <a:avLst/>
-          </a:prstGeom>
-          <a:ln w="76200">
-            <a:headEnd type="triangle" w="med" len="med"/>
-            <a:tailEnd type="triangle" w="med" len="med"/>
-          </a:ln>
-        </p:spPr>
-        <p:style>
-          <a:lnRef idx="1">
-            <a:schemeClr val="dk1"/>
-          </a:lnRef>
-          <a:fillRef idx="0">
-            <a:schemeClr val="dk1"/>
-          </a:fillRef>
-          <a:effectRef idx="0">
-            <a:schemeClr val="dk1"/>
-          </a:effectRef>
-          <a:fontRef idx="minor">
-            <a:schemeClr val="tx1"/>
-          </a:fontRef>
-        </p:style>
-      </p:cxnSp>
       <p:sp>
         <p:nvSpPr>
-          <p:cNvPr id="263" name="Rectangle: Rounded Corners 262">
-            <a:extLst>
-              <a:ext uri="{FF2B5EF4-FFF2-40B4-BE49-F238E27FC236}">
-                <a16:creationId xmlns:a16="http://schemas.microsoft.com/office/drawing/2014/main" id="{960ED84A-F1EB-D8CB-BC5F-0F71608A9518}"/>
+          <p:cNvPr id="268" name="Rectangle: Rounded Corners 267">
+            <a:extLst>
+              <a:ext uri="{FF2B5EF4-FFF2-40B4-BE49-F238E27FC236}">
+                <a16:creationId xmlns:a16="http://schemas.microsoft.com/office/drawing/2014/main" id="{CE63F579-239C-1194-C35A-ABD6CDF2C18C}"/>
               </a:ext>
             </a:extLst>
           </p:cNvPr>
@@ -7709,8 +6765,8 @@
         </p:nvSpPr>
         <p:spPr>
           <a:xfrm>
-            <a:off x="13859346" y="3500385"/>
-            <a:ext cx="798852" cy="463190"/>
+            <a:off x="3889790" y="2516677"/>
+            <a:ext cx="1126726" cy="463190"/>
           </a:xfrm>
           <a:prstGeom prst="roundRect">
             <a:avLst/>
@@ -7753,7 +6809,7 @@
               <a:defRPr/>
             </a:pPr>
             <a:r>
-              <a:rPr lang="en-US" kern="0" dirty="0">
+              <a:rPr lang="en-US" kern="0" dirty="0" err="1">
                 <a:solidFill>
                   <a:prstClr val="black"/>
                 </a:solidFill>
@@ -7761,7 +6817,7 @@
                 <a:ea typeface="Calibri" panose="020F0502020204030204" pitchFamily="34" charset="0"/>
                 <a:cs typeface="Calibri" panose="020F0502020204030204" pitchFamily="34" charset="0"/>
               </a:rPr>
-              <a:t>Chi2</a:t>
+              <a:t>Neyman</a:t>
             </a:r>
             <a:endParaRPr lang="nl-NL" kern="0" dirty="0">
               <a:solidFill>
@@ -7776,10 +6832,10 @@
       </p:sp>
       <p:sp>
         <p:nvSpPr>
-          <p:cNvPr id="264" name="Rectangle: Rounded Corners 263">
-            <a:extLst>
-              <a:ext uri="{FF2B5EF4-FFF2-40B4-BE49-F238E27FC236}">
-                <a16:creationId xmlns:a16="http://schemas.microsoft.com/office/drawing/2014/main" id="{D3B8595E-F5CB-7DDD-ACE5-5A0A9672BC0A}"/>
+          <p:cNvPr id="269" name="Rectangle: Rounded Corners 268">
+            <a:extLst>
+              <a:ext uri="{FF2B5EF4-FFF2-40B4-BE49-F238E27FC236}">
+                <a16:creationId xmlns:a16="http://schemas.microsoft.com/office/drawing/2014/main" id="{DEF46227-31D3-E85B-DEE0-1ECD81BC28FA}"/>
               </a:ext>
             </a:extLst>
           </p:cNvPr>
@@ -7788,8 +6844,8 @@
         </p:nvSpPr>
         <p:spPr>
           <a:xfrm>
-            <a:off x="6393084" y="2714884"/>
-            <a:ext cx="798852" cy="463190"/>
+            <a:off x="6067583" y="1963328"/>
+            <a:ext cx="1457000" cy="463190"/>
           </a:xfrm>
           <a:prstGeom prst="roundRect">
             <a:avLst/>
@@ -7832,6 +6888,17 @@
               <a:defRPr/>
             </a:pPr>
             <a:r>
+              <a:rPr lang="en-US" kern="0" dirty="0" err="1">
+                <a:solidFill>
+                  <a:prstClr val="black"/>
+                </a:solidFill>
+                <a:latin typeface="Calibri" panose="020F0502020204030204" pitchFamily="34" charset="0"/>
+                <a:ea typeface="Calibri" panose="020F0502020204030204" pitchFamily="34" charset="0"/>
+                <a:cs typeface="Calibri" panose="020F0502020204030204" pitchFamily="34" charset="0"/>
+              </a:rPr>
+              <a:t>Cressie</a:t>
+            </a:r>
+            <a:r>
               <a:rPr lang="en-US" kern="0" dirty="0">
                 <a:solidFill>
                   <a:prstClr val="black"/>
@@ -7840,7 +6907,7 @@
                 <a:ea typeface="Calibri" panose="020F0502020204030204" pitchFamily="34" charset="0"/>
                 <a:cs typeface="Calibri" panose="020F0502020204030204" pitchFamily="34" charset="0"/>
               </a:rPr>
-              <a:t>Chi2</a:t>
+              <a:t> Read</a:t>
             </a:r>
             <a:endParaRPr lang="nl-NL" kern="0" dirty="0">
               <a:solidFill>
@@ -7855,10 +6922,10 @@
       </p:sp>
       <p:sp>
         <p:nvSpPr>
-          <p:cNvPr id="265" name="Rectangle: Rounded Corners 264">
-            <a:extLst>
-              <a:ext uri="{FF2B5EF4-FFF2-40B4-BE49-F238E27FC236}">
-                <a16:creationId xmlns:a16="http://schemas.microsoft.com/office/drawing/2014/main" id="{4752000E-4727-F8BB-F594-8933A05F3CCF}"/>
+          <p:cNvPr id="270" name="Rectangle: Rounded Corners 269">
+            <a:extLst>
+              <a:ext uri="{FF2B5EF4-FFF2-40B4-BE49-F238E27FC236}">
+                <a16:creationId xmlns:a16="http://schemas.microsoft.com/office/drawing/2014/main" id="{963689FF-4D81-A072-7F9C-1E4AC9FFAF2A}"/>
               </a:ext>
             </a:extLst>
           </p:cNvPr>
@@ -7867,8 +6934,8 @@
         </p:nvSpPr>
         <p:spPr>
           <a:xfrm>
-            <a:off x="4308472" y="2196880"/>
-            <a:ext cx="1660450" cy="463190"/>
+            <a:off x="5003176" y="3059754"/>
+            <a:ext cx="548120" cy="463190"/>
           </a:xfrm>
           <a:prstGeom prst="roundRect">
             <a:avLst/>
@@ -7919,7 +6986,7 @@
                 <a:ea typeface="Calibri" panose="020F0502020204030204" pitchFamily="34" charset="0"/>
                 <a:cs typeface="Calibri" panose="020F0502020204030204" pitchFamily="34" charset="0"/>
               </a:rPr>
-              <a:t>Log Likelihood</a:t>
+              <a:t>…</a:t>
             </a:r>
             <a:endParaRPr lang="nl-NL" kern="0" dirty="0">
               <a:solidFill>
@@ -7934,10 +7001,10 @@
       </p:sp>
       <p:sp>
         <p:nvSpPr>
-          <p:cNvPr id="266" name="Rectangle: Rounded Corners 265">
-            <a:extLst>
-              <a:ext uri="{FF2B5EF4-FFF2-40B4-BE49-F238E27FC236}">
-                <a16:creationId xmlns:a16="http://schemas.microsoft.com/office/drawing/2014/main" id="{C42A6560-4DC6-BA6F-D0C9-8D304F6B1475}"/>
+          <p:cNvPr id="271" name="Rectangle: Rounded Corners 270">
+            <a:extLst>
+              <a:ext uri="{FF2B5EF4-FFF2-40B4-BE49-F238E27FC236}">
+                <a16:creationId xmlns:a16="http://schemas.microsoft.com/office/drawing/2014/main" id="{51F70D03-807C-1AF5-47C7-057344B7E7A8}"/>
               </a:ext>
             </a:extLst>
           </p:cNvPr>
@@ -7946,8 +7013,8 @@
         </p:nvSpPr>
         <p:spPr>
           <a:xfrm>
-            <a:off x="5073050" y="2714884"/>
-            <a:ext cx="1242408" cy="463190"/>
+            <a:off x="14088335" y="4038872"/>
+            <a:ext cx="798852" cy="463190"/>
           </a:xfrm>
           <a:prstGeom prst="roundRect">
             <a:avLst/>
@@ -7998,7 +7065,7 @@
                 <a:ea typeface="Calibri" panose="020F0502020204030204" pitchFamily="34" charset="0"/>
                 <a:cs typeface="Calibri" panose="020F0502020204030204" pitchFamily="34" charset="0"/>
               </a:rPr>
-              <a:t>Pearson R</a:t>
+              <a:t>Q Sq</a:t>
             </a:r>
             <a:endParaRPr lang="nl-NL" kern="0" dirty="0">
               <a:solidFill>
@@ -8013,10 +7080,10 @@
       </p:sp>
       <p:sp>
         <p:nvSpPr>
-          <p:cNvPr id="267" name="Rectangle: Rounded Corners 266">
-            <a:extLst>
-              <a:ext uri="{FF2B5EF4-FFF2-40B4-BE49-F238E27FC236}">
-                <a16:creationId xmlns:a16="http://schemas.microsoft.com/office/drawing/2014/main" id="{7994DAC7-6E40-9CBB-69FE-1885C589F922}"/>
+          <p:cNvPr id="272" name="Rectangle: Rounded Corners 271">
+            <a:extLst>
+              <a:ext uri="{FF2B5EF4-FFF2-40B4-BE49-F238E27FC236}">
+                <a16:creationId xmlns:a16="http://schemas.microsoft.com/office/drawing/2014/main" id="{AD0BE99B-AB72-AA2E-000D-12AA38AD66B3}"/>
               </a:ext>
             </a:extLst>
           </p:cNvPr>
@@ -8025,8 +7092,8 @@
         </p:nvSpPr>
         <p:spPr>
           <a:xfrm>
-            <a:off x="3100316" y="3243134"/>
-            <a:ext cx="1780019" cy="463190"/>
+            <a:off x="14776752" y="3459339"/>
+            <a:ext cx="1660450" cy="463190"/>
           </a:xfrm>
           <a:prstGeom prst="roundRect">
             <a:avLst/>
@@ -8077,7 +7144,7 @@
                 <a:ea typeface="Calibri" panose="020F0502020204030204" pitchFamily="34" charset="0"/>
                 <a:cs typeface="Calibri" panose="020F0502020204030204" pitchFamily="34" charset="0"/>
               </a:rPr>
-              <a:t>Freeman Tuckey</a:t>
+              <a:t>Log Likelihood</a:t>
             </a:r>
             <a:endParaRPr lang="nl-NL" kern="0" dirty="0">
               <a:solidFill>
@@ -8092,10 +7159,10 @@
       </p:sp>
       <p:sp>
         <p:nvSpPr>
-          <p:cNvPr id="268" name="Rectangle: Rounded Corners 267">
-            <a:extLst>
-              <a:ext uri="{FF2B5EF4-FFF2-40B4-BE49-F238E27FC236}">
-                <a16:creationId xmlns:a16="http://schemas.microsoft.com/office/drawing/2014/main" id="{CE63F579-239C-1194-C35A-ABD6CDF2C18C}"/>
+          <p:cNvPr id="273" name="Rectangle: Rounded Corners 272">
+            <a:extLst>
+              <a:ext uri="{FF2B5EF4-FFF2-40B4-BE49-F238E27FC236}">
+                <a16:creationId xmlns:a16="http://schemas.microsoft.com/office/drawing/2014/main" id="{B2AD1F88-125D-F425-F641-F40C37F38599}"/>
               </a:ext>
             </a:extLst>
           </p:cNvPr>
@@ -8104,8 +7171,8 @@
         </p:nvSpPr>
         <p:spPr>
           <a:xfrm>
-            <a:off x="3889790" y="2718806"/>
-            <a:ext cx="1126726" cy="463190"/>
+            <a:off x="14983589" y="4038872"/>
+            <a:ext cx="1780019" cy="463190"/>
           </a:xfrm>
           <a:prstGeom prst="roundRect">
             <a:avLst/>
@@ -8148,7 +7215,7 @@
               <a:defRPr/>
             </a:pPr>
             <a:r>
-              <a:rPr lang="en-US" kern="0" dirty="0" err="1">
+              <a:rPr lang="en-US" kern="0" dirty="0">
                 <a:solidFill>
                   <a:prstClr val="black"/>
                 </a:solidFill>
@@ -8156,7 +7223,7 @@
                 <a:ea typeface="Calibri" panose="020F0502020204030204" pitchFamily="34" charset="0"/>
                 <a:cs typeface="Calibri" panose="020F0502020204030204" pitchFamily="34" charset="0"/>
               </a:rPr>
-              <a:t>Neyman</a:t>
+              <a:t>Freeman Tuckey</a:t>
             </a:r>
             <a:endParaRPr lang="nl-NL" kern="0" dirty="0">
               <a:solidFill>
@@ -8171,20 +7238,331 @@
       </p:sp>
       <p:sp>
         <p:nvSpPr>
-          <p:cNvPr id="269" name="Rectangle: Rounded Corners 268">
-            <a:extLst>
-              <a:ext uri="{FF2B5EF4-FFF2-40B4-BE49-F238E27FC236}">
-                <a16:creationId xmlns:a16="http://schemas.microsoft.com/office/drawing/2014/main" id="{DEF46227-31D3-E85B-DEE0-1ECD81BC28FA}"/>
-              </a:ext>
-            </a:extLst>
-          </p:cNvPr>
-          <p:cNvSpPr/>
+          <p:cNvPr id="276" name="TextBox 275">
+            <a:extLst>
+              <a:ext uri="{FF2B5EF4-FFF2-40B4-BE49-F238E27FC236}">
+                <a16:creationId xmlns:a16="http://schemas.microsoft.com/office/drawing/2014/main" id="{9AF1D212-3A86-2013-5557-46BCFE0805FC}"/>
+              </a:ext>
+            </a:extLst>
+          </p:cNvPr>
+          <p:cNvSpPr txBox="1"/>
           <p:nvPr/>
         </p:nvSpPr>
         <p:spPr>
           <a:xfrm>
-            <a:off x="6067583" y="2165457"/>
-            <a:ext cx="1457000" cy="463190"/>
+            <a:off x="13580335" y="10565267"/>
+            <a:ext cx="4600104" cy="338554"/>
+          </a:xfrm>
+          <a:prstGeom prst="rect">
+            <a:avLst/>
+          </a:prstGeom>
+          <a:noFill/>
+        </p:spPr>
+        <p:txBody>
+          <a:bodyPr wrap="square" rtlCol="0">
+            <a:spAutoFit/>
+          </a:bodyPr>
+          <a:lstStyle/>
+          <a:p>
+            <a:pPr algn="r" defTabSz="1097280">
+              <a:defRPr/>
+            </a:pPr>
+            <a:r>
+              <a:rPr lang="en-US" sz="1600" kern="0" dirty="0">
+                <a:solidFill>
+                  <a:prstClr val="black"/>
+                </a:solidFill>
+                <a:latin typeface="Calibri" panose="020F0502020204030204" pitchFamily="34" charset="0"/>
+                <a:ea typeface="Calibri" panose="020F0502020204030204" pitchFamily="34" charset="0"/>
+                <a:cs typeface="Calibri" panose="020F0502020204030204" pitchFamily="34" charset="0"/>
+              </a:rPr>
+              <a:t>Overview for Causal Discovery, </a:t>
+            </a:r>
+            <a:r>
+              <a:rPr lang="en-US" sz="1600" kern="0" dirty="0" err="1">
+                <a:solidFill>
+                  <a:prstClr val="black"/>
+                </a:solidFill>
+                <a:latin typeface="Calibri" panose="020F0502020204030204" pitchFamily="34" charset="0"/>
+                <a:ea typeface="Calibri" panose="020F0502020204030204" pitchFamily="34" charset="0"/>
+                <a:cs typeface="Calibri" panose="020F0502020204030204" pitchFamily="34" charset="0"/>
+              </a:rPr>
+              <a:t>Bnlearn</a:t>
+            </a:r>
+            <a:r>
+              <a:rPr lang="en-US" sz="1600" kern="0" dirty="0">
+                <a:solidFill>
+                  <a:prstClr val="black"/>
+                </a:solidFill>
+                <a:latin typeface="Calibri" panose="020F0502020204030204" pitchFamily="34" charset="0"/>
+                <a:ea typeface="Calibri" panose="020F0502020204030204" pitchFamily="34" charset="0"/>
+                <a:cs typeface="Calibri" panose="020F0502020204030204" pitchFamily="34" charset="0"/>
+              </a:rPr>
+              <a:t> for Python</a:t>
+            </a:r>
+          </a:p>
+        </p:txBody>
+      </p:sp>
+      <p:pic>
+        <p:nvPicPr>
+          <p:cNvPr id="277" name="Picture 276" descr="A black text with circles and dots&#10;&#10;Description automatically generated">
+            <a:extLst>
+              <a:ext uri="{FF2B5EF4-FFF2-40B4-BE49-F238E27FC236}">
+                <a16:creationId xmlns:a16="http://schemas.microsoft.com/office/drawing/2014/main" id="{A07931D7-C11C-E992-585E-9415ABDC9506}"/>
+              </a:ext>
+            </a:extLst>
+          </p:cNvPr>
+          <p:cNvPicPr>
+            <a:picLocks noChangeAspect="1"/>
+          </p:cNvPicPr>
+          <p:nvPr/>
+        </p:nvPicPr>
+        <p:blipFill>
+          <a:blip r:embed="rId2">
+            <a:clrChange>
+              <a:clrFrom>
+                <a:srgbClr val="FFFFFF"/>
+              </a:clrFrom>
+              <a:clrTo>
+                <a:srgbClr val="FFFFFF">
+                  <a:alpha val="0"/>
+                </a:srgbClr>
+              </a:clrTo>
+            </a:clrChange>
+            <a:extLst>
+              <a:ext uri="{28A0092B-C50C-407E-A947-70E740481C1C}">
+                <a14:useLocalDpi xmlns:a14="http://schemas.microsoft.com/office/drawing/2010/main" val="0"/>
+              </a:ext>
+            </a:extLst>
+          </a:blip>
+          <a:stretch>
+            <a:fillRect/>
+          </a:stretch>
+        </p:blipFill>
+        <p:spPr>
+          <a:xfrm>
+            <a:off x="15854162" y="110522"/>
+            <a:ext cx="1611241" cy="1074161"/>
+          </a:xfrm>
+          <a:prstGeom prst="rect">
+            <a:avLst/>
+          </a:prstGeom>
+        </p:spPr>
+      </p:pic>
+      <p:sp>
+        <p:nvSpPr>
+          <p:cNvPr id="278" name="TextBox 277">
+            <a:extLst>
+              <a:ext uri="{FF2B5EF4-FFF2-40B4-BE49-F238E27FC236}">
+                <a16:creationId xmlns:a16="http://schemas.microsoft.com/office/drawing/2014/main" id="{640F3390-00F2-C5E2-DE70-95FD3FD374E0}"/>
+              </a:ext>
+            </a:extLst>
+          </p:cNvPr>
+          <p:cNvSpPr txBox="1"/>
+          <p:nvPr/>
+        </p:nvSpPr>
+        <p:spPr>
+          <a:xfrm>
+            <a:off x="7260885" y="5502406"/>
+            <a:ext cx="1758110" cy="338554"/>
+          </a:xfrm>
+          <a:prstGeom prst="rect">
+            <a:avLst/>
+          </a:prstGeom>
+          <a:noFill/>
+        </p:spPr>
+        <p:txBody>
+          <a:bodyPr wrap="none" rtlCol="0">
+            <a:spAutoFit/>
+          </a:bodyPr>
+          <a:lstStyle/>
+          <a:p>
+            <a:pPr algn="ctr"/>
+            <a:r>
+              <a:rPr lang="en-US" sz="1600" b="1" dirty="0">
+                <a:latin typeface="Calibri" panose="020F0502020204030204" pitchFamily="34" charset="0"/>
+                <a:ea typeface="Calibri" panose="020F0502020204030204" pitchFamily="34" charset="0"/>
+                <a:cs typeface="Calibri" panose="020F0502020204030204" pitchFamily="34" charset="0"/>
+              </a:rPr>
+              <a:t>Structure Learning</a:t>
+            </a:r>
+            <a:endParaRPr lang="nl-NL" sz="1600" b="1" dirty="0">
+              <a:latin typeface="Calibri" panose="020F0502020204030204" pitchFamily="34" charset="0"/>
+              <a:ea typeface="Calibri" panose="020F0502020204030204" pitchFamily="34" charset="0"/>
+              <a:cs typeface="Calibri" panose="020F0502020204030204" pitchFamily="34" charset="0"/>
+            </a:endParaRPr>
+          </a:p>
+        </p:txBody>
+      </p:sp>
+      <p:sp>
+        <p:nvSpPr>
+          <p:cNvPr id="290" name="TextBox 289">
+            <a:extLst>
+              <a:ext uri="{FF2B5EF4-FFF2-40B4-BE49-F238E27FC236}">
+                <a16:creationId xmlns:a16="http://schemas.microsoft.com/office/drawing/2014/main" id="{59593A49-D05D-4633-EB77-9AF609E59A8B}"/>
+              </a:ext>
+            </a:extLst>
+          </p:cNvPr>
+          <p:cNvSpPr txBox="1"/>
+          <p:nvPr/>
+        </p:nvSpPr>
+        <p:spPr>
+          <a:xfrm>
+            <a:off x="3213035" y="4325036"/>
+            <a:ext cx="1569661" cy="338554"/>
+          </a:xfrm>
+          <a:prstGeom prst="rect">
+            <a:avLst/>
+          </a:prstGeom>
+          <a:noFill/>
+        </p:spPr>
+        <p:txBody>
+          <a:bodyPr wrap="none" rtlCol="0">
+            <a:spAutoFit/>
+          </a:bodyPr>
+          <a:lstStyle/>
+          <a:p>
+            <a:pPr algn="r" defTabSz="1097280">
+              <a:defRPr/>
+            </a:pPr>
+            <a:r>
+              <a:rPr lang="en-US" sz="1600" i="1" kern="0" dirty="0">
+                <a:solidFill>
+                  <a:prstClr val="black"/>
+                </a:solidFill>
+                <a:latin typeface="Calibri" panose="020F0502020204030204" pitchFamily="34" charset="0"/>
+                <a:ea typeface="Calibri" panose="020F0502020204030204" pitchFamily="34" charset="0"/>
+                <a:cs typeface="Calibri" panose="020F0502020204030204" pitchFamily="34" charset="0"/>
+              </a:rPr>
+              <a:t>Scoring methods</a:t>
+            </a:r>
+          </a:p>
+        </p:txBody>
+      </p:sp>
+      <p:sp>
+        <p:nvSpPr>
+          <p:cNvPr id="291" name="TextBox 290">
+            <a:extLst>
+              <a:ext uri="{FF2B5EF4-FFF2-40B4-BE49-F238E27FC236}">
+                <a16:creationId xmlns:a16="http://schemas.microsoft.com/office/drawing/2014/main" id="{F8F6DBAE-1436-D97E-0B38-C6CCB2BD4660}"/>
+              </a:ext>
+            </a:extLst>
+          </p:cNvPr>
+          <p:cNvSpPr txBox="1"/>
+          <p:nvPr/>
+        </p:nvSpPr>
+        <p:spPr>
+          <a:xfrm>
+            <a:off x="14895722" y="2874203"/>
+            <a:ext cx="1915910" cy="584775"/>
+          </a:xfrm>
+          <a:prstGeom prst="rect">
+            <a:avLst/>
+          </a:prstGeom>
+          <a:noFill/>
+        </p:spPr>
+        <p:txBody>
+          <a:bodyPr wrap="none" rtlCol="0">
+            <a:spAutoFit/>
+          </a:bodyPr>
+          <a:lstStyle/>
+          <a:p>
+            <a:pPr algn="r" defTabSz="1097280">
+              <a:defRPr/>
+            </a:pPr>
+            <a:r>
+              <a:rPr lang="en-US" sz="1600" i="1" kern="0" dirty="0">
+                <a:solidFill>
+                  <a:prstClr val="black"/>
+                </a:solidFill>
+                <a:latin typeface="Calibri" panose="020F0502020204030204" pitchFamily="34" charset="0"/>
+                <a:ea typeface="Calibri" panose="020F0502020204030204" pitchFamily="34" charset="0"/>
+                <a:cs typeface="Calibri" panose="020F0502020204030204" pitchFamily="34" charset="0"/>
+              </a:rPr>
+              <a:t>Statistical tests for</a:t>
+            </a:r>
+          </a:p>
+          <a:p>
+            <a:pPr algn="r" defTabSz="1097280">
+              <a:defRPr/>
+            </a:pPr>
+            <a:r>
+              <a:rPr lang="en-US" sz="1600" i="1" kern="0" dirty="0">
+                <a:solidFill>
+                  <a:prstClr val="black"/>
+                </a:solidFill>
+                <a:latin typeface="Calibri" panose="020F0502020204030204" pitchFamily="34" charset="0"/>
+                <a:ea typeface="Calibri" panose="020F0502020204030204" pitchFamily="34" charset="0"/>
+                <a:cs typeface="Calibri" panose="020F0502020204030204" pitchFamily="34" charset="0"/>
+              </a:rPr>
+              <a:t>Variable elimination</a:t>
+            </a:r>
+          </a:p>
+        </p:txBody>
+      </p:sp>
+      <p:cxnSp>
+        <p:nvCxnSpPr>
+          <p:cNvPr id="304" name="Straight Arrow Connector 303">
+            <a:extLst>
+              <a:ext uri="{FF2B5EF4-FFF2-40B4-BE49-F238E27FC236}">
+                <a16:creationId xmlns:a16="http://schemas.microsoft.com/office/drawing/2014/main" id="{38B6F4B7-A9DE-936A-8024-7C9DA2A8DC39}"/>
+              </a:ext>
+            </a:extLst>
+          </p:cNvPr>
+          <p:cNvCxnSpPr>
+            <a:cxnSpLocks/>
+          </p:cNvCxnSpPr>
+          <p:nvPr/>
+        </p:nvCxnSpPr>
+        <p:spPr>
+          <a:xfrm flipV="1">
+            <a:off x="12260797" y="6389675"/>
+            <a:ext cx="498245" cy="325134"/>
+          </a:xfrm>
+          <a:prstGeom prst="straightConnector1">
+            <a:avLst/>
+          </a:prstGeom>
+          <a:ln w="76200">
+            <a:solidFill>
+              <a:schemeClr val="accent2">
+                <a:lumMod val="50000"/>
+              </a:schemeClr>
+            </a:solidFill>
+            <a:headEnd type="none" w="med" len="med"/>
+            <a:tailEnd type="triangle" w="med" len="med"/>
+          </a:ln>
+        </p:spPr>
+        <p:style>
+          <a:lnRef idx="1">
+            <a:schemeClr val="dk1"/>
+          </a:lnRef>
+          <a:fillRef idx="0">
+            <a:schemeClr val="dk1"/>
+          </a:fillRef>
+          <a:effectRef idx="0">
+            <a:schemeClr val="dk1"/>
+          </a:effectRef>
+          <a:fontRef idx="minor">
+            <a:schemeClr val="tx1"/>
+          </a:fontRef>
+        </p:style>
+      </p:cxnSp>
+      <p:sp>
+        <p:nvSpPr>
+          <p:cNvPr id="305" name="Rectangle: Rounded Corners 304">
+            <a:extLst>
+              <a:ext uri="{FF2B5EF4-FFF2-40B4-BE49-F238E27FC236}">
+                <a16:creationId xmlns:a16="http://schemas.microsoft.com/office/drawing/2014/main" id="{D615E7F4-0EE2-D1B3-57BC-2CBBD1F7FB51}"/>
+              </a:ext>
+            </a:extLst>
+          </p:cNvPr>
+          <p:cNvSpPr/>
+          <p:nvPr/>
+        </p:nvSpPr>
+        <p:spPr>
+          <a:xfrm>
+            <a:off x="13794396" y="4605646"/>
+            <a:ext cx="1126726" cy="463190"/>
           </a:xfrm>
           <a:prstGeom prst="roundRect">
             <a:avLst/>
@@ -8235,18 +7613,7 @@
                 <a:ea typeface="Calibri" panose="020F0502020204030204" pitchFamily="34" charset="0"/>
                 <a:cs typeface="Calibri" panose="020F0502020204030204" pitchFamily="34" charset="0"/>
               </a:rPr>
-              <a:t>Cressie</a:t>
-            </a:r>
-            <a:r>
-              <a:rPr lang="en-US" kern="0" dirty="0">
-                <a:solidFill>
-                  <a:prstClr val="black"/>
-                </a:solidFill>
-                <a:latin typeface="Calibri" panose="020F0502020204030204" pitchFamily="34" charset="0"/>
-                <a:ea typeface="Calibri" panose="020F0502020204030204" pitchFamily="34" charset="0"/>
-                <a:cs typeface="Calibri" panose="020F0502020204030204" pitchFamily="34" charset="0"/>
-              </a:rPr>
-              <a:t> Read</a:t>
+              <a:t>Neyman</a:t>
             </a:r>
             <a:endParaRPr lang="nl-NL" kern="0" dirty="0">
               <a:solidFill>
@@ -8261,10 +7628,10 @@
       </p:sp>
       <p:sp>
         <p:nvSpPr>
-          <p:cNvPr id="270" name="Rectangle: Rounded Corners 269">
-            <a:extLst>
-              <a:ext uri="{FF2B5EF4-FFF2-40B4-BE49-F238E27FC236}">
-                <a16:creationId xmlns:a16="http://schemas.microsoft.com/office/drawing/2014/main" id="{963689FF-4D81-A072-7F9C-1E4AC9FFAF2A}"/>
+          <p:cNvPr id="306" name="Rectangle: Rounded Corners 305">
+            <a:extLst>
+              <a:ext uri="{FF2B5EF4-FFF2-40B4-BE49-F238E27FC236}">
+                <a16:creationId xmlns:a16="http://schemas.microsoft.com/office/drawing/2014/main" id="{F4B2CC5F-A7AC-DA9C-1573-B36452E44B67}"/>
               </a:ext>
             </a:extLst>
           </p:cNvPr>
@@ -8273,8 +7640,8 @@
         </p:nvSpPr>
         <p:spPr>
           <a:xfrm>
-            <a:off x="5003176" y="3261883"/>
-            <a:ext cx="548120" cy="463190"/>
+            <a:off x="15048369" y="4587356"/>
+            <a:ext cx="1780019" cy="463190"/>
           </a:xfrm>
           <a:prstGeom prst="roundRect">
             <a:avLst/>
@@ -8317,712 +7684,6 @@
               <a:defRPr/>
             </a:pPr>
             <a:r>
-              <a:rPr lang="en-US" kern="0" dirty="0">
-                <a:solidFill>
-                  <a:prstClr val="black"/>
-                </a:solidFill>
-                <a:latin typeface="Calibri" panose="020F0502020204030204" pitchFamily="34" charset="0"/>
-                <a:ea typeface="Calibri" panose="020F0502020204030204" pitchFamily="34" charset="0"/>
-                <a:cs typeface="Calibri" panose="020F0502020204030204" pitchFamily="34" charset="0"/>
-              </a:rPr>
-              <a:t>…</a:t>
-            </a:r>
-            <a:endParaRPr lang="nl-NL" kern="0" dirty="0">
-              <a:solidFill>
-                <a:prstClr val="black"/>
-              </a:solidFill>
-              <a:latin typeface="Calibri" panose="020F0502020204030204" pitchFamily="34" charset="0"/>
-              <a:ea typeface="Calibri" panose="020F0502020204030204" pitchFamily="34" charset="0"/>
-              <a:cs typeface="Calibri" panose="020F0502020204030204" pitchFamily="34" charset="0"/>
-            </a:endParaRPr>
-          </a:p>
-        </p:txBody>
-      </p:sp>
-      <p:sp>
-        <p:nvSpPr>
-          <p:cNvPr id="271" name="Rectangle: Rounded Corners 270">
-            <a:extLst>
-              <a:ext uri="{FF2B5EF4-FFF2-40B4-BE49-F238E27FC236}">
-                <a16:creationId xmlns:a16="http://schemas.microsoft.com/office/drawing/2014/main" id="{51F70D03-807C-1AF5-47C7-057344B7E7A8}"/>
-              </a:ext>
-            </a:extLst>
-          </p:cNvPr>
-          <p:cNvSpPr/>
-          <p:nvPr/>
-        </p:nvSpPr>
-        <p:spPr>
-          <a:xfrm>
-            <a:off x="14088335" y="4038872"/>
-            <a:ext cx="798852" cy="463190"/>
-          </a:xfrm>
-          <a:prstGeom prst="roundRect">
-            <a:avLst/>
-          </a:prstGeom>
-          <a:solidFill>
-            <a:schemeClr val="bg1">
-              <a:lumMod val="95000"/>
-            </a:schemeClr>
-          </a:solidFill>
-          <a:ln>
-            <a:solidFill>
-              <a:schemeClr val="tx2">
-                <a:lumMod val="90000"/>
-                <a:lumOff val="10000"/>
-              </a:schemeClr>
-            </a:solidFill>
-          </a:ln>
-        </p:spPr>
-        <p:style>
-          <a:lnRef idx="2">
-            <a:schemeClr val="accent1">
-              <a:shade val="15000"/>
-            </a:schemeClr>
-          </a:lnRef>
-          <a:fillRef idx="1">
-            <a:schemeClr val="accent1"/>
-          </a:fillRef>
-          <a:effectRef idx="0">
-            <a:schemeClr val="accent1"/>
-          </a:effectRef>
-          <a:fontRef idx="minor">
-            <a:schemeClr val="lt1"/>
-          </a:fontRef>
-        </p:style>
-        <p:txBody>
-          <a:bodyPr rtlCol="0" anchor="ctr"/>
-          <a:lstStyle/>
-          <a:p>
-            <a:pPr algn="ctr" defTabSz="1097280">
-              <a:defRPr/>
-            </a:pPr>
-            <a:r>
-              <a:rPr lang="en-US" kern="0" dirty="0">
-                <a:solidFill>
-                  <a:prstClr val="black"/>
-                </a:solidFill>
-                <a:latin typeface="Calibri" panose="020F0502020204030204" pitchFamily="34" charset="0"/>
-                <a:ea typeface="Calibri" panose="020F0502020204030204" pitchFamily="34" charset="0"/>
-                <a:cs typeface="Calibri" panose="020F0502020204030204" pitchFamily="34" charset="0"/>
-              </a:rPr>
-              <a:t>Q Sq</a:t>
-            </a:r>
-            <a:endParaRPr lang="nl-NL" kern="0" dirty="0">
-              <a:solidFill>
-                <a:prstClr val="black"/>
-              </a:solidFill>
-              <a:latin typeface="Calibri" panose="020F0502020204030204" pitchFamily="34" charset="0"/>
-              <a:ea typeface="Calibri" panose="020F0502020204030204" pitchFamily="34" charset="0"/>
-              <a:cs typeface="Calibri" panose="020F0502020204030204" pitchFamily="34" charset="0"/>
-            </a:endParaRPr>
-          </a:p>
-        </p:txBody>
-      </p:sp>
-      <p:sp>
-        <p:nvSpPr>
-          <p:cNvPr id="272" name="Rectangle: Rounded Corners 271">
-            <a:extLst>
-              <a:ext uri="{FF2B5EF4-FFF2-40B4-BE49-F238E27FC236}">
-                <a16:creationId xmlns:a16="http://schemas.microsoft.com/office/drawing/2014/main" id="{AD0BE99B-AB72-AA2E-000D-12AA38AD66B3}"/>
-              </a:ext>
-            </a:extLst>
-          </p:cNvPr>
-          <p:cNvSpPr/>
-          <p:nvPr/>
-        </p:nvSpPr>
-        <p:spPr>
-          <a:xfrm>
-            <a:off x="14776752" y="3459339"/>
-            <a:ext cx="1660450" cy="463190"/>
-          </a:xfrm>
-          <a:prstGeom prst="roundRect">
-            <a:avLst/>
-          </a:prstGeom>
-          <a:solidFill>
-            <a:schemeClr val="bg1">
-              <a:lumMod val="95000"/>
-            </a:schemeClr>
-          </a:solidFill>
-          <a:ln>
-            <a:solidFill>
-              <a:schemeClr val="tx2">
-                <a:lumMod val="90000"/>
-                <a:lumOff val="10000"/>
-              </a:schemeClr>
-            </a:solidFill>
-          </a:ln>
-        </p:spPr>
-        <p:style>
-          <a:lnRef idx="2">
-            <a:schemeClr val="accent1">
-              <a:shade val="15000"/>
-            </a:schemeClr>
-          </a:lnRef>
-          <a:fillRef idx="1">
-            <a:schemeClr val="accent1"/>
-          </a:fillRef>
-          <a:effectRef idx="0">
-            <a:schemeClr val="accent1"/>
-          </a:effectRef>
-          <a:fontRef idx="minor">
-            <a:schemeClr val="lt1"/>
-          </a:fontRef>
-        </p:style>
-        <p:txBody>
-          <a:bodyPr rtlCol="0" anchor="ctr"/>
-          <a:lstStyle/>
-          <a:p>
-            <a:pPr algn="ctr" defTabSz="1097280">
-              <a:defRPr/>
-            </a:pPr>
-            <a:r>
-              <a:rPr lang="en-US" kern="0" dirty="0">
-                <a:solidFill>
-                  <a:prstClr val="black"/>
-                </a:solidFill>
-                <a:latin typeface="Calibri" panose="020F0502020204030204" pitchFamily="34" charset="0"/>
-                <a:ea typeface="Calibri" panose="020F0502020204030204" pitchFamily="34" charset="0"/>
-                <a:cs typeface="Calibri" panose="020F0502020204030204" pitchFamily="34" charset="0"/>
-              </a:rPr>
-              <a:t>Log Likelihood</a:t>
-            </a:r>
-            <a:endParaRPr lang="nl-NL" kern="0" dirty="0">
-              <a:solidFill>
-                <a:prstClr val="black"/>
-              </a:solidFill>
-              <a:latin typeface="Calibri" panose="020F0502020204030204" pitchFamily="34" charset="0"/>
-              <a:ea typeface="Calibri" panose="020F0502020204030204" pitchFamily="34" charset="0"/>
-              <a:cs typeface="Calibri" panose="020F0502020204030204" pitchFamily="34" charset="0"/>
-            </a:endParaRPr>
-          </a:p>
-        </p:txBody>
-      </p:sp>
-      <p:sp>
-        <p:nvSpPr>
-          <p:cNvPr id="273" name="Rectangle: Rounded Corners 272">
-            <a:extLst>
-              <a:ext uri="{FF2B5EF4-FFF2-40B4-BE49-F238E27FC236}">
-                <a16:creationId xmlns:a16="http://schemas.microsoft.com/office/drawing/2014/main" id="{B2AD1F88-125D-F425-F641-F40C37F38599}"/>
-              </a:ext>
-            </a:extLst>
-          </p:cNvPr>
-          <p:cNvSpPr/>
-          <p:nvPr/>
-        </p:nvSpPr>
-        <p:spPr>
-          <a:xfrm>
-            <a:off x="14983589" y="4038872"/>
-            <a:ext cx="1780019" cy="463190"/>
-          </a:xfrm>
-          <a:prstGeom prst="roundRect">
-            <a:avLst/>
-          </a:prstGeom>
-          <a:solidFill>
-            <a:schemeClr val="bg1">
-              <a:lumMod val="95000"/>
-            </a:schemeClr>
-          </a:solidFill>
-          <a:ln>
-            <a:solidFill>
-              <a:schemeClr val="tx2">
-                <a:lumMod val="90000"/>
-                <a:lumOff val="10000"/>
-              </a:schemeClr>
-            </a:solidFill>
-          </a:ln>
-        </p:spPr>
-        <p:style>
-          <a:lnRef idx="2">
-            <a:schemeClr val="accent1">
-              <a:shade val="15000"/>
-            </a:schemeClr>
-          </a:lnRef>
-          <a:fillRef idx="1">
-            <a:schemeClr val="accent1"/>
-          </a:fillRef>
-          <a:effectRef idx="0">
-            <a:schemeClr val="accent1"/>
-          </a:effectRef>
-          <a:fontRef idx="minor">
-            <a:schemeClr val="lt1"/>
-          </a:fontRef>
-        </p:style>
-        <p:txBody>
-          <a:bodyPr rtlCol="0" anchor="ctr"/>
-          <a:lstStyle/>
-          <a:p>
-            <a:pPr algn="ctr" defTabSz="1097280">
-              <a:defRPr/>
-            </a:pPr>
-            <a:r>
-              <a:rPr lang="en-US" kern="0" dirty="0">
-                <a:solidFill>
-                  <a:prstClr val="black"/>
-                </a:solidFill>
-                <a:latin typeface="Calibri" panose="020F0502020204030204" pitchFamily="34" charset="0"/>
-                <a:ea typeface="Calibri" panose="020F0502020204030204" pitchFamily="34" charset="0"/>
-                <a:cs typeface="Calibri" panose="020F0502020204030204" pitchFamily="34" charset="0"/>
-              </a:rPr>
-              <a:t>Freeman Tuckey</a:t>
-            </a:r>
-            <a:endParaRPr lang="nl-NL" kern="0" dirty="0">
-              <a:solidFill>
-                <a:prstClr val="black"/>
-              </a:solidFill>
-              <a:latin typeface="Calibri" panose="020F0502020204030204" pitchFamily="34" charset="0"/>
-              <a:ea typeface="Calibri" panose="020F0502020204030204" pitchFamily="34" charset="0"/>
-              <a:cs typeface="Calibri" panose="020F0502020204030204" pitchFamily="34" charset="0"/>
-            </a:endParaRPr>
-          </a:p>
-        </p:txBody>
-      </p:sp>
-      <p:sp>
-        <p:nvSpPr>
-          <p:cNvPr id="276" name="TextBox 275">
-            <a:extLst>
-              <a:ext uri="{FF2B5EF4-FFF2-40B4-BE49-F238E27FC236}">
-                <a16:creationId xmlns:a16="http://schemas.microsoft.com/office/drawing/2014/main" id="{9AF1D212-3A86-2013-5557-46BCFE0805FC}"/>
-              </a:ext>
-            </a:extLst>
-          </p:cNvPr>
-          <p:cNvSpPr txBox="1"/>
-          <p:nvPr/>
-        </p:nvSpPr>
-        <p:spPr>
-          <a:xfrm>
-            <a:off x="13580335" y="10565267"/>
-            <a:ext cx="4600104" cy="338554"/>
-          </a:xfrm>
-          <a:prstGeom prst="rect">
-            <a:avLst/>
-          </a:prstGeom>
-          <a:noFill/>
-        </p:spPr>
-        <p:txBody>
-          <a:bodyPr wrap="square" rtlCol="0">
-            <a:spAutoFit/>
-          </a:bodyPr>
-          <a:lstStyle/>
-          <a:p>
-            <a:pPr algn="r" defTabSz="1097280">
-              <a:defRPr/>
-            </a:pPr>
-            <a:r>
-              <a:rPr lang="en-US" sz="1600" kern="0" dirty="0">
-                <a:solidFill>
-                  <a:prstClr val="black"/>
-                </a:solidFill>
-                <a:latin typeface="Calibri" panose="020F0502020204030204" pitchFamily="34" charset="0"/>
-                <a:ea typeface="Calibri" panose="020F0502020204030204" pitchFamily="34" charset="0"/>
-                <a:cs typeface="Calibri" panose="020F0502020204030204" pitchFamily="34" charset="0"/>
-              </a:rPr>
-              <a:t>Overview for Causal Discovery, </a:t>
-            </a:r>
-            <a:r>
-              <a:rPr lang="en-US" sz="1600" kern="0" dirty="0" err="1">
-                <a:solidFill>
-                  <a:prstClr val="black"/>
-                </a:solidFill>
-                <a:latin typeface="Calibri" panose="020F0502020204030204" pitchFamily="34" charset="0"/>
-                <a:ea typeface="Calibri" panose="020F0502020204030204" pitchFamily="34" charset="0"/>
-                <a:cs typeface="Calibri" panose="020F0502020204030204" pitchFamily="34" charset="0"/>
-              </a:rPr>
-              <a:t>Bnlearn</a:t>
-            </a:r>
-            <a:r>
-              <a:rPr lang="en-US" sz="1600" kern="0" dirty="0">
-                <a:solidFill>
-                  <a:prstClr val="black"/>
-                </a:solidFill>
-                <a:latin typeface="Calibri" panose="020F0502020204030204" pitchFamily="34" charset="0"/>
-                <a:ea typeface="Calibri" panose="020F0502020204030204" pitchFamily="34" charset="0"/>
-                <a:cs typeface="Calibri" panose="020F0502020204030204" pitchFamily="34" charset="0"/>
-              </a:rPr>
-              <a:t> for Python</a:t>
-            </a:r>
-          </a:p>
-        </p:txBody>
-      </p:sp>
-      <p:pic>
-        <p:nvPicPr>
-          <p:cNvPr id="277" name="Picture 276" descr="A black text with circles and dots&#10;&#10;Description automatically generated">
-            <a:extLst>
-              <a:ext uri="{FF2B5EF4-FFF2-40B4-BE49-F238E27FC236}">
-                <a16:creationId xmlns:a16="http://schemas.microsoft.com/office/drawing/2014/main" id="{A07931D7-C11C-E992-585E-9415ABDC9506}"/>
-              </a:ext>
-            </a:extLst>
-          </p:cNvPr>
-          <p:cNvPicPr>
-            <a:picLocks noChangeAspect="1"/>
-          </p:cNvPicPr>
-          <p:nvPr/>
-        </p:nvPicPr>
-        <p:blipFill>
-          <a:blip r:embed="rId2">
-            <a:clrChange>
-              <a:clrFrom>
-                <a:srgbClr val="FFFFFF"/>
-              </a:clrFrom>
-              <a:clrTo>
-                <a:srgbClr val="FFFFFF">
-                  <a:alpha val="0"/>
-                </a:srgbClr>
-              </a:clrTo>
-            </a:clrChange>
-            <a:extLst>
-              <a:ext uri="{28A0092B-C50C-407E-A947-70E740481C1C}">
-                <a14:useLocalDpi xmlns:a14="http://schemas.microsoft.com/office/drawing/2010/main" val="0"/>
-              </a:ext>
-            </a:extLst>
-          </a:blip>
-          <a:stretch>
-            <a:fillRect/>
-          </a:stretch>
-        </p:blipFill>
-        <p:spPr>
-          <a:xfrm>
-            <a:off x="15854162" y="110522"/>
-            <a:ext cx="1611241" cy="1074161"/>
-          </a:xfrm>
-          <a:prstGeom prst="rect">
-            <a:avLst/>
-          </a:prstGeom>
-        </p:spPr>
-      </p:pic>
-      <p:sp>
-        <p:nvSpPr>
-          <p:cNvPr id="278" name="TextBox 277">
-            <a:extLst>
-              <a:ext uri="{FF2B5EF4-FFF2-40B4-BE49-F238E27FC236}">
-                <a16:creationId xmlns:a16="http://schemas.microsoft.com/office/drawing/2014/main" id="{640F3390-00F2-C5E2-DE70-95FD3FD374E0}"/>
-              </a:ext>
-            </a:extLst>
-          </p:cNvPr>
-          <p:cNvSpPr txBox="1"/>
-          <p:nvPr/>
-        </p:nvSpPr>
-        <p:spPr>
-          <a:xfrm>
-            <a:off x="7260885" y="5502406"/>
-            <a:ext cx="1758110" cy="338554"/>
-          </a:xfrm>
-          <a:prstGeom prst="rect">
-            <a:avLst/>
-          </a:prstGeom>
-          <a:noFill/>
-        </p:spPr>
-        <p:txBody>
-          <a:bodyPr wrap="none" rtlCol="0">
-            <a:spAutoFit/>
-          </a:bodyPr>
-          <a:lstStyle/>
-          <a:p>
-            <a:pPr algn="ctr"/>
-            <a:r>
-              <a:rPr lang="en-US" sz="1600" b="1" dirty="0">
-                <a:latin typeface="Calibri" panose="020F0502020204030204" pitchFamily="34" charset="0"/>
-                <a:ea typeface="Calibri" panose="020F0502020204030204" pitchFamily="34" charset="0"/>
-                <a:cs typeface="Calibri" panose="020F0502020204030204" pitchFamily="34" charset="0"/>
-              </a:rPr>
-              <a:t>Structure Learning</a:t>
-            </a:r>
-            <a:endParaRPr lang="nl-NL" sz="1600" b="1" dirty="0">
-              <a:latin typeface="Calibri" panose="020F0502020204030204" pitchFamily="34" charset="0"/>
-              <a:ea typeface="Calibri" panose="020F0502020204030204" pitchFamily="34" charset="0"/>
-              <a:cs typeface="Calibri" panose="020F0502020204030204" pitchFamily="34" charset="0"/>
-            </a:endParaRPr>
-          </a:p>
-        </p:txBody>
-      </p:sp>
-      <p:sp>
-        <p:nvSpPr>
-          <p:cNvPr id="290" name="TextBox 289">
-            <a:extLst>
-              <a:ext uri="{FF2B5EF4-FFF2-40B4-BE49-F238E27FC236}">
-                <a16:creationId xmlns:a16="http://schemas.microsoft.com/office/drawing/2014/main" id="{59593A49-D05D-4633-EB77-9AF609E59A8B}"/>
-              </a:ext>
-            </a:extLst>
-          </p:cNvPr>
-          <p:cNvSpPr txBox="1"/>
-          <p:nvPr/>
-        </p:nvSpPr>
-        <p:spPr>
-          <a:xfrm>
-            <a:off x="2617840" y="4575717"/>
-            <a:ext cx="1569661" cy="338554"/>
-          </a:xfrm>
-          <a:prstGeom prst="rect">
-            <a:avLst/>
-          </a:prstGeom>
-          <a:noFill/>
-        </p:spPr>
-        <p:txBody>
-          <a:bodyPr wrap="none" rtlCol="0">
-            <a:spAutoFit/>
-          </a:bodyPr>
-          <a:lstStyle/>
-          <a:p>
-            <a:pPr algn="r" defTabSz="1097280">
-              <a:defRPr/>
-            </a:pPr>
-            <a:r>
-              <a:rPr lang="en-US" sz="1600" i="1" kern="0" dirty="0">
-                <a:solidFill>
-                  <a:prstClr val="black"/>
-                </a:solidFill>
-                <a:latin typeface="Calibri" panose="020F0502020204030204" pitchFamily="34" charset="0"/>
-                <a:ea typeface="Calibri" panose="020F0502020204030204" pitchFamily="34" charset="0"/>
-                <a:cs typeface="Calibri" panose="020F0502020204030204" pitchFamily="34" charset="0"/>
-              </a:rPr>
-              <a:t>Scoring methods</a:t>
-            </a:r>
-          </a:p>
-        </p:txBody>
-      </p:sp>
-      <p:sp>
-        <p:nvSpPr>
-          <p:cNvPr id="291" name="TextBox 290">
-            <a:extLst>
-              <a:ext uri="{FF2B5EF4-FFF2-40B4-BE49-F238E27FC236}">
-                <a16:creationId xmlns:a16="http://schemas.microsoft.com/office/drawing/2014/main" id="{F8F6DBAE-1436-D97E-0B38-C6CCB2BD4660}"/>
-              </a:ext>
-            </a:extLst>
-          </p:cNvPr>
-          <p:cNvSpPr txBox="1"/>
-          <p:nvPr/>
-        </p:nvSpPr>
-        <p:spPr>
-          <a:xfrm>
-            <a:off x="14895722" y="2874203"/>
-            <a:ext cx="1915910" cy="584775"/>
-          </a:xfrm>
-          <a:prstGeom prst="rect">
-            <a:avLst/>
-          </a:prstGeom>
-          <a:noFill/>
-        </p:spPr>
-        <p:txBody>
-          <a:bodyPr wrap="none" rtlCol="0">
-            <a:spAutoFit/>
-          </a:bodyPr>
-          <a:lstStyle/>
-          <a:p>
-            <a:pPr algn="r" defTabSz="1097280">
-              <a:defRPr/>
-            </a:pPr>
-            <a:r>
-              <a:rPr lang="en-US" sz="1600" i="1" kern="0" dirty="0">
-                <a:solidFill>
-                  <a:prstClr val="black"/>
-                </a:solidFill>
-                <a:latin typeface="Calibri" panose="020F0502020204030204" pitchFamily="34" charset="0"/>
-                <a:ea typeface="Calibri" panose="020F0502020204030204" pitchFamily="34" charset="0"/>
-                <a:cs typeface="Calibri" panose="020F0502020204030204" pitchFamily="34" charset="0"/>
-              </a:rPr>
-              <a:t>Statistical tests for</a:t>
-            </a:r>
-          </a:p>
-          <a:p>
-            <a:pPr algn="r" defTabSz="1097280">
-              <a:defRPr/>
-            </a:pPr>
-            <a:r>
-              <a:rPr lang="en-US" sz="1600" i="1" kern="0" dirty="0">
-                <a:solidFill>
-                  <a:prstClr val="black"/>
-                </a:solidFill>
-                <a:latin typeface="Calibri" panose="020F0502020204030204" pitchFamily="34" charset="0"/>
-                <a:ea typeface="Calibri" panose="020F0502020204030204" pitchFamily="34" charset="0"/>
-                <a:cs typeface="Calibri" panose="020F0502020204030204" pitchFamily="34" charset="0"/>
-              </a:rPr>
-              <a:t>Variable elimination</a:t>
-            </a:r>
-          </a:p>
-        </p:txBody>
-      </p:sp>
-      <p:cxnSp>
-        <p:nvCxnSpPr>
-          <p:cNvPr id="304" name="Straight Arrow Connector 303">
-            <a:extLst>
-              <a:ext uri="{FF2B5EF4-FFF2-40B4-BE49-F238E27FC236}">
-                <a16:creationId xmlns:a16="http://schemas.microsoft.com/office/drawing/2014/main" id="{38B6F4B7-A9DE-936A-8024-7C9DA2A8DC39}"/>
-              </a:ext>
-            </a:extLst>
-          </p:cNvPr>
-          <p:cNvCxnSpPr>
-            <a:cxnSpLocks/>
-          </p:cNvCxnSpPr>
-          <p:nvPr/>
-        </p:nvCxnSpPr>
-        <p:spPr>
-          <a:xfrm rot="20700000">
-            <a:off x="12781624" y="7016326"/>
-            <a:ext cx="529630" cy="0"/>
-          </a:xfrm>
-          <a:prstGeom prst="straightConnector1">
-            <a:avLst/>
-          </a:prstGeom>
-          <a:ln w="76200">
-            <a:solidFill>
-              <a:schemeClr val="accent2">
-                <a:lumMod val="50000"/>
-              </a:schemeClr>
-            </a:solidFill>
-            <a:headEnd type="none" w="med" len="med"/>
-            <a:tailEnd type="triangle" w="med" len="med"/>
-          </a:ln>
-        </p:spPr>
-        <p:style>
-          <a:lnRef idx="1">
-            <a:schemeClr val="dk1"/>
-          </a:lnRef>
-          <a:fillRef idx="0">
-            <a:schemeClr val="dk1"/>
-          </a:fillRef>
-          <a:effectRef idx="0">
-            <a:schemeClr val="dk1"/>
-          </a:effectRef>
-          <a:fontRef idx="minor">
-            <a:schemeClr val="tx1"/>
-          </a:fontRef>
-        </p:style>
-      </p:cxnSp>
-      <p:sp>
-        <p:nvSpPr>
-          <p:cNvPr id="305" name="Rectangle: Rounded Corners 304">
-            <a:extLst>
-              <a:ext uri="{FF2B5EF4-FFF2-40B4-BE49-F238E27FC236}">
-                <a16:creationId xmlns:a16="http://schemas.microsoft.com/office/drawing/2014/main" id="{D615E7F4-0EE2-D1B3-57BC-2CBBD1F7FB51}"/>
-              </a:ext>
-            </a:extLst>
-          </p:cNvPr>
-          <p:cNvSpPr/>
-          <p:nvPr/>
-        </p:nvSpPr>
-        <p:spPr>
-          <a:xfrm>
-            <a:off x="13794396" y="4605646"/>
-            <a:ext cx="1126726" cy="463190"/>
-          </a:xfrm>
-          <a:prstGeom prst="roundRect">
-            <a:avLst/>
-          </a:prstGeom>
-          <a:solidFill>
-            <a:schemeClr val="bg1">
-              <a:lumMod val="95000"/>
-            </a:schemeClr>
-          </a:solidFill>
-          <a:ln>
-            <a:solidFill>
-              <a:schemeClr val="tx2">
-                <a:lumMod val="90000"/>
-                <a:lumOff val="10000"/>
-              </a:schemeClr>
-            </a:solidFill>
-          </a:ln>
-        </p:spPr>
-        <p:style>
-          <a:lnRef idx="2">
-            <a:schemeClr val="accent1">
-              <a:shade val="15000"/>
-            </a:schemeClr>
-          </a:lnRef>
-          <a:fillRef idx="1">
-            <a:schemeClr val="accent1"/>
-          </a:fillRef>
-          <a:effectRef idx="0">
-            <a:schemeClr val="accent1"/>
-          </a:effectRef>
-          <a:fontRef idx="minor">
-            <a:schemeClr val="lt1"/>
-          </a:fontRef>
-        </p:style>
-        <p:txBody>
-          <a:bodyPr rtlCol="0" anchor="ctr"/>
-          <a:lstStyle/>
-          <a:p>
-            <a:pPr algn="ctr" defTabSz="1097280">
-              <a:defRPr/>
-            </a:pPr>
-            <a:r>
-              <a:rPr lang="en-US" kern="0" dirty="0" err="1">
-                <a:solidFill>
-                  <a:prstClr val="black"/>
-                </a:solidFill>
-                <a:latin typeface="Calibri" panose="020F0502020204030204" pitchFamily="34" charset="0"/>
-                <a:ea typeface="Calibri" panose="020F0502020204030204" pitchFamily="34" charset="0"/>
-                <a:cs typeface="Calibri" panose="020F0502020204030204" pitchFamily="34" charset="0"/>
-              </a:rPr>
-              <a:t>Neyman</a:t>
-            </a:r>
-            <a:endParaRPr lang="nl-NL" kern="0" dirty="0">
-              <a:solidFill>
-                <a:prstClr val="black"/>
-              </a:solidFill>
-              <a:latin typeface="Calibri" panose="020F0502020204030204" pitchFamily="34" charset="0"/>
-              <a:ea typeface="Calibri" panose="020F0502020204030204" pitchFamily="34" charset="0"/>
-              <a:cs typeface="Calibri" panose="020F0502020204030204" pitchFamily="34" charset="0"/>
-            </a:endParaRPr>
-          </a:p>
-        </p:txBody>
-      </p:sp>
-      <p:sp>
-        <p:nvSpPr>
-          <p:cNvPr id="306" name="Rectangle: Rounded Corners 305">
-            <a:extLst>
-              <a:ext uri="{FF2B5EF4-FFF2-40B4-BE49-F238E27FC236}">
-                <a16:creationId xmlns:a16="http://schemas.microsoft.com/office/drawing/2014/main" id="{F4B2CC5F-A7AC-DA9C-1573-B36452E44B67}"/>
-              </a:ext>
-            </a:extLst>
-          </p:cNvPr>
-          <p:cNvSpPr/>
-          <p:nvPr/>
-        </p:nvSpPr>
-        <p:spPr>
-          <a:xfrm>
-            <a:off x="15048369" y="4587356"/>
-            <a:ext cx="1780019" cy="463190"/>
-          </a:xfrm>
-          <a:prstGeom prst="roundRect">
-            <a:avLst/>
-          </a:prstGeom>
-          <a:solidFill>
-            <a:schemeClr val="bg1">
-              <a:lumMod val="95000"/>
-            </a:schemeClr>
-          </a:solidFill>
-          <a:ln>
-            <a:solidFill>
-              <a:schemeClr val="tx2">
-                <a:lumMod val="90000"/>
-                <a:lumOff val="10000"/>
-              </a:schemeClr>
-            </a:solidFill>
-          </a:ln>
-        </p:spPr>
-        <p:style>
-          <a:lnRef idx="2">
-            <a:schemeClr val="accent1">
-              <a:shade val="15000"/>
-            </a:schemeClr>
-          </a:lnRef>
-          <a:fillRef idx="1">
-            <a:schemeClr val="accent1"/>
-          </a:fillRef>
-          <a:effectRef idx="0">
-            <a:schemeClr val="accent1"/>
-          </a:effectRef>
-          <a:fontRef idx="minor">
-            <a:schemeClr val="lt1"/>
-          </a:fontRef>
-        </p:style>
-        <p:txBody>
-          <a:bodyPr rtlCol="0" anchor="ctr"/>
-          <a:lstStyle/>
-          <a:p>
-            <a:pPr algn="ctr" defTabSz="1097280">
-              <a:defRPr/>
-            </a:pPr>
-            <a:r>
               <a:rPr lang="en-US" kern="0" dirty="0" err="1">
                 <a:solidFill>
                   <a:prstClr val="black"/>
@@ -9069,10 +7730,10 @@
         </p:nvGrpSpPr>
         <p:grpSpPr>
           <a:xfrm>
-            <a:off x="15906558" y="5387386"/>
-            <a:ext cx="1335045" cy="2063193"/>
-            <a:chOff x="15882873" y="5472379"/>
-            <a:chExt cx="1335045" cy="2063193"/>
+            <a:off x="15390796" y="5525924"/>
+            <a:ext cx="2011745" cy="2165552"/>
+            <a:chOff x="15458146" y="5472379"/>
+            <a:chExt cx="2011745" cy="2165552"/>
           </a:xfrm>
         </p:grpSpPr>
         <p:sp>
@@ -9089,8 +7750,8 @@
           </p:nvSpPr>
           <p:spPr>
             <a:xfrm>
-              <a:off x="15882873" y="5472379"/>
-              <a:ext cx="1335045" cy="2063193"/>
+              <a:off x="15458146" y="5472379"/>
+              <a:ext cx="2011745" cy="2165552"/>
             </a:xfrm>
             <a:custGeom>
               <a:avLst/>
@@ -9214,7 +7875,7 @@
           </p:nvSpPr>
           <p:spPr>
             <a:xfrm>
-              <a:off x="16233787" y="6885988"/>
+              <a:off x="16610093" y="6170548"/>
               <a:ext cx="762764" cy="463190"/>
             </a:xfrm>
             <a:prstGeom prst="roundRect">
@@ -9293,7 +7954,7 @@
           </p:nvSpPr>
           <p:spPr>
             <a:xfrm>
-              <a:off x="16110227" y="5681068"/>
+              <a:off x="15921027" y="5668596"/>
               <a:ext cx="762763" cy="463190"/>
             </a:xfrm>
             <a:prstGeom prst="roundRect">
@@ -9372,7 +8033,7 @@
           </p:nvSpPr>
           <p:spPr>
             <a:xfrm>
-              <a:off x="16093091" y="6264970"/>
+              <a:off x="15599239" y="6310151"/>
               <a:ext cx="905313" cy="463190"/>
             </a:xfrm>
             <a:prstGeom prst="roundRect">
@@ -9437,6 +8098,164 @@
             </a:p>
           </p:txBody>
         </p:sp>
+        <p:sp>
+          <p:nvSpPr>
+            <p:cNvPr id="274" name="Rectangle: Rounded Corners 273">
+              <a:extLst>
+                <a:ext uri="{FF2B5EF4-FFF2-40B4-BE49-F238E27FC236}">
+                  <a16:creationId xmlns:a16="http://schemas.microsoft.com/office/drawing/2014/main" id="{B877EECD-ACEC-3FC8-15B9-53B6B74B4BF5}"/>
+                </a:ext>
+              </a:extLst>
+            </p:cNvPr>
+            <p:cNvSpPr/>
+            <p:nvPr/>
+          </p:nvSpPr>
+          <p:spPr>
+            <a:xfrm>
+              <a:off x="15820192" y="6921254"/>
+              <a:ext cx="523478" cy="463190"/>
+            </a:xfrm>
+            <a:prstGeom prst="roundRect">
+              <a:avLst/>
+            </a:prstGeom>
+            <a:solidFill>
+              <a:schemeClr val="bg1">
+                <a:lumMod val="95000"/>
+              </a:schemeClr>
+            </a:solidFill>
+            <a:ln>
+              <a:solidFill>
+                <a:schemeClr val="tx2">
+                  <a:lumMod val="90000"/>
+                  <a:lumOff val="10000"/>
+                </a:schemeClr>
+              </a:solidFill>
+            </a:ln>
+          </p:spPr>
+          <p:style>
+            <a:lnRef idx="2">
+              <a:schemeClr val="accent1">
+                <a:shade val="15000"/>
+              </a:schemeClr>
+            </a:lnRef>
+            <a:fillRef idx="1">
+              <a:schemeClr val="accent1"/>
+            </a:fillRef>
+            <a:effectRef idx="0">
+              <a:schemeClr val="accent1"/>
+            </a:effectRef>
+            <a:fontRef idx="minor">
+              <a:schemeClr val="lt1"/>
+            </a:fontRef>
+          </p:style>
+          <p:txBody>
+            <a:bodyPr rtlCol="0" anchor="ctr"/>
+            <a:lstStyle/>
+            <a:p>
+              <a:pPr algn="ctr" defTabSz="1097280">
+                <a:defRPr/>
+              </a:pPr>
+              <a:r>
+                <a:rPr lang="en-US" kern="0" dirty="0">
+                  <a:solidFill>
+                    <a:prstClr val="black"/>
+                  </a:solidFill>
+                  <a:latin typeface="Calibri" panose="020F0502020204030204" pitchFamily="34" charset="0"/>
+                  <a:ea typeface="Calibri" panose="020F0502020204030204" pitchFamily="34" charset="0"/>
+                  <a:cs typeface="Calibri" panose="020F0502020204030204" pitchFamily="34" charset="0"/>
+                </a:rPr>
+                <a:t>LG</a:t>
+              </a:r>
+              <a:endParaRPr lang="nl-NL" kern="0" dirty="0">
+                <a:solidFill>
+                  <a:prstClr val="black"/>
+                </a:solidFill>
+                <a:latin typeface="Calibri" panose="020F0502020204030204" pitchFamily="34" charset="0"/>
+                <a:ea typeface="Calibri" panose="020F0502020204030204" pitchFamily="34" charset="0"/>
+                <a:cs typeface="Calibri" panose="020F0502020204030204" pitchFamily="34" charset="0"/>
+              </a:endParaRPr>
+            </a:p>
+          </p:txBody>
+        </p:sp>
+        <p:sp>
+          <p:nvSpPr>
+            <p:cNvPr id="275" name="Rectangle: Rounded Corners 274">
+              <a:extLst>
+                <a:ext uri="{FF2B5EF4-FFF2-40B4-BE49-F238E27FC236}">
+                  <a16:creationId xmlns:a16="http://schemas.microsoft.com/office/drawing/2014/main" id="{B7CF2B3C-9277-337F-2159-D7597CED78A0}"/>
+                </a:ext>
+              </a:extLst>
+            </p:cNvPr>
+            <p:cNvSpPr/>
+            <p:nvPr/>
+          </p:nvSpPr>
+          <p:spPr>
+            <a:xfrm>
+              <a:off x="16504552" y="6903648"/>
+              <a:ext cx="523478" cy="463190"/>
+            </a:xfrm>
+            <a:prstGeom prst="roundRect">
+              <a:avLst/>
+            </a:prstGeom>
+            <a:solidFill>
+              <a:schemeClr val="bg1">
+                <a:lumMod val="95000"/>
+              </a:schemeClr>
+            </a:solidFill>
+            <a:ln>
+              <a:solidFill>
+                <a:schemeClr val="tx2">
+                  <a:lumMod val="90000"/>
+                  <a:lumOff val="10000"/>
+                </a:schemeClr>
+              </a:solidFill>
+            </a:ln>
+          </p:spPr>
+          <p:style>
+            <a:lnRef idx="2">
+              <a:schemeClr val="accent1">
+                <a:shade val="15000"/>
+              </a:schemeClr>
+            </a:lnRef>
+            <a:fillRef idx="1">
+              <a:schemeClr val="accent1"/>
+            </a:fillRef>
+            <a:effectRef idx="0">
+              <a:schemeClr val="accent1"/>
+            </a:effectRef>
+            <a:fontRef idx="minor">
+              <a:schemeClr val="lt1"/>
+            </a:fontRef>
+          </p:style>
+          <p:txBody>
+            <a:bodyPr rtlCol="0" anchor="ctr"/>
+            <a:lstStyle/>
+            <a:p>
+              <a:pPr algn="ctr" defTabSz="1097280">
+                <a:defRPr/>
+              </a:pPr>
+              <a:r>
+                <a:rPr lang="en-US" kern="0" dirty="0">
+                  <a:solidFill>
+                    <a:prstClr val="black"/>
+                  </a:solidFill>
+                  <a:latin typeface="Calibri" panose="020F0502020204030204" pitchFamily="34" charset="0"/>
+                  <a:ea typeface="Calibri" panose="020F0502020204030204" pitchFamily="34" charset="0"/>
+                  <a:cs typeface="Calibri" panose="020F0502020204030204" pitchFamily="34" charset="0"/>
+                </a:rPr>
+                <a:t>CG</a:t>
+              </a:r>
+              <a:endParaRPr lang="nl-NL" kern="0" dirty="0">
+                <a:solidFill>
+                  <a:prstClr val="black"/>
+                </a:solidFill>
+                <a:latin typeface="Calibri" panose="020F0502020204030204" pitchFamily="34" charset="0"/>
+                <a:ea typeface="Calibri" panose="020F0502020204030204" pitchFamily="34" charset="0"/>
+                <a:cs typeface="Calibri" panose="020F0502020204030204" pitchFamily="34" charset="0"/>
+              </a:endParaRPr>
+            </a:p>
+          </p:txBody>
+        </p:sp>
       </p:grpSp>
       <p:cxnSp>
         <p:nvCxnSpPr>
@@ -9453,9 +8272,9 @@
           <p:nvPr/>
         </p:nvCxnSpPr>
         <p:spPr>
-          <a:xfrm flipV="1">
-            <a:off x="15132466" y="6153124"/>
-            <a:ext cx="715711" cy="226184"/>
+          <a:xfrm>
+            <a:off x="14680036" y="6192170"/>
+            <a:ext cx="736666" cy="46380"/>
           </a:xfrm>
           <a:prstGeom prst="straightConnector1">
             <a:avLst/>
@@ -9494,10 +8313,10 @@
         </p:nvGrpSpPr>
         <p:grpSpPr>
           <a:xfrm>
-            <a:off x="9198538" y="4719119"/>
-            <a:ext cx="2973838" cy="1409847"/>
-            <a:chOff x="10937173" y="4870670"/>
-            <a:chExt cx="2973838" cy="1409847"/>
+            <a:off x="9144000" y="4624668"/>
+            <a:ext cx="3189686" cy="1504298"/>
+            <a:chOff x="10882635" y="4776219"/>
+            <a:chExt cx="3189686" cy="1504298"/>
           </a:xfrm>
         </p:grpSpPr>
         <p:sp>
@@ -9514,8 +8333,8 @@
           </p:nvSpPr>
           <p:spPr>
             <a:xfrm>
-              <a:off x="10937173" y="4870670"/>
-              <a:ext cx="2973838" cy="1409847"/>
+              <a:off x="10882635" y="4776219"/>
+              <a:ext cx="3189686" cy="1504298"/>
             </a:xfrm>
             <a:custGeom>
               <a:avLst/>
@@ -9639,8 +8458,8 @@
           </p:nvSpPr>
           <p:spPr>
             <a:xfrm>
-              <a:off x="12724965" y="5552881"/>
-              <a:ext cx="1017170" cy="463190"/>
+              <a:off x="12859270" y="5445880"/>
+              <a:ext cx="1040877" cy="463190"/>
             </a:xfrm>
             <a:prstGeom prst="roundRect">
               <a:avLst/>
@@ -9718,7 +8537,7 @@
           </p:nvSpPr>
           <p:spPr>
             <a:xfrm>
-              <a:off x="11767008" y="5709975"/>
+              <a:off x="11863262" y="5709975"/>
               <a:ext cx="892051" cy="463190"/>
             </a:xfrm>
             <a:prstGeom prst="roundRect">
@@ -9797,7 +8616,7 @@
           </p:nvSpPr>
           <p:spPr>
             <a:xfrm>
-              <a:off x="12417308" y="5027823"/>
+              <a:off x="12417967" y="4922765"/>
               <a:ext cx="977320" cy="463190"/>
             </a:xfrm>
             <a:prstGeom prst="roundRect">
@@ -9876,7 +8695,7 @@
           </p:nvSpPr>
           <p:spPr>
             <a:xfrm>
-              <a:off x="11200869" y="4945087"/>
+              <a:off x="11157630" y="4910291"/>
               <a:ext cx="1306082" cy="830997"/>
             </a:xfrm>
             <a:prstGeom prst="rect">
@@ -9966,6 +8785,1537 @@
           </a:fontRef>
         </p:style>
       </p:cxnSp>
+      <p:sp>
+        <p:nvSpPr>
+          <p:cNvPr id="44" name="Rectangle: Rounded Corners 43">
+            <a:extLst>
+              <a:ext uri="{FF2B5EF4-FFF2-40B4-BE49-F238E27FC236}">
+                <a16:creationId xmlns:a16="http://schemas.microsoft.com/office/drawing/2014/main" id="{F4922C61-AD9B-1182-B2C0-50B6DA358AD8}"/>
+              </a:ext>
+            </a:extLst>
+          </p:cNvPr>
+          <p:cNvSpPr/>
+          <p:nvPr/>
+        </p:nvSpPr>
+        <p:spPr>
+          <a:xfrm>
+            <a:off x="2202058" y="4915543"/>
+            <a:ext cx="1505641" cy="463190"/>
+          </a:xfrm>
+          <a:prstGeom prst="roundRect">
+            <a:avLst/>
+          </a:prstGeom>
+          <a:solidFill>
+            <a:schemeClr val="bg1">
+              <a:lumMod val="85000"/>
+            </a:schemeClr>
+          </a:solidFill>
+          <a:ln>
+            <a:solidFill>
+              <a:schemeClr val="tx2">
+                <a:lumMod val="90000"/>
+                <a:lumOff val="10000"/>
+              </a:schemeClr>
+            </a:solidFill>
+          </a:ln>
+        </p:spPr>
+        <p:style>
+          <a:lnRef idx="2">
+            <a:schemeClr val="accent1">
+              <a:shade val="15000"/>
+            </a:schemeClr>
+          </a:lnRef>
+          <a:fillRef idx="1">
+            <a:schemeClr val="accent1"/>
+          </a:fillRef>
+          <a:effectRef idx="0">
+            <a:schemeClr val="accent1"/>
+          </a:effectRef>
+          <a:fontRef idx="minor">
+            <a:schemeClr val="lt1"/>
+          </a:fontRef>
+        </p:style>
+        <p:txBody>
+          <a:bodyPr rtlCol="0" anchor="ctr"/>
+          <a:lstStyle/>
+          <a:p>
+            <a:pPr algn="ctr"/>
+            <a:r>
+              <a:rPr lang="en-US" dirty="0">
+                <a:solidFill>
+                  <a:schemeClr val="tx1"/>
+                </a:solidFill>
+              </a:rPr>
+              <a:t>LOGLIK-(C)G</a:t>
+            </a:r>
+            <a:endParaRPr lang="nl-NL" dirty="0">
+              <a:solidFill>
+                <a:schemeClr val="tx1"/>
+              </a:solidFill>
+            </a:endParaRPr>
+          </a:p>
+        </p:txBody>
+      </p:sp>
+      <p:sp>
+        <p:nvSpPr>
+          <p:cNvPr id="283" name="TextBox 282">
+            <a:extLst>
+              <a:ext uri="{FF2B5EF4-FFF2-40B4-BE49-F238E27FC236}">
+                <a16:creationId xmlns:a16="http://schemas.microsoft.com/office/drawing/2014/main" id="{24B844B9-08ED-AFDC-FD6E-E2D5B7E07938}"/>
+              </a:ext>
+            </a:extLst>
+          </p:cNvPr>
+          <p:cNvSpPr txBox="1"/>
+          <p:nvPr/>
+        </p:nvSpPr>
+        <p:spPr>
+          <a:xfrm>
+            <a:off x="2271476" y="4576316"/>
+            <a:ext cx="1122423" cy="338554"/>
+          </a:xfrm>
+          <a:prstGeom prst="rect">
+            <a:avLst/>
+          </a:prstGeom>
+          <a:noFill/>
+        </p:spPr>
+        <p:txBody>
+          <a:bodyPr wrap="none" rtlCol="0">
+            <a:spAutoFit/>
+          </a:bodyPr>
+          <a:lstStyle/>
+          <a:p>
+            <a:pPr algn="r" defTabSz="1097280">
+              <a:defRPr/>
+            </a:pPr>
+            <a:r>
+              <a:rPr lang="en-US" sz="1600" i="1" kern="0" dirty="0">
+                <a:solidFill>
+                  <a:prstClr val="black"/>
+                </a:solidFill>
+                <a:latin typeface="Calibri" panose="020F0502020204030204" pitchFamily="34" charset="0"/>
+                <a:ea typeface="Calibri" panose="020F0502020204030204" pitchFamily="34" charset="0"/>
+                <a:cs typeface="Calibri" panose="020F0502020204030204" pitchFamily="34" charset="0"/>
+              </a:rPr>
+              <a:t>Continuous</a:t>
+            </a:r>
+          </a:p>
+        </p:txBody>
+      </p:sp>
+      <p:sp>
+        <p:nvSpPr>
+          <p:cNvPr id="285" name="Rectangle: Rounded Corners 284">
+            <a:extLst>
+              <a:ext uri="{FF2B5EF4-FFF2-40B4-BE49-F238E27FC236}">
+                <a16:creationId xmlns:a16="http://schemas.microsoft.com/office/drawing/2014/main" id="{A0E4210D-F6C0-5F5E-1843-60465C0230F9}"/>
+              </a:ext>
+            </a:extLst>
+          </p:cNvPr>
+          <p:cNvSpPr/>
+          <p:nvPr/>
+        </p:nvSpPr>
+        <p:spPr>
+          <a:xfrm>
+            <a:off x="2555150" y="5960575"/>
+            <a:ext cx="1152549" cy="463190"/>
+          </a:xfrm>
+          <a:prstGeom prst="roundRect">
+            <a:avLst/>
+          </a:prstGeom>
+          <a:solidFill>
+            <a:schemeClr val="bg1">
+              <a:lumMod val="85000"/>
+            </a:schemeClr>
+          </a:solidFill>
+          <a:ln>
+            <a:solidFill>
+              <a:schemeClr val="tx2">
+                <a:lumMod val="90000"/>
+                <a:lumOff val="10000"/>
+              </a:schemeClr>
+            </a:solidFill>
+          </a:ln>
+        </p:spPr>
+        <p:style>
+          <a:lnRef idx="2">
+            <a:schemeClr val="accent1">
+              <a:shade val="15000"/>
+            </a:schemeClr>
+          </a:lnRef>
+          <a:fillRef idx="1">
+            <a:schemeClr val="accent1"/>
+          </a:fillRef>
+          <a:effectRef idx="0">
+            <a:schemeClr val="accent1"/>
+          </a:effectRef>
+          <a:fontRef idx="minor">
+            <a:schemeClr val="lt1"/>
+          </a:fontRef>
+        </p:style>
+        <p:txBody>
+          <a:bodyPr rtlCol="0" anchor="ctr"/>
+          <a:lstStyle/>
+          <a:p>
+            <a:pPr algn="ctr"/>
+            <a:r>
+              <a:rPr lang="en-US" dirty="0">
+                <a:solidFill>
+                  <a:schemeClr val="tx1"/>
+                </a:solidFill>
+              </a:rPr>
+              <a:t>AIC-(C)G</a:t>
+            </a:r>
+            <a:endParaRPr lang="nl-NL" dirty="0">
+              <a:solidFill>
+                <a:schemeClr val="tx1"/>
+              </a:solidFill>
+            </a:endParaRPr>
+          </a:p>
+        </p:txBody>
+      </p:sp>
+      <p:sp>
+        <p:nvSpPr>
+          <p:cNvPr id="287" name="Rectangle: Rounded Corners 286">
+            <a:extLst>
+              <a:ext uri="{FF2B5EF4-FFF2-40B4-BE49-F238E27FC236}">
+                <a16:creationId xmlns:a16="http://schemas.microsoft.com/office/drawing/2014/main" id="{91784053-FBEC-7BF7-BAF4-13260D705853}"/>
+              </a:ext>
+            </a:extLst>
+          </p:cNvPr>
+          <p:cNvSpPr/>
+          <p:nvPr/>
+        </p:nvSpPr>
+        <p:spPr>
+          <a:xfrm>
+            <a:off x="2006693" y="5433556"/>
+            <a:ext cx="1323063" cy="463190"/>
+          </a:xfrm>
+          <a:prstGeom prst="roundRect">
+            <a:avLst/>
+          </a:prstGeom>
+          <a:solidFill>
+            <a:schemeClr val="bg1">
+              <a:lumMod val="85000"/>
+            </a:schemeClr>
+          </a:solidFill>
+          <a:ln>
+            <a:solidFill>
+              <a:schemeClr val="tx2">
+                <a:lumMod val="90000"/>
+                <a:lumOff val="10000"/>
+              </a:schemeClr>
+            </a:solidFill>
+          </a:ln>
+        </p:spPr>
+        <p:style>
+          <a:lnRef idx="2">
+            <a:schemeClr val="accent1">
+              <a:shade val="15000"/>
+            </a:schemeClr>
+          </a:lnRef>
+          <a:fillRef idx="1">
+            <a:schemeClr val="accent1"/>
+          </a:fillRef>
+          <a:effectRef idx="0">
+            <a:schemeClr val="accent1"/>
+          </a:effectRef>
+          <a:fontRef idx="minor">
+            <a:schemeClr val="lt1"/>
+          </a:fontRef>
+        </p:style>
+        <p:txBody>
+          <a:bodyPr rtlCol="0" anchor="ctr"/>
+          <a:lstStyle/>
+          <a:p>
+            <a:pPr algn="ctr"/>
+            <a:r>
+              <a:rPr lang="en-US" dirty="0">
+                <a:solidFill>
+                  <a:schemeClr val="tx1"/>
+                </a:solidFill>
+              </a:rPr>
+              <a:t>BIC-(C)G</a:t>
+            </a:r>
+            <a:endParaRPr lang="nl-NL" dirty="0">
+              <a:solidFill>
+                <a:schemeClr val="tx1"/>
+              </a:solidFill>
+            </a:endParaRPr>
+          </a:p>
+        </p:txBody>
+      </p:sp>
+      <p:sp>
+        <p:nvSpPr>
+          <p:cNvPr id="354" name="Freeform: Shape 353">
+            <a:extLst>
+              <a:ext uri="{FF2B5EF4-FFF2-40B4-BE49-F238E27FC236}">
+                <a16:creationId xmlns:a16="http://schemas.microsoft.com/office/drawing/2014/main" id="{13475C38-DE67-5B04-0853-5F93CFE72AD4}"/>
+              </a:ext>
+            </a:extLst>
+          </p:cNvPr>
+          <p:cNvSpPr/>
+          <p:nvPr/>
+        </p:nvSpPr>
+        <p:spPr>
+          <a:xfrm>
+            <a:off x="1679249" y="6915766"/>
+            <a:ext cx="9754002" cy="3100564"/>
+          </a:xfrm>
+          <a:custGeom>
+            <a:avLst/>
+            <a:gdLst>
+              <a:gd name="csX0" fmla="*/ 2767624 w 9754002"/>
+              <a:gd name="csY0" fmla="*/ 82397 h 3100564"/>
+              <a:gd name="csX1" fmla="*/ 2661746 w 9754002"/>
+              <a:gd name="csY1" fmla="*/ 82397 h 3100564"/>
+              <a:gd name="csX2" fmla="*/ 1073577 w 9754002"/>
+              <a:gd name="csY2" fmla="*/ 15021 h 3100564"/>
+              <a:gd name="csX3" fmla="*/ 178428 w 9754002"/>
+              <a:gd name="csY3" fmla="*/ 409656 h 3100564"/>
+              <a:gd name="csX4" fmla="*/ 197678 w 9754002"/>
+              <a:gd name="csY4" fmla="*/ 1988200 h 3100564"/>
+              <a:gd name="csX5" fmla="*/ 2238234 w 9754002"/>
+              <a:gd name="csY5" fmla="*/ 2844848 h 3100564"/>
+              <a:gd name="csX6" fmla="*/ 8850790 w 9754002"/>
+              <a:gd name="csY6" fmla="*/ 3046979 h 3100564"/>
+              <a:gd name="csX7" fmla="*/ 9312803 w 9754002"/>
+              <a:gd name="csY7" fmla="*/ 1988200 h 3100564"/>
+              <a:gd name="csX8" fmla="*/ 5270192 w 9754002"/>
+              <a:gd name="csY8" fmla="*/ 1410684 h 3100564"/>
+              <a:gd name="csX9" fmla="*/ 4326916 w 9754002"/>
+              <a:gd name="csY9" fmla="*/ 1025673 h 3100564"/>
+              <a:gd name="csX10" fmla="*/ 3739775 w 9754002"/>
+              <a:gd name="csY10" fmla="*/ 226776 h 3100564"/>
+              <a:gd name="csX11" fmla="*/ 2767624 w 9754002"/>
+              <a:gd name="csY11" fmla="*/ 82397 h 3100564"/>
+            </a:gdLst>
+            <a:ahLst/>
+            <a:cxnLst>
+              <a:cxn ang="0">
+                <a:pos x="csX0" y="csY0"/>
+              </a:cxn>
+              <a:cxn ang="0">
+                <a:pos x="csX1" y="csY1"/>
+              </a:cxn>
+              <a:cxn ang="0">
+                <a:pos x="csX2" y="csY2"/>
+              </a:cxn>
+              <a:cxn ang="0">
+                <a:pos x="csX3" y="csY3"/>
+              </a:cxn>
+              <a:cxn ang="0">
+                <a:pos x="csX4" y="csY4"/>
+              </a:cxn>
+              <a:cxn ang="0">
+                <a:pos x="csX5" y="csY5"/>
+              </a:cxn>
+              <a:cxn ang="0">
+                <a:pos x="csX6" y="csY6"/>
+              </a:cxn>
+              <a:cxn ang="0">
+                <a:pos x="csX7" y="csY7"/>
+              </a:cxn>
+              <a:cxn ang="0">
+                <a:pos x="csX8" y="csY8"/>
+              </a:cxn>
+              <a:cxn ang="0">
+                <a:pos x="csX9" y="csY9"/>
+              </a:cxn>
+              <a:cxn ang="0">
+                <a:pos x="csX10" y="csY10"/>
+              </a:cxn>
+              <a:cxn ang="0">
+                <a:pos x="csX11" y="csY11"/>
+              </a:cxn>
+            </a:cxnLst>
+            <a:rect l="l" t="t" r="r" b="b"/>
+            <a:pathLst>
+              <a:path w="9754002" h="3100564">
+                <a:moveTo>
+                  <a:pt x="2767624" y="82397"/>
+                </a:moveTo>
+                <a:cubicBezTo>
+                  <a:pt x="2587952" y="58334"/>
+                  <a:pt x="2661746" y="82397"/>
+                  <a:pt x="2661746" y="82397"/>
+                </a:cubicBezTo>
+                <a:cubicBezTo>
+                  <a:pt x="2379405" y="71168"/>
+                  <a:pt x="1487463" y="-39522"/>
+                  <a:pt x="1073577" y="15021"/>
+                </a:cubicBezTo>
+                <a:cubicBezTo>
+                  <a:pt x="659691" y="69564"/>
+                  <a:pt x="324411" y="80793"/>
+                  <a:pt x="178428" y="409656"/>
+                </a:cubicBezTo>
+                <a:cubicBezTo>
+                  <a:pt x="32445" y="738519"/>
+                  <a:pt x="-145623" y="1582335"/>
+                  <a:pt x="197678" y="1988200"/>
+                </a:cubicBezTo>
+                <a:cubicBezTo>
+                  <a:pt x="540979" y="2394065"/>
+                  <a:pt x="796049" y="2668385"/>
+                  <a:pt x="2238234" y="2844848"/>
+                </a:cubicBezTo>
+                <a:cubicBezTo>
+                  <a:pt x="3680419" y="3021311"/>
+                  <a:pt x="7671695" y="3189754"/>
+                  <a:pt x="8850790" y="3046979"/>
+                </a:cubicBezTo>
+                <a:cubicBezTo>
+                  <a:pt x="10029885" y="2904204"/>
+                  <a:pt x="9909569" y="2260916"/>
+                  <a:pt x="9312803" y="1988200"/>
+                </a:cubicBezTo>
+                <a:cubicBezTo>
+                  <a:pt x="8716037" y="1715484"/>
+                  <a:pt x="6101173" y="1571105"/>
+                  <a:pt x="5270192" y="1410684"/>
+                </a:cubicBezTo>
+                <a:cubicBezTo>
+                  <a:pt x="4439211" y="1250263"/>
+                  <a:pt x="4581986" y="1222991"/>
+                  <a:pt x="4326916" y="1025673"/>
+                </a:cubicBezTo>
+                <a:cubicBezTo>
+                  <a:pt x="4071847" y="828355"/>
+                  <a:pt x="4001261" y="387197"/>
+                  <a:pt x="3739775" y="226776"/>
+                </a:cubicBezTo>
+                <a:cubicBezTo>
+                  <a:pt x="3478289" y="66355"/>
+                  <a:pt x="2947296" y="106460"/>
+                  <a:pt x="2767624" y="82397"/>
+                </a:cubicBezTo>
+                <a:close/>
+              </a:path>
+            </a:pathLst>
+          </a:custGeom>
+          <a:solidFill>
+            <a:schemeClr val="bg1">
+              <a:alpha val="46000"/>
+            </a:schemeClr>
+          </a:solidFill>
+          <a:ln>
+            <a:solidFill>
+              <a:schemeClr val="bg1"/>
+            </a:solidFill>
+          </a:ln>
+        </p:spPr>
+        <p:style>
+          <a:lnRef idx="2">
+            <a:schemeClr val="accent1">
+              <a:shade val="15000"/>
+            </a:schemeClr>
+          </a:lnRef>
+          <a:fillRef idx="1">
+            <a:schemeClr val="accent1"/>
+          </a:fillRef>
+          <a:effectRef idx="0">
+            <a:schemeClr val="accent1"/>
+          </a:effectRef>
+          <a:fontRef idx="minor">
+            <a:schemeClr val="lt1"/>
+          </a:fontRef>
+        </p:style>
+        <p:txBody>
+          <a:bodyPr rtlCol="0" anchor="ctr"/>
+          <a:lstStyle/>
+          <a:p>
+            <a:pPr algn="ctr"/>
+            <a:endParaRPr lang="en-NL"/>
+          </a:p>
+        </p:txBody>
+      </p:sp>
+      <p:sp>
+        <p:nvSpPr>
+          <p:cNvPr id="365" name="TextBox 364">
+            <a:extLst>
+              <a:ext uri="{FF2B5EF4-FFF2-40B4-BE49-F238E27FC236}">
+                <a16:creationId xmlns:a16="http://schemas.microsoft.com/office/drawing/2014/main" id="{CE151728-266E-162D-F895-72F04792FFF7}"/>
+              </a:ext>
+            </a:extLst>
+          </p:cNvPr>
+          <p:cNvSpPr txBox="1"/>
+          <p:nvPr/>
+        </p:nvSpPr>
+        <p:spPr>
+          <a:xfrm>
+            <a:off x="3435957" y="7188788"/>
+            <a:ext cx="1631865" cy="338554"/>
+          </a:xfrm>
+          <a:prstGeom prst="rect">
+            <a:avLst/>
+          </a:prstGeom>
+          <a:noFill/>
+        </p:spPr>
+        <p:txBody>
+          <a:bodyPr wrap="square" rtlCol="0">
+            <a:spAutoFit/>
+          </a:bodyPr>
+          <a:lstStyle/>
+          <a:p>
+            <a:pPr algn="r" defTabSz="1097280">
+              <a:defRPr/>
+            </a:pPr>
+            <a:r>
+              <a:rPr lang="en-US" sz="1600" i="1" kern="0" dirty="0">
+                <a:solidFill>
+                  <a:prstClr val="black"/>
+                </a:solidFill>
+                <a:latin typeface="Calibri" panose="020F0502020204030204" pitchFamily="34" charset="0"/>
+                <a:ea typeface="Calibri" panose="020F0502020204030204" pitchFamily="34" charset="0"/>
+                <a:cs typeface="Calibri" panose="020F0502020204030204" pitchFamily="34" charset="0"/>
+              </a:rPr>
+              <a:t>Discrete datasets</a:t>
+            </a:r>
+          </a:p>
+        </p:txBody>
+      </p:sp>
+      <p:cxnSp>
+        <p:nvCxnSpPr>
+          <p:cNvPr id="366" name="Straight Arrow Connector 365">
+            <a:extLst>
+              <a:ext uri="{FF2B5EF4-FFF2-40B4-BE49-F238E27FC236}">
+                <a16:creationId xmlns:a16="http://schemas.microsoft.com/office/drawing/2014/main" id="{034AA2DA-8E22-8059-0512-B3445DB612ED}"/>
+              </a:ext>
+            </a:extLst>
+          </p:cNvPr>
+          <p:cNvCxnSpPr>
+            <a:cxnSpLocks/>
+          </p:cNvCxnSpPr>
+          <p:nvPr/>
+        </p:nvCxnSpPr>
+        <p:spPr>
+          <a:xfrm flipH="1">
+            <a:off x="6124275" y="7794849"/>
+            <a:ext cx="742633" cy="316559"/>
+          </a:xfrm>
+          <a:prstGeom prst="straightConnector1">
+            <a:avLst/>
+          </a:prstGeom>
+          <a:ln w="76200">
+            <a:headEnd type="triangle" w="med" len="med"/>
+            <a:tailEnd type="triangle" w="med" len="med"/>
+          </a:ln>
+        </p:spPr>
+        <p:style>
+          <a:lnRef idx="1">
+            <a:schemeClr val="dk1"/>
+          </a:lnRef>
+          <a:fillRef idx="0">
+            <a:schemeClr val="dk1"/>
+          </a:fillRef>
+          <a:effectRef idx="0">
+            <a:schemeClr val="dk1"/>
+          </a:effectRef>
+          <a:fontRef idx="minor">
+            <a:schemeClr val="tx1"/>
+          </a:fontRef>
+        </p:style>
+      </p:cxnSp>
+      <p:sp>
+        <p:nvSpPr>
+          <p:cNvPr id="367" name="TextBox 366">
+            <a:extLst>
+              <a:ext uri="{FF2B5EF4-FFF2-40B4-BE49-F238E27FC236}">
+                <a16:creationId xmlns:a16="http://schemas.microsoft.com/office/drawing/2014/main" id="{B2BB0D1C-39B1-FBE4-11DE-CD210D3F42FA}"/>
+              </a:ext>
+            </a:extLst>
+          </p:cNvPr>
+          <p:cNvSpPr txBox="1"/>
+          <p:nvPr/>
+        </p:nvSpPr>
+        <p:spPr>
+          <a:xfrm>
+            <a:off x="6401907" y="9002637"/>
+            <a:ext cx="1627753" cy="830997"/>
+          </a:xfrm>
+          <a:prstGeom prst="rect">
+            <a:avLst/>
+          </a:prstGeom>
+          <a:noFill/>
+        </p:spPr>
+        <p:txBody>
+          <a:bodyPr wrap="square" rtlCol="0">
+            <a:spAutoFit/>
+          </a:bodyPr>
+          <a:lstStyle/>
+          <a:p>
+            <a:pPr algn="r" defTabSz="1097280">
+              <a:defRPr/>
+            </a:pPr>
+            <a:r>
+              <a:rPr lang="en-US" sz="1600" i="1" kern="0" dirty="0">
+                <a:solidFill>
+                  <a:prstClr val="black"/>
+                </a:solidFill>
+                <a:latin typeface="Calibri" panose="020F0502020204030204" pitchFamily="34" charset="0"/>
+                <a:ea typeface="Calibri" panose="020F0502020204030204" pitchFamily="34" charset="0"/>
+                <a:cs typeface="Calibri" panose="020F0502020204030204" pitchFamily="34" charset="0"/>
+              </a:rPr>
+              <a:t>Discrete datasets</a:t>
+            </a:r>
+          </a:p>
+          <a:p>
+            <a:pPr algn="r" defTabSz="1097280">
+              <a:defRPr/>
+            </a:pPr>
+            <a:r>
+              <a:rPr lang="en-US" sz="1600" i="1" kern="0" dirty="0">
+                <a:solidFill>
+                  <a:prstClr val="black"/>
+                </a:solidFill>
+                <a:latin typeface="Calibri" panose="020F0502020204030204" pitchFamily="34" charset="0"/>
+                <a:ea typeface="Calibri" panose="020F0502020204030204" pitchFamily="34" charset="0"/>
+                <a:cs typeface="Calibri" panose="020F0502020204030204" pitchFamily="34" charset="0"/>
+              </a:rPr>
+              <a:t>Requires setting</a:t>
+            </a:r>
+          </a:p>
+          <a:p>
+            <a:pPr algn="r" defTabSz="1097280">
+              <a:defRPr/>
+            </a:pPr>
+            <a:r>
+              <a:rPr lang="en-US" sz="1600" i="1" kern="0" dirty="0">
+                <a:solidFill>
+                  <a:prstClr val="black"/>
+                </a:solidFill>
+                <a:latin typeface="Calibri" panose="020F0502020204030204" pitchFamily="34" charset="0"/>
+                <a:ea typeface="Calibri" panose="020F0502020204030204" pitchFamily="34" charset="0"/>
+                <a:cs typeface="Calibri" panose="020F0502020204030204" pitchFamily="34" charset="0"/>
+              </a:rPr>
+              <a:t>Root node</a:t>
+            </a:r>
+          </a:p>
+        </p:txBody>
+      </p:sp>
+      <p:sp>
+        <p:nvSpPr>
+          <p:cNvPr id="368" name="Rectangle: Rounded Corners 367">
+            <a:extLst>
+              <a:ext uri="{FF2B5EF4-FFF2-40B4-BE49-F238E27FC236}">
+                <a16:creationId xmlns:a16="http://schemas.microsoft.com/office/drawing/2014/main" id="{DBCFE042-849E-9B3F-20C5-7355E949A9B5}"/>
+              </a:ext>
+            </a:extLst>
+          </p:cNvPr>
+          <p:cNvSpPr/>
+          <p:nvPr/>
+        </p:nvSpPr>
+        <p:spPr>
+          <a:xfrm>
+            <a:off x="9608301" y="9127478"/>
+            <a:ext cx="1047568" cy="463190"/>
+          </a:xfrm>
+          <a:prstGeom prst="roundRect">
+            <a:avLst/>
+          </a:prstGeom>
+          <a:solidFill>
+            <a:schemeClr val="bg1">
+              <a:lumMod val="85000"/>
+            </a:schemeClr>
+          </a:solidFill>
+          <a:ln>
+            <a:solidFill>
+              <a:schemeClr val="tx2">
+                <a:lumMod val="90000"/>
+                <a:lumOff val="10000"/>
+              </a:schemeClr>
+            </a:solidFill>
+          </a:ln>
+        </p:spPr>
+        <p:style>
+          <a:lnRef idx="2">
+            <a:schemeClr val="accent1">
+              <a:shade val="15000"/>
+            </a:schemeClr>
+          </a:lnRef>
+          <a:fillRef idx="1">
+            <a:schemeClr val="accent1"/>
+          </a:fillRef>
+          <a:effectRef idx="0">
+            <a:schemeClr val="accent1"/>
+          </a:effectRef>
+          <a:fontRef idx="minor">
+            <a:schemeClr val="lt1"/>
+          </a:fontRef>
+        </p:style>
+        <p:txBody>
+          <a:bodyPr rtlCol="0" anchor="ctr"/>
+          <a:lstStyle/>
+          <a:p>
+            <a:pPr algn="ctr" defTabSz="1097280">
+              <a:defRPr/>
+            </a:pPr>
+            <a:r>
+              <a:rPr lang="en-US" kern="0" dirty="0">
+                <a:solidFill>
+                  <a:prstClr val="black"/>
+                </a:solidFill>
+                <a:latin typeface="Calibri" panose="020F0502020204030204" pitchFamily="34" charset="0"/>
+                <a:ea typeface="Calibri" panose="020F0502020204030204" pitchFamily="34" charset="0"/>
+                <a:cs typeface="Calibri" panose="020F0502020204030204" pitchFamily="34" charset="0"/>
+              </a:rPr>
+              <a:t>TAN</a:t>
+            </a:r>
+          </a:p>
+        </p:txBody>
+      </p:sp>
+      <p:sp>
+        <p:nvSpPr>
+          <p:cNvPr id="369" name="Rectangle: Rounded Corners 368">
+            <a:extLst>
+              <a:ext uri="{FF2B5EF4-FFF2-40B4-BE49-F238E27FC236}">
+                <a16:creationId xmlns:a16="http://schemas.microsoft.com/office/drawing/2014/main" id="{9FE0626A-89F0-D54D-D2C5-D181FD043205}"/>
+              </a:ext>
+            </a:extLst>
+          </p:cNvPr>
+          <p:cNvSpPr/>
+          <p:nvPr/>
+        </p:nvSpPr>
+        <p:spPr>
+          <a:xfrm>
+            <a:off x="8107675" y="8883990"/>
+            <a:ext cx="1345712" cy="463190"/>
+          </a:xfrm>
+          <a:prstGeom prst="roundRect">
+            <a:avLst/>
+          </a:prstGeom>
+          <a:solidFill>
+            <a:schemeClr val="bg1">
+              <a:lumMod val="85000"/>
+            </a:schemeClr>
+          </a:solidFill>
+          <a:ln>
+            <a:solidFill>
+              <a:schemeClr val="tx2">
+                <a:lumMod val="90000"/>
+                <a:lumOff val="10000"/>
+              </a:schemeClr>
+            </a:solidFill>
+          </a:ln>
+        </p:spPr>
+        <p:style>
+          <a:lnRef idx="2">
+            <a:schemeClr val="accent1">
+              <a:shade val="15000"/>
+            </a:schemeClr>
+          </a:lnRef>
+          <a:fillRef idx="1">
+            <a:schemeClr val="accent1"/>
+          </a:fillRef>
+          <a:effectRef idx="0">
+            <a:schemeClr val="accent1"/>
+          </a:effectRef>
+          <a:fontRef idx="minor">
+            <a:schemeClr val="lt1"/>
+          </a:fontRef>
+        </p:style>
+        <p:txBody>
+          <a:bodyPr rtlCol="0" anchor="ctr"/>
+          <a:lstStyle/>
+          <a:p>
+            <a:pPr algn="ctr" defTabSz="1097280">
+              <a:defRPr/>
+            </a:pPr>
+            <a:r>
+              <a:rPr lang="en-US" kern="0" dirty="0" err="1">
+                <a:solidFill>
+                  <a:prstClr val="black"/>
+                </a:solidFill>
+                <a:latin typeface="Calibri" panose="020F0502020204030204" pitchFamily="34" charset="0"/>
+                <a:ea typeface="Calibri" panose="020F0502020204030204" pitchFamily="34" charset="0"/>
+                <a:cs typeface="Calibri" panose="020F0502020204030204" pitchFamily="34" charset="0"/>
+              </a:rPr>
+              <a:t>NaiveBayes</a:t>
+            </a:r>
+            <a:endParaRPr lang="nl-NL" kern="0" dirty="0">
+              <a:solidFill>
+                <a:prstClr val="black"/>
+              </a:solidFill>
+              <a:latin typeface="Calibri" panose="020F0502020204030204" pitchFamily="34" charset="0"/>
+              <a:ea typeface="Calibri" panose="020F0502020204030204" pitchFamily="34" charset="0"/>
+              <a:cs typeface="Calibri" panose="020F0502020204030204" pitchFamily="34" charset="0"/>
+            </a:endParaRPr>
+          </a:p>
+        </p:txBody>
+      </p:sp>
+      <p:sp>
+        <p:nvSpPr>
+          <p:cNvPr id="370" name="Rectangle: Rounded Corners 369">
+            <a:extLst>
+              <a:ext uri="{FF2B5EF4-FFF2-40B4-BE49-F238E27FC236}">
+                <a16:creationId xmlns:a16="http://schemas.microsoft.com/office/drawing/2014/main" id="{4E6858B3-6FD5-FBBD-EAB1-4A28AAB3329E}"/>
+              </a:ext>
+            </a:extLst>
+          </p:cNvPr>
+          <p:cNvSpPr/>
+          <p:nvPr/>
+        </p:nvSpPr>
+        <p:spPr>
+          <a:xfrm>
+            <a:off x="8115734" y="9452364"/>
+            <a:ext cx="1303198" cy="463190"/>
+          </a:xfrm>
+          <a:prstGeom prst="roundRect">
+            <a:avLst/>
+          </a:prstGeom>
+          <a:solidFill>
+            <a:schemeClr val="bg1">
+              <a:lumMod val="85000"/>
+            </a:schemeClr>
+          </a:solidFill>
+          <a:ln>
+            <a:solidFill>
+              <a:schemeClr val="tx2">
+                <a:lumMod val="90000"/>
+                <a:lumOff val="10000"/>
+              </a:schemeClr>
+            </a:solidFill>
+          </a:ln>
+        </p:spPr>
+        <p:style>
+          <a:lnRef idx="2">
+            <a:schemeClr val="accent1">
+              <a:shade val="15000"/>
+            </a:schemeClr>
+          </a:lnRef>
+          <a:fillRef idx="1">
+            <a:schemeClr val="accent1"/>
+          </a:fillRef>
+          <a:effectRef idx="0">
+            <a:schemeClr val="accent1"/>
+          </a:effectRef>
+          <a:fontRef idx="minor">
+            <a:schemeClr val="lt1"/>
+          </a:fontRef>
+        </p:style>
+        <p:txBody>
+          <a:bodyPr rtlCol="0" anchor="ctr"/>
+          <a:lstStyle/>
+          <a:p>
+            <a:pPr algn="ctr" defTabSz="1097280">
+              <a:defRPr/>
+            </a:pPr>
+            <a:r>
+              <a:rPr lang="en-US" kern="0" dirty="0">
+                <a:solidFill>
+                  <a:prstClr val="black"/>
+                </a:solidFill>
+                <a:latin typeface="Calibri" panose="020F0502020204030204" pitchFamily="34" charset="0"/>
+                <a:ea typeface="Calibri" panose="020F0502020204030204" pitchFamily="34" charset="0"/>
+                <a:cs typeface="Calibri" panose="020F0502020204030204" pitchFamily="34" charset="0"/>
+              </a:rPr>
+              <a:t>Chow-Liu</a:t>
+            </a:r>
+            <a:endParaRPr lang="nl-NL" kern="0" dirty="0">
+              <a:solidFill>
+                <a:prstClr val="black"/>
+              </a:solidFill>
+              <a:latin typeface="Calibri" panose="020F0502020204030204" pitchFamily="34" charset="0"/>
+              <a:ea typeface="Calibri" panose="020F0502020204030204" pitchFamily="34" charset="0"/>
+              <a:cs typeface="Calibri" panose="020F0502020204030204" pitchFamily="34" charset="0"/>
+            </a:endParaRPr>
+          </a:p>
+        </p:txBody>
+      </p:sp>
+      <p:sp>
+        <p:nvSpPr>
+          <p:cNvPr id="371" name="Rectangle: Rounded Corners 370">
+            <a:extLst>
+              <a:ext uri="{FF2B5EF4-FFF2-40B4-BE49-F238E27FC236}">
+                <a16:creationId xmlns:a16="http://schemas.microsoft.com/office/drawing/2014/main" id="{5061BB80-2506-DE84-C26B-D1D906437332}"/>
+              </a:ext>
+            </a:extLst>
+          </p:cNvPr>
+          <p:cNvSpPr/>
+          <p:nvPr/>
+        </p:nvSpPr>
+        <p:spPr>
+          <a:xfrm>
+            <a:off x="2667562" y="7691476"/>
+            <a:ext cx="1807614" cy="463190"/>
+          </a:xfrm>
+          <a:prstGeom prst="roundRect">
+            <a:avLst/>
+          </a:prstGeom>
+          <a:solidFill>
+            <a:schemeClr val="bg1">
+              <a:lumMod val="95000"/>
+            </a:schemeClr>
+          </a:solidFill>
+          <a:ln>
+            <a:solidFill>
+              <a:schemeClr val="tx2">
+                <a:lumMod val="90000"/>
+                <a:lumOff val="10000"/>
+              </a:schemeClr>
+            </a:solidFill>
+          </a:ln>
+        </p:spPr>
+        <p:style>
+          <a:lnRef idx="2">
+            <a:schemeClr val="accent1">
+              <a:shade val="15000"/>
+            </a:schemeClr>
+          </a:lnRef>
+          <a:fillRef idx="1">
+            <a:schemeClr val="accent1"/>
+          </a:fillRef>
+          <a:effectRef idx="0">
+            <a:schemeClr val="accent1"/>
+          </a:effectRef>
+          <a:fontRef idx="minor">
+            <a:schemeClr val="lt1"/>
+          </a:fontRef>
+        </p:style>
+        <p:txBody>
+          <a:bodyPr rtlCol="0" anchor="ctr"/>
+          <a:lstStyle/>
+          <a:p>
+            <a:pPr algn="ctr"/>
+            <a:r>
+              <a:rPr lang="en-US" kern="0" dirty="0">
+                <a:solidFill>
+                  <a:prstClr val="black"/>
+                </a:solidFill>
+                <a:latin typeface="Calibri" panose="020F0502020204030204" pitchFamily="34" charset="0"/>
+                <a:ea typeface="Calibri" panose="020F0502020204030204" pitchFamily="34" charset="0"/>
+                <a:cs typeface="Calibri" panose="020F0502020204030204" pitchFamily="34" charset="0"/>
+              </a:rPr>
+              <a:t>Hill-</a:t>
+            </a:r>
+            <a:r>
+              <a:rPr lang="en-US" kern="0" dirty="0" err="1">
+                <a:solidFill>
+                  <a:prstClr val="black"/>
+                </a:solidFill>
+                <a:latin typeface="Calibri" panose="020F0502020204030204" pitchFamily="34" charset="0"/>
+                <a:ea typeface="Calibri" panose="020F0502020204030204" pitchFamily="34" charset="0"/>
+                <a:cs typeface="Calibri" panose="020F0502020204030204" pitchFamily="34" charset="0"/>
+              </a:rPr>
+              <a:t>Climbsearch</a:t>
+            </a:r>
+            <a:endParaRPr lang="nl-NL" kern="0" dirty="0">
+              <a:solidFill>
+                <a:prstClr val="black"/>
+              </a:solidFill>
+              <a:latin typeface="Calibri" panose="020F0502020204030204" pitchFamily="34" charset="0"/>
+              <a:ea typeface="Calibri" panose="020F0502020204030204" pitchFamily="34" charset="0"/>
+              <a:cs typeface="Calibri" panose="020F0502020204030204" pitchFamily="34" charset="0"/>
+            </a:endParaRPr>
+          </a:p>
+        </p:txBody>
+      </p:sp>
+      <p:sp>
+        <p:nvSpPr>
+          <p:cNvPr id="372" name="Rectangle: Rounded Corners 371">
+            <a:extLst>
+              <a:ext uri="{FF2B5EF4-FFF2-40B4-BE49-F238E27FC236}">
+                <a16:creationId xmlns:a16="http://schemas.microsoft.com/office/drawing/2014/main" id="{47866911-FF1D-92A5-3B53-98EEAD449DBA}"/>
+              </a:ext>
+            </a:extLst>
+          </p:cNvPr>
+          <p:cNvSpPr/>
+          <p:nvPr/>
+        </p:nvSpPr>
+        <p:spPr>
+          <a:xfrm>
+            <a:off x="2145263" y="7161894"/>
+            <a:ext cx="1260036" cy="463190"/>
+          </a:xfrm>
+          <a:prstGeom prst="roundRect">
+            <a:avLst/>
+          </a:prstGeom>
+          <a:solidFill>
+            <a:schemeClr val="bg1">
+              <a:lumMod val="95000"/>
+            </a:schemeClr>
+          </a:solidFill>
+          <a:ln>
+            <a:solidFill>
+              <a:schemeClr val="tx2">
+                <a:lumMod val="90000"/>
+                <a:lumOff val="10000"/>
+              </a:schemeClr>
+            </a:solidFill>
+          </a:ln>
+        </p:spPr>
+        <p:style>
+          <a:lnRef idx="2">
+            <a:schemeClr val="accent1">
+              <a:shade val="15000"/>
+            </a:schemeClr>
+          </a:lnRef>
+          <a:fillRef idx="1">
+            <a:schemeClr val="accent1"/>
+          </a:fillRef>
+          <a:effectRef idx="0">
+            <a:schemeClr val="accent1"/>
+          </a:effectRef>
+          <a:fontRef idx="minor">
+            <a:schemeClr val="lt1"/>
+          </a:fontRef>
+        </p:style>
+        <p:txBody>
+          <a:bodyPr rtlCol="0" anchor="ctr"/>
+          <a:lstStyle/>
+          <a:p>
+            <a:pPr algn="ctr" defTabSz="1097280">
+              <a:defRPr/>
+            </a:pPr>
+            <a:r>
+              <a:rPr lang="en-US" kern="0" dirty="0">
+                <a:solidFill>
+                  <a:prstClr val="black"/>
+                </a:solidFill>
+                <a:latin typeface="Calibri" panose="020F0502020204030204" pitchFamily="34" charset="0"/>
+                <a:ea typeface="Calibri" panose="020F0502020204030204" pitchFamily="34" charset="0"/>
+                <a:cs typeface="Calibri" panose="020F0502020204030204" pitchFamily="34" charset="0"/>
+              </a:rPr>
+              <a:t>Exhaustive</a:t>
+            </a:r>
+            <a:endParaRPr lang="nl-NL" kern="0" dirty="0">
+              <a:solidFill>
+                <a:prstClr val="black"/>
+              </a:solidFill>
+              <a:latin typeface="Calibri" panose="020F0502020204030204" pitchFamily="34" charset="0"/>
+              <a:ea typeface="Calibri" panose="020F0502020204030204" pitchFamily="34" charset="0"/>
+              <a:cs typeface="Calibri" panose="020F0502020204030204" pitchFamily="34" charset="0"/>
+            </a:endParaRPr>
+          </a:p>
+        </p:txBody>
+      </p:sp>
+      <p:sp>
+        <p:nvSpPr>
+          <p:cNvPr id="373" name="TextBox 372">
+            <a:extLst>
+              <a:ext uri="{FF2B5EF4-FFF2-40B4-BE49-F238E27FC236}">
+                <a16:creationId xmlns:a16="http://schemas.microsoft.com/office/drawing/2014/main" id="{48C60C20-86DA-FD6D-1F91-0A889960D7F8}"/>
+              </a:ext>
+            </a:extLst>
+          </p:cNvPr>
+          <p:cNvSpPr txBox="1"/>
+          <p:nvPr/>
+        </p:nvSpPr>
+        <p:spPr>
+          <a:xfrm>
+            <a:off x="2080678" y="8591298"/>
+            <a:ext cx="1807614" cy="585383"/>
+          </a:xfrm>
+          <a:prstGeom prst="rect">
+            <a:avLst/>
+          </a:prstGeom>
+          <a:noFill/>
+        </p:spPr>
+        <p:txBody>
+          <a:bodyPr wrap="square" rtlCol="0">
+            <a:spAutoFit/>
+          </a:bodyPr>
+          <a:lstStyle/>
+          <a:p>
+            <a:pPr algn="r" defTabSz="1097280">
+              <a:defRPr/>
+            </a:pPr>
+            <a:r>
+              <a:rPr lang="en-US" sz="1600" i="1" kern="0" dirty="0">
+                <a:solidFill>
+                  <a:prstClr val="black"/>
+                </a:solidFill>
+                <a:latin typeface="Calibri" panose="020F0502020204030204" pitchFamily="34" charset="0"/>
+                <a:ea typeface="Calibri" panose="020F0502020204030204" pitchFamily="34" charset="0"/>
+                <a:cs typeface="Calibri" panose="020F0502020204030204" pitchFamily="34" charset="0"/>
+              </a:rPr>
+              <a:t>Continuous and hybrid datasets</a:t>
+            </a:r>
+          </a:p>
+        </p:txBody>
+      </p:sp>
+      <p:sp>
+        <p:nvSpPr>
+          <p:cNvPr id="374" name="Rectangle: Rounded Corners 373">
+            <a:extLst>
+              <a:ext uri="{FF2B5EF4-FFF2-40B4-BE49-F238E27FC236}">
+                <a16:creationId xmlns:a16="http://schemas.microsoft.com/office/drawing/2014/main" id="{8BED6550-5AC7-80AD-5F64-D1C9AE58348A}"/>
+              </a:ext>
+            </a:extLst>
+          </p:cNvPr>
+          <p:cNvSpPr/>
+          <p:nvPr/>
+        </p:nvSpPr>
+        <p:spPr>
+          <a:xfrm>
+            <a:off x="3498423" y="9159006"/>
+            <a:ext cx="1778123" cy="463190"/>
+          </a:xfrm>
+          <a:prstGeom prst="roundRect">
+            <a:avLst/>
+          </a:prstGeom>
+          <a:solidFill>
+            <a:schemeClr val="bg1">
+              <a:lumMod val="85000"/>
+            </a:schemeClr>
+          </a:solidFill>
+          <a:ln>
+            <a:solidFill>
+              <a:schemeClr val="tx2">
+                <a:lumMod val="90000"/>
+                <a:lumOff val="10000"/>
+              </a:schemeClr>
+            </a:solidFill>
+          </a:ln>
+        </p:spPr>
+        <p:style>
+          <a:lnRef idx="2">
+            <a:schemeClr val="accent1">
+              <a:shade val="15000"/>
+            </a:schemeClr>
+          </a:lnRef>
+          <a:fillRef idx="1">
+            <a:schemeClr val="accent1"/>
+          </a:fillRef>
+          <a:effectRef idx="0">
+            <a:schemeClr val="accent1"/>
+          </a:effectRef>
+          <a:fontRef idx="minor">
+            <a:schemeClr val="lt1"/>
+          </a:fontRef>
+        </p:style>
+        <p:txBody>
+          <a:bodyPr rtlCol="0" anchor="ctr"/>
+          <a:lstStyle/>
+          <a:p>
+            <a:pPr algn="ctr"/>
+            <a:r>
+              <a:rPr lang="en-US" dirty="0">
+                <a:solidFill>
+                  <a:schemeClr val="tx1"/>
+                </a:solidFill>
+              </a:rPr>
+              <a:t>Direct-</a:t>
+            </a:r>
+            <a:r>
+              <a:rPr lang="en-US" dirty="0" err="1">
+                <a:solidFill>
+                  <a:schemeClr val="tx1"/>
+                </a:solidFill>
+              </a:rPr>
+              <a:t>LiNGAM</a:t>
+            </a:r>
+            <a:endParaRPr lang="en-US" dirty="0">
+              <a:solidFill>
+                <a:schemeClr val="tx1"/>
+              </a:solidFill>
+            </a:endParaRPr>
+          </a:p>
+        </p:txBody>
+      </p:sp>
+      <p:sp>
+        <p:nvSpPr>
+          <p:cNvPr id="375" name="Rectangle: Rounded Corners 374">
+            <a:extLst>
+              <a:ext uri="{FF2B5EF4-FFF2-40B4-BE49-F238E27FC236}">
+                <a16:creationId xmlns:a16="http://schemas.microsoft.com/office/drawing/2014/main" id="{31B1335D-0292-D6DE-D46C-F9FC9492EF37}"/>
+              </a:ext>
+            </a:extLst>
+          </p:cNvPr>
+          <p:cNvSpPr/>
+          <p:nvPr/>
+        </p:nvSpPr>
+        <p:spPr>
+          <a:xfrm>
+            <a:off x="3990325" y="8622878"/>
+            <a:ext cx="1778123" cy="463190"/>
+          </a:xfrm>
+          <a:prstGeom prst="roundRect">
+            <a:avLst/>
+          </a:prstGeom>
+          <a:solidFill>
+            <a:schemeClr val="bg1">
+              <a:lumMod val="85000"/>
+            </a:schemeClr>
+          </a:solidFill>
+          <a:ln>
+            <a:solidFill>
+              <a:schemeClr val="tx2">
+                <a:lumMod val="90000"/>
+                <a:lumOff val="10000"/>
+              </a:schemeClr>
+            </a:solidFill>
+          </a:ln>
+        </p:spPr>
+        <p:style>
+          <a:lnRef idx="2">
+            <a:schemeClr val="accent1">
+              <a:shade val="15000"/>
+            </a:schemeClr>
+          </a:lnRef>
+          <a:fillRef idx="1">
+            <a:schemeClr val="accent1"/>
+          </a:fillRef>
+          <a:effectRef idx="0">
+            <a:schemeClr val="accent1"/>
+          </a:effectRef>
+          <a:fontRef idx="minor">
+            <a:schemeClr val="lt1"/>
+          </a:fontRef>
+        </p:style>
+        <p:txBody>
+          <a:bodyPr rtlCol="0" anchor="ctr"/>
+          <a:lstStyle/>
+          <a:p>
+            <a:pPr algn="ctr"/>
+            <a:r>
+              <a:rPr lang="en-US" dirty="0">
+                <a:solidFill>
+                  <a:schemeClr val="tx1"/>
+                </a:solidFill>
+              </a:rPr>
+              <a:t>ICA-</a:t>
+            </a:r>
+            <a:r>
+              <a:rPr lang="en-US" dirty="0" err="1">
+                <a:solidFill>
+                  <a:schemeClr val="tx1"/>
+                </a:solidFill>
+              </a:rPr>
+              <a:t>LiNGAM</a:t>
+            </a:r>
+            <a:endParaRPr lang="en-US" dirty="0">
+              <a:solidFill>
+                <a:schemeClr val="tx1"/>
+              </a:solidFill>
+            </a:endParaRPr>
+          </a:p>
+        </p:txBody>
+      </p:sp>
+      <p:sp>
+        <p:nvSpPr>
+          <p:cNvPr id="59" name="Freeform: Shape 58">
+            <a:extLst>
+              <a:ext uri="{FF2B5EF4-FFF2-40B4-BE49-F238E27FC236}">
+                <a16:creationId xmlns:a16="http://schemas.microsoft.com/office/drawing/2014/main" id="{2027618E-D8B4-2B2C-98AA-13419B795687}"/>
+              </a:ext>
+            </a:extLst>
+          </p:cNvPr>
+          <p:cNvSpPr/>
+          <p:nvPr/>
+        </p:nvSpPr>
+        <p:spPr>
+          <a:xfrm rot="16200000">
+            <a:off x="13490669" y="7674983"/>
+            <a:ext cx="941643" cy="3994390"/>
+          </a:xfrm>
+          <a:custGeom>
+            <a:avLst/>
+            <a:gdLst>
+              <a:gd name="connsiteX0" fmla="*/ 207994 w 2752935"/>
+              <a:gd name="connsiteY0" fmla="*/ 446502 h 2765448"/>
+              <a:gd name="connsiteX1" fmla="*/ 251537 w 2752935"/>
+              <a:gd name="connsiteY1" fmla="*/ 2405931 h 2765448"/>
+              <a:gd name="connsiteX2" fmla="*/ 2181937 w 2752935"/>
+              <a:gd name="connsiteY2" fmla="*/ 2652674 h 2765448"/>
+              <a:gd name="connsiteX3" fmla="*/ 2747994 w 2752935"/>
+              <a:gd name="connsiteY3" fmla="*/ 1128674 h 2765448"/>
+              <a:gd name="connsiteX4" fmla="*/ 1949709 w 2752935"/>
+              <a:gd name="connsiteY4" fmla="*/ 40102 h 2765448"/>
+              <a:gd name="connsiteX5" fmla="*/ 207994 w 2752935"/>
+              <a:gd name="connsiteY5" fmla="*/ 446502 h 2765448"/>
+            </a:gdLst>
+            <a:ahLst/>
+            <a:cxnLst>
+              <a:cxn ang="0">
+                <a:pos x="connsiteX0" y="connsiteY0"/>
+              </a:cxn>
+              <a:cxn ang="0">
+                <a:pos x="connsiteX1" y="connsiteY1"/>
+              </a:cxn>
+              <a:cxn ang="0">
+                <a:pos x="connsiteX2" y="connsiteY2"/>
+              </a:cxn>
+              <a:cxn ang="0">
+                <a:pos x="connsiteX3" y="connsiteY3"/>
+              </a:cxn>
+              <a:cxn ang="0">
+                <a:pos x="connsiteX4" y="connsiteY4"/>
+              </a:cxn>
+              <a:cxn ang="0">
+                <a:pos x="connsiteX5" y="connsiteY5"/>
+              </a:cxn>
+            </a:cxnLst>
+            <a:rect l="l" t="t" r="r" b="b"/>
+            <a:pathLst>
+              <a:path w="2752935" h="2765448">
+                <a:moveTo>
+                  <a:pt x="207994" y="446502"/>
+                </a:moveTo>
+                <a:cubicBezTo>
+                  <a:pt x="-75035" y="840807"/>
+                  <a:pt x="-77453" y="2038236"/>
+                  <a:pt x="251537" y="2405931"/>
+                </a:cubicBezTo>
+                <a:cubicBezTo>
+                  <a:pt x="580527" y="2773626"/>
+                  <a:pt x="1765861" y="2865550"/>
+                  <a:pt x="2181937" y="2652674"/>
+                </a:cubicBezTo>
+                <a:cubicBezTo>
+                  <a:pt x="2598013" y="2439798"/>
+                  <a:pt x="2786699" y="1564103"/>
+                  <a:pt x="2747994" y="1128674"/>
+                </a:cubicBezTo>
+                <a:cubicBezTo>
+                  <a:pt x="2709289" y="693245"/>
+                  <a:pt x="2373042" y="153797"/>
+                  <a:pt x="1949709" y="40102"/>
+                </a:cubicBezTo>
+                <a:cubicBezTo>
+                  <a:pt x="1526376" y="-73593"/>
+                  <a:pt x="491023" y="52197"/>
+                  <a:pt x="207994" y="446502"/>
+                </a:cubicBezTo>
+                <a:close/>
+              </a:path>
+            </a:pathLst>
+          </a:custGeom>
+          <a:solidFill>
+            <a:schemeClr val="bg1">
+              <a:alpha val="46000"/>
+            </a:schemeClr>
+          </a:solidFill>
+          <a:ln>
+            <a:solidFill>
+              <a:schemeClr val="bg1"/>
+            </a:solidFill>
+          </a:ln>
+        </p:spPr>
+        <p:style>
+          <a:lnRef idx="2">
+            <a:schemeClr val="accent1">
+              <a:shade val="15000"/>
+            </a:schemeClr>
+          </a:lnRef>
+          <a:fillRef idx="1">
+            <a:schemeClr val="accent1"/>
+          </a:fillRef>
+          <a:effectRef idx="0">
+            <a:schemeClr val="accent1"/>
+          </a:effectRef>
+          <a:fontRef idx="minor">
+            <a:schemeClr val="lt1"/>
+          </a:fontRef>
+        </p:style>
+        <p:txBody>
+          <a:bodyPr rtlCol="0" anchor="ctr"/>
+          <a:lstStyle/>
+          <a:p>
+            <a:pPr algn="ctr"/>
+            <a:endParaRPr lang="nl-NL"/>
+          </a:p>
+        </p:txBody>
+      </p:sp>
+      <p:sp>
+        <p:nvSpPr>
+          <p:cNvPr id="61" name="Rectangle: Rounded Corners 60">
+            <a:extLst>
+              <a:ext uri="{FF2B5EF4-FFF2-40B4-BE49-F238E27FC236}">
+                <a16:creationId xmlns:a16="http://schemas.microsoft.com/office/drawing/2014/main" id="{0E2AEF43-7819-116F-B3FE-8D609E80251F}"/>
+              </a:ext>
+            </a:extLst>
+          </p:cNvPr>
+          <p:cNvSpPr/>
+          <p:nvPr/>
+        </p:nvSpPr>
+        <p:spPr>
+          <a:xfrm>
+            <a:off x="12234510" y="9450830"/>
+            <a:ext cx="2004851" cy="463190"/>
+          </a:xfrm>
+          <a:prstGeom prst="roundRect">
+            <a:avLst/>
+          </a:prstGeom>
+          <a:solidFill>
+            <a:schemeClr val="bg1">
+              <a:lumMod val="95000"/>
+            </a:schemeClr>
+          </a:solidFill>
+          <a:ln>
+            <a:solidFill>
+              <a:schemeClr val="tx2">
+                <a:lumMod val="90000"/>
+                <a:lumOff val="10000"/>
+              </a:schemeClr>
+            </a:solidFill>
+          </a:ln>
+        </p:spPr>
+        <p:style>
+          <a:lnRef idx="2">
+            <a:schemeClr val="accent1">
+              <a:shade val="15000"/>
+            </a:schemeClr>
+          </a:lnRef>
+          <a:fillRef idx="1">
+            <a:schemeClr val="accent1"/>
+          </a:fillRef>
+          <a:effectRef idx="0">
+            <a:schemeClr val="accent1"/>
+          </a:effectRef>
+          <a:fontRef idx="minor">
+            <a:schemeClr val="lt1"/>
+          </a:fontRef>
+        </p:style>
+        <p:txBody>
+          <a:bodyPr rtlCol="0" anchor="ctr"/>
+          <a:lstStyle/>
+          <a:p>
+            <a:pPr algn="ctr" defTabSz="1097280">
+              <a:defRPr/>
+            </a:pPr>
+            <a:r>
+              <a:rPr lang="en-US" kern="0" dirty="0">
+                <a:solidFill>
+                  <a:prstClr val="black"/>
+                </a:solidFill>
+                <a:latin typeface="Calibri" panose="020F0502020204030204" pitchFamily="34" charset="0"/>
+                <a:ea typeface="Calibri" panose="020F0502020204030204" pitchFamily="34" charset="0"/>
+                <a:cs typeface="Calibri" panose="020F0502020204030204" pitchFamily="34" charset="0"/>
+              </a:rPr>
+              <a:t>Intervention: do</a:t>
+            </a:r>
+            <a:endParaRPr lang="nl-NL" kern="0" dirty="0">
+              <a:solidFill>
+                <a:prstClr val="black"/>
+              </a:solidFill>
+              <a:latin typeface="Calibri" panose="020F0502020204030204" pitchFamily="34" charset="0"/>
+              <a:ea typeface="Calibri" panose="020F0502020204030204" pitchFamily="34" charset="0"/>
+              <a:cs typeface="Calibri" panose="020F0502020204030204" pitchFamily="34" charset="0"/>
+            </a:endParaRPr>
+          </a:p>
+        </p:txBody>
+      </p:sp>
+      <p:cxnSp>
+        <p:nvCxnSpPr>
+          <p:cNvPr id="258" name="Straight Arrow Connector 257">
+            <a:extLst>
+              <a:ext uri="{FF2B5EF4-FFF2-40B4-BE49-F238E27FC236}">
+                <a16:creationId xmlns:a16="http://schemas.microsoft.com/office/drawing/2014/main" id="{646FCD2B-9314-363B-EB72-03C9855BE011}"/>
+              </a:ext>
+            </a:extLst>
+          </p:cNvPr>
+          <p:cNvCxnSpPr>
+            <a:cxnSpLocks/>
+          </p:cNvCxnSpPr>
+          <p:nvPr/>
+        </p:nvCxnSpPr>
+        <p:spPr>
+          <a:xfrm flipV="1">
+            <a:off x="14508050" y="8539959"/>
+            <a:ext cx="0" cy="650910"/>
+          </a:xfrm>
+          <a:prstGeom prst="straightConnector1">
+            <a:avLst/>
+          </a:prstGeom>
+          <a:ln w="76200">
+            <a:headEnd type="triangle" w="med" len="med"/>
+            <a:tailEnd type="triangle" w="med" len="med"/>
+          </a:ln>
+        </p:spPr>
+        <p:style>
+          <a:lnRef idx="1">
+            <a:schemeClr val="dk1"/>
+          </a:lnRef>
+          <a:fillRef idx="0">
+            <a:schemeClr val="dk1"/>
+          </a:fillRef>
+          <a:effectRef idx="0">
+            <a:schemeClr val="dk1"/>
+          </a:effectRef>
+          <a:fontRef idx="minor">
+            <a:schemeClr val="tx1"/>
+          </a:fontRef>
+        </p:style>
+      </p:cxnSp>
+      <p:sp>
+        <p:nvSpPr>
+          <p:cNvPr id="279" name="Rectangle: Rounded Corners 278">
+            <a:extLst>
+              <a:ext uri="{FF2B5EF4-FFF2-40B4-BE49-F238E27FC236}">
+                <a16:creationId xmlns:a16="http://schemas.microsoft.com/office/drawing/2014/main" id="{49D013CE-0A5C-060B-FD7B-78ADC6481CA3}"/>
+              </a:ext>
+            </a:extLst>
+          </p:cNvPr>
+          <p:cNvSpPr/>
+          <p:nvPr/>
+        </p:nvSpPr>
+        <p:spPr>
+          <a:xfrm>
+            <a:off x="14363452" y="9452364"/>
+            <a:ext cx="1341799" cy="463190"/>
+          </a:xfrm>
+          <a:prstGeom prst="roundRect">
+            <a:avLst/>
+          </a:prstGeom>
+          <a:solidFill>
+            <a:schemeClr val="bg1">
+              <a:lumMod val="95000"/>
+            </a:schemeClr>
+          </a:solidFill>
+          <a:ln>
+            <a:solidFill>
+              <a:schemeClr val="tx2">
+                <a:lumMod val="90000"/>
+                <a:lumOff val="10000"/>
+              </a:schemeClr>
+            </a:solidFill>
+          </a:ln>
+        </p:spPr>
+        <p:style>
+          <a:lnRef idx="2">
+            <a:schemeClr val="accent1">
+              <a:shade val="15000"/>
+            </a:schemeClr>
+          </a:lnRef>
+          <a:fillRef idx="1">
+            <a:schemeClr val="accent1"/>
+          </a:fillRef>
+          <a:effectRef idx="0">
+            <a:schemeClr val="accent1"/>
+          </a:effectRef>
+          <a:fontRef idx="minor">
+            <a:schemeClr val="lt1"/>
+          </a:fontRef>
+        </p:style>
+        <p:txBody>
+          <a:bodyPr rtlCol="0" anchor="ctr"/>
+          <a:lstStyle/>
+          <a:p>
+            <a:pPr algn="ctr" defTabSz="1097280">
+              <a:defRPr/>
+            </a:pPr>
+            <a:r>
+              <a:rPr lang="en-US" kern="0" dirty="0">
+                <a:solidFill>
+                  <a:prstClr val="black"/>
+                </a:solidFill>
+                <a:latin typeface="Calibri" panose="020F0502020204030204" pitchFamily="34" charset="0"/>
+                <a:ea typeface="Calibri" panose="020F0502020204030204" pitchFamily="34" charset="0"/>
+                <a:cs typeface="Calibri" panose="020F0502020204030204" pitchFamily="34" charset="0"/>
+              </a:rPr>
+              <a:t>conditional</a:t>
+            </a:r>
+            <a:endParaRPr lang="nl-NL" kern="0" dirty="0">
+              <a:solidFill>
+                <a:prstClr val="black"/>
+              </a:solidFill>
+              <a:latin typeface="Calibri" panose="020F0502020204030204" pitchFamily="34" charset="0"/>
+              <a:ea typeface="Calibri" panose="020F0502020204030204" pitchFamily="34" charset="0"/>
+              <a:cs typeface="Calibri" panose="020F0502020204030204" pitchFamily="34" charset="0"/>
+            </a:endParaRPr>
+          </a:p>
+        </p:txBody>
+      </p:sp>
     </p:spTree>
     <p:extLst>
       <p:ext uri="{BB962C8B-B14F-4D97-AF65-F5344CB8AC3E}">

--- a/docs/figs/Landscape_Causal_Discovery_Bnlearn_for_python.pptx
+++ b/docs/figs/Landscape_Causal_Discovery_Bnlearn_for_python.pptx
@@ -261,7 +261,7 @@
           <a:p>
             <a:fld id="{38773C79-E55F-43DB-B2E4-E2C2AD643910}" type="datetimeFigureOut">
               <a:rPr lang="nl-NL" smtClean="0"/>
-              <a:t>16-9-2026</a:t>
+              <a:t>20-9-2026</a:t>
             </a:fld>
             <a:endParaRPr lang="nl-NL"/>
           </a:p>
@@ -431,7 +431,7 @@
           <a:p>
             <a:fld id="{38773C79-E55F-43DB-B2E4-E2C2AD643910}" type="datetimeFigureOut">
               <a:rPr lang="nl-NL" smtClean="0"/>
-              <a:t>16-9-2026</a:t>
+              <a:t>20-9-2026</a:t>
             </a:fld>
             <a:endParaRPr lang="nl-NL"/>
           </a:p>
@@ -611,7 +611,7 @@
           <a:p>
             <a:fld id="{38773C79-E55F-43DB-B2E4-E2C2AD643910}" type="datetimeFigureOut">
               <a:rPr lang="nl-NL" smtClean="0"/>
-              <a:t>16-9-2026</a:t>
+              <a:t>20-9-2026</a:t>
             </a:fld>
             <a:endParaRPr lang="nl-NL"/>
           </a:p>
@@ -781,7 +781,7 @@
           <a:p>
             <a:fld id="{38773C79-E55F-43DB-B2E4-E2C2AD643910}" type="datetimeFigureOut">
               <a:rPr lang="nl-NL" smtClean="0"/>
-              <a:t>16-9-2026</a:t>
+              <a:t>20-9-2026</a:t>
             </a:fld>
             <a:endParaRPr lang="nl-NL"/>
           </a:p>
@@ -1027,7 +1027,7 @@
           <a:p>
             <a:fld id="{38773C79-E55F-43DB-B2E4-E2C2AD643910}" type="datetimeFigureOut">
               <a:rPr lang="nl-NL" smtClean="0"/>
-              <a:t>16-9-2026</a:t>
+              <a:t>20-9-2026</a:t>
             </a:fld>
             <a:endParaRPr lang="nl-NL"/>
           </a:p>
@@ -1259,7 +1259,7 @@
           <a:p>
             <a:fld id="{38773C79-E55F-43DB-B2E4-E2C2AD643910}" type="datetimeFigureOut">
               <a:rPr lang="nl-NL" smtClean="0"/>
-              <a:t>16-9-2026</a:t>
+              <a:t>20-9-2026</a:t>
             </a:fld>
             <a:endParaRPr lang="nl-NL"/>
           </a:p>
@@ -1626,7 +1626,7 @@
           <a:p>
             <a:fld id="{38773C79-E55F-43DB-B2E4-E2C2AD643910}" type="datetimeFigureOut">
               <a:rPr lang="nl-NL" smtClean="0"/>
-              <a:t>16-9-2026</a:t>
+              <a:t>20-9-2026</a:t>
             </a:fld>
             <a:endParaRPr lang="nl-NL"/>
           </a:p>
@@ -1744,7 +1744,7 @@
           <a:p>
             <a:fld id="{38773C79-E55F-43DB-B2E4-E2C2AD643910}" type="datetimeFigureOut">
               <a:rPr lang="nl-NL" smtClean="0"/>
-              <a:t>16-9-2026</a:t>
+              <a:t>20-9-2026</a:t>
             </a:fld>
             <a:endParaRPr lang="nl-NL"/>
           </a:p>
@@ -1839,7 +1839,7 @@
           <a:p>
             <a:fld id="{38773C79-E55F-43DB-B2E4-E2C2AD643910}" type="datetimeFigureOut">
               <a:rPr lang="nl-NL" smtClean="0"/>
-              <a:t>16-9-2026</a:t>
+              <a:t>20-9-2026</a:t>
             </a:fld>
             <a:endParaRPr lang="nl-NL"/>
           </a:p>
@@ -2116,7 +2116,7 @@
           <a:p>
             <a:fld id="{38773C79-E55F-43DB-B2E4-E2C2AD643910}" type="datetimeFigureOut">
               <a:rPr lang="nl-NL" smtClean="0"/>
-              <a:t>16-9-2026</a:t>
+              <a:t>20-9-2026</a:t>
             </a:fld>
             <a:endParaRPr lang="nl-NL"/>
           </a:p>
@@ -2373,7 +2373,7 @@
           <a:p>
             <a:fld id="{38773C79-E55F-43DB-B2E4-E2C2AD643910}" type="datetimeFigureOut">
               <a:rPr lang="nl-NL" smtClean="0"/>
-              <a:t>16-9-2026</a:t>
+              <a:t>20-9-2026</a:t>
             </a:fld>
             <a:endParaRPr lang="nl-NL"/>
           </a:p>
@@ -2586,7 +2586,7 @@
           <a:p>
             <a:fld id="{38773C79-E55F-43DB-B2E4-E2C2AD643910}" type="datetimeFigureOut">
               <a:rPr lang="nl-NL" smtClean="0"/>
-              <a:t>16-9-2026</a:t>
+              <a:t>20-9-2026</a:t>
             </a:fld>
             <a:endParaRPr lang="nl-NL"/>
           </a:p>
@@ -3678,7 +3678,7 @@
         </p:nvSpPr>
         <p:spPr>
           <a:xfrm>
-            <a:off x="6761604" y="5267518"/>
+            <a:off x="6204648" y="4044331"/>
             <a:ext cx="2738155" cy="2914025"/>
           </a:xfrm>
           <a:custGeom>
@@ -3910,7 +3910,7 @@
         </p:nvSpPr>
         <p:spPr>
           <a:xfrm>
-            <a:off x="9476397" y="7875791"/>
+            <a:off x="9431041" y="8348226"/>
             <a:ext cx="4464972" cy="584775"/>
           </a:xfrm>
           <a:prstGeom prst="rect">
@@ -4109,8 +4109,8 @@
         </p:nvCxnSpPr>
         <p:spPr>
           <a:xfrm flipH="1">
-            <a:off x="8079651" y="1866751"/>
-            <a:ext cx="2636745" cy="2149482"/>
+            <a:off x="10220925" y="1866751"/>
+            <a:ext cx="495471" cy="1499581"/>
           </a:xfrm>
           <a:prstGeom prst="straightConnector1">
             <a:avLst/>
@@ -4152,8 +4152,8 @@
         </p:nvGrpSpPr>
         <p:grpSpPr>
           <a:xfrm>
-            <a:off x="6151776" y="4078450"/>
-            <a:ext cx="1936906" cy="1016516"/>
+            <a:off x="9632619" y="3536073"/>
+            <a:ext cx="1764717" cy="1016516"/>
             <a:chOff x="5191418" y="3921912"/>
             <a:chExt cx="1936906" cy="1016516"/>
           </a:xfrm>
@@ -4499,9 +4499,9 @@
           <p:nvPr/>
         </p:nvCxnSpPr>
         <p:spPr>
-          <a:xfrm>
-            <a:off x="7551560" y="5095133"/>
-            <a:ext cx="78818" cy="343463"/>
+          <a:xfrm flipH="1">
+            <a:off x="8635360" y="4220815"/>
+            <a:ext cx="885892" cy="236227"/>
           </a:xfrm>
           <a:prstGeom prst="straightConnector1">
             <a:avLst/>
@@ -4545,7 +4545,7 @@
         </p:nvGrpSpPr>
         <p:grpSpPr>
           <a:xfrm>
-            <a:off x="7111198" y="5903949"/>
+            <a:off x="6554242" y="4680762"/>
             <a:ext cx="1936906" cy="1016516"/>
             <a:chOff x="4100114" y="5116561"/>
             <a:chExt cx="1936906" cy="1016516"/>
@@ -4678,7 +4678,7 @@
         </p:nvGrpSpPr>
         <p:grpSpPr>
           <a:xfrm>
-            <a:off x="7152060" y="7074509"/>
+            <a:off x="6595104" y="5851322"/>
             <a:ext cx="1936906" cy="1016516"/>
             <a:chOff x="4100114" y="5116561"/>
             <a:chExt cx="1936906" cy="1016516"/>
@@ -4813,8 +4813,8 @@
         </p:nvCxnSpPr>
         <p:spPr>
           <a:xfrm flipH="1" flipV="1">
-            <a:off x="5428648" y="5786948"/>
-            <a:ext cx="1308416" cy="389464"/>
+            <a:off x="5539458" y="5651946"/>
+            <a:ext cx="776000" cy="133463"/>
           </a:xfrm>
           <a:prstGeom prst="straightConnector1">
             <a:avLst/>
@@ -4990,8 +4990,8 @@
         </p:nvGrpSpPr>
         <p:grpSpPr>
           <a:xfrm>
-            <a:off x="10050333" y="3516636"/>
-            <a:ext cx="1936906" cy="1016516"/>
+            <a:off x="12091368" y="3009779"/>
+            <a:ext cx="1599276" cy="1016516"/>
             <a:chOff x="4100114" y="5116561"/>
             <a:chExt cx="1936906" cy="1016516"/>
           </a:xfrm>
@@ -5125,8 +5125,8 @@
         </p:nvCxnSpPr>
         <p:spPr>
           <a:xfrm flipV="1">
-            <a:off x="8254977" y="4176242"/>
-            <a:ext cx="1656546" cy="264111"/>
+            <a:off x="11451840" y="3633774"/>
+            <a:ext cx="603796" cy="216316"/>
           </a:xfrm>
           <a:prstGeom prst="straightConnector1">
             <a:avLst/>
@@ -5165,7 +5165,7 @@
         </p:nvGrpSpPr>
         <p:grpSpPr>
           <a:xfrm>
-            <a:off x="10174022" y="6711924"/>
+            <a:off x="9519560" y="6943972"/>
             <a:ext cx="2545538" cy="1016516"/>
             <a:chOff x="4066432" y="5116561"/>
             <a:chExt cx="2297040" cy="1016516"/>
@@ -5298,7 +5298,7 @@
         </p:nvGrpSpPr>
         <p:grpSpPr>
           <a:xfrm>
-            <a:off x="12721292" y="5584416"/>
+            <a:off x="12668999" y="5864578"/>
             <a:ext cx="1936906" cy="1016516"/>
             <a:chOff x="4100114" y="5116561"/>
             <a:chExt cx="1936906" cy="1016516"/>
@@ -5431,7 +5431,7 @@
         </p:nvGrpSpPr>
         <p:grpSpPr>
           <a:xfrm>
-            <a:off x="13613661" y="7412089"/>
+            <a:off x="13658516" y="7547079"/>
             <a:ext cx="1936906" cy="1016516"/>
             <a:chOff x="4100114" y="5116561"/>
             <a:chExt cx="1936906" cy="1016516"/>
@@ -5566,8 +5566,8 @@
         </p:nvCxnSpPr>
         <p:spPr>
           <a:xfrm>
-            <a:off x="9565386" y="7209775"/>
-            <a:ext cx="571908" cy="5336"/>
+            <a:off x="8811707" y="6495572"/>
+            <a:ext cx="877006" cy="488328"/>
           </a:xfrm>
           <a:prstGeom prst="straightConnector1">
             <a:avLst/>
@@ -5613,7 +5613,7 @@
         </p:nvCxnSpPr>
         <p:spPr>
           <a:xfrm>
-            <a:off x="13989495" y="6682456"/>
+            <a:off x="14034350" y="6817446"/>
             <a:ext cx="178892" cy="642369"/>
           </a:xfrm>
           <a:prstGeom prst="straightConnector1">
@@ -5706,9 +5706,9 @@
           <p:nvPr/>
         </p:nvCxnSpPr>
         <p:spPr>
-          <a:xfrm flipV="1">
-            <a:off x="12161512" y="3749207"/>
-            <a:ext cx="1221737" cy="140826"/>
+          <a:xfrm>
+            <a:off x="13716000" y="3522944"/>
+            <a:ext cx="554772" cy="95127"/>
           </a:xfrm>
           <a:prstGeom prst="straightConnector1">
             <a:avLst/>
@@ -6235,7 +6235,7 @@
         </p:nvSpPr>
         <p:spPr>
           <a:xfrm>
-            <a:off x="13401780" y="2842678"/>
+            <a:off x="14102712" y="2841103"/>
             <a:ext cx="3820183" cy="2472114"/>
           </a:xfrm>
           <a:custGeom>
@@ -6370,7 +6370,7 @@
         </p:nvSpPr>
         <p:spPr>
           <a:xfrm>
-            <a:off x="13859346" y="3500385"/>
+            <a:off x="14560278" y="3498810"/>
             <a:ext cx="798852" cy="463190"/>
           </a:xfrm>
           <a:prstGeom prst="roundRect">
@@ -7013,7 +7013,7 @@
         </p:nvSpPr>
         <p:spPr>
           <a:xfrm>
-            <a:off x="14088335" y="4038872"/>
+            <a:off x="14789267" y="4037297"/>
             <a:ext cx="798852" cy="463190"/>
           </a:xfrm>
           <a:prstGeom prst="roundRect">
@@ -7092,7 +7092,7 @@
         </p:nvSpPr>
         <p:spPr>
           <a:xfrm>
-            <a:off x="14776752" y="3459339"/>
+            <a:off x="15477684" y="3457764"/>
             <a:ext cx="1660450" cy="463190"/>
           </a:xfrm>
           <a:prstGeom prst="roundRect">
@@ -7171,7 +7171,7 @@
         </p:nvSpPr>
         <p:spPr>
           <a:xfrm>
-            <a:off x="14983589" y="4038872"/>
+            <a:off x="15684521" y="4037297"/>
             <a:ext cx="1780019" cy="463190"/>
           </a:xfrm>
           <a:prstGeom prst="roundRect">
@@ -7363,7 +7363,7 @@
         </p:nvSpPr>
         <p:spPr>
           <a:xfrm>
-            <a:off x="7260885" y="5502406"/>
+            <a:off x="6703929" y="4279219"/>
             <a:ext cx="1758110" cy="338554"/>
           </a:xfrm>
           <a:prstGeom prst="rect">
@@ -7453,7 +7453,7 @@
         </p:nvSpPr>
         <p:spPr>
           <a:xfrm>
-            <a:off x="14895722" y="2874203"/>
+            <a:off x="15596654" y="2872628"/>
             <a:ext cx="1915910" cy="584775"/>
           </a:xfrm>
           <a:prstGeom prst="rect">
@@ -7516,8 +7516,8 @@
         </p:nvCxnSpPr>
         <p:spPr>
           <a:xfrm flipV="1">
-            <a:off x="12260797" y="6389675"/>
-            <a:ext cx="498245" cy="325134"/>
+            <a:off x="11969911" y="6651057"/>
+            <a:ext cx="607212" cy="363771"/>
           </a:xfrm>
           <a:prstGeom prst="straightConnector1">
             <a:avLst/>
@@ -7561,7 +7561,7 @@
         </p:nvSpPr>
         <p:spPr>
           <a:xfrm>
-            <a:off x="13794396" y="4605646"/>
+            <a:off x="14495328" y="4604071"/>
             <a:ext cx="1126726" cy="463190"/>
           </a:xfrm>
           <a:prstGeom prst="roundRect">
@@ -7640,7 +7640,7 @@
         </p:nvSpPr>
         <p:spPr>
           <a:xfrm>
-            <a:off x="15048369" y="4587356"/>
+            <a:off x="15749301" y="4585781"/>
             <a:ext cx="1780019" cy="463190"/>
           </a:xfrm>
           <a:prstGeom prst="roundRect">
@@ -7730,7 +7730,7 @@
         </p:nvGrpSpPr>
         <p:grpSpPr>
           <a:xfrm>
-            <a:off x="15390796" y="5525924"/>
+            <a:off x="15435651" y="5660914"/>
             <a:ext cx="2011745" cy="2165552"/>
             <a:chOff x="15458146" y="5472379"/>
             <a:chExt cx="2011745" cy="2165552"/>
@@ -8273,7 +8273,7 @@
         </p:nvCxnSpPr>
         <p:spPr>
           <a:xfrm>
-            <a:off x="14680036" y="6192170"/>
+            <a:off x="14724891" y="6327160"/>
             <a:ext cx="736666" cy="46380"/>
           </a:xfrm>
           <a:prstGeom prst="straightConnector1">
@@ -8313,9 +8313,9 @@
         </p:nvGrpSpPr>
         <p:grpSpPr>
           <a:xfrm>
-            <a:off x="9144000" y="4624668"/>
+            <a:off x="9104000" y="4719558"/>
             <a:ext cx="3189686" cy="1504298"/>
-            <a:chOff x="10882635" y="4776219"/>
+            <a:chOff x="10689674" y="4852037"/>
             <a:chExt cx="3189686" cy="1504298"/>
           </a:xfrm>
         </p:grpSpPr>
@@ -8333,7 +8333,7 @@
           </p:nvSpPr>
           <p:spPr>
             <a:xfrm>
-              <a:off x="10882635" y="4776219"/>
+              <a:off x="10689674" y="4852037"/>
               <a:ext cx="3189686" cy="1504298"/>
             </a:xfrm>
             <a:custGeom>
@@ -8458,7 +8458,7 @@
           </p:nvSpPr>
           <p:spPr>
             <a:xfrm>
-              <a:off x="12859270" y="5445880"/>
+              <a:off x="12666309" y="5521698"/>
               <a:ext cx="1040877" cy="463190"/>
             </a:xfrm>
             <a:prstGeom prst="roundRect">
@@ -8537,7 +8537,7 @@
           </p:nvSpPr>
           <p:spPr>
             <a:xfrm>
-              <a:off x="11863262" y="5709975"/>
+              <a:off x="11670301" y="5785793"/>
               <a:ext cx="892051" cy="463190"/>
             </a:xfrm>
             <a:prstGeom prst="roundRect">
@@ -8616,7 +8616,7 @@
           </p:nvSpPr>
           <p:spPr>
             <a:xfrm>
-              <a:off x="12417967" y="4922765"/>
+              <a:off x="12225006" y="4998583"/>
               <a:ext cx="977320" cy="463190"/>
             </a:xfrm>
             <a:prstGeom prst="roundRect">
@@ -8695,7 +8695,7 @@
           </p:nvSpPr>
           <p:spPr>
             <a:xfrm>
-              <a:off x="11157630" y="4910291"/>
+              <a:off x="10964669" y="4986109"/>
               <a:ext cx="1306082" cy="830997"/>
             </a:xfrm>
             <a:prstGeom prst="rect">
@@ -8759,8 +8759,8 @@
         </p:nvCxnSpPr>
         <p:spPr>
           <a:xfrm>
-            <a:off x="11193541" y="6083329"/>
-            <a:ext cx="62861" cy="578984"/>
+            <a:off x="10419394" y="6258861"/>
+            <a:ext cx="32378" cy="611366"/>
           </a:xfrm>
           <a:prstGeom prst="straightConnector1">
             <a:avLst/>
@@ -9036,954 +9036,6 @@
               <a:t>BIC-(C)G</a:t>
             </a:r>
             <a:endParaRPr lang="nl-NL" dirty="0">
-              <a:solidFill>
-                <a:schemeClr val="tx1"/>
-              </a:solidFill>
-            </a:endParaRPr>
-          </a:p>
-        </p:txBody>
-      </p:sp>
-      <p:sp>
-        <p:nvSpPr>
-          <p:cNvPr id="354" name="Freeform: Shape 353">
-            <a:extLst>
-              <a:ext uri="{FF2B5EF4-FFF2-40B4-BE49-F238E27FC236}">
-                <a16:creationId xmlns:a16="http://schemas.microsoft.com/office/drawing/2014/main" id="{13475C38-DE67-5B04-0853-5F93CFE72AD4}"/>
-              </a:ext>
-            </a:extLst>
-          </p:cNvPr>
-          <p:cNvSpPr/>
-          <p:nvPr/>
-        </p:nvSpPr>
-        <p:spPr>
-          <a:xfrm>
-            <a:off x="1679249" y="6915766"/>
-            <a:ext cx="9754002" cy="3100564"/>
-          </a:xfrm>
-          <a:custGeom>
-            <a:avLst/>
-            <a:gdLst>
-              <a:gd name="csX0" fmla="*/ 2767624 w 9754002"/>
-              <a:gd name="csY0" fmla="*/ 82397 h 3100564"/>
-              <a:gd name="csX1" fmla="*/ 2661746 w 9754002"/>
-              <a:gd name="csY1" fmla="*/ 82397 h 3100564"/>
-              <a:gd name="csX2" fmla="*/ 1073577 w 9754002"/>
-              <a:gd name="csY2" fmla="*/ 15021 h 3100564"/>
-              <a:gd name="csX3" fmla="*/ 178428 w 9754002"/>
-              <a:gd name="csY3" fmla="*/ 409656 h 3100564"/>
-              <a:gd name="csX4" fmla="*/ 197678 w 9754002"/>
-              <a:gd name="csY4" fmla="*/ 1988200 h 3100564"/>
-              <a:gd name="csX5" fmla="*/ 2238234 w 9754002"/>
-              <a:gd name="csY5" fmla="*/ 2844848 h 3100564"/>
-              <a:gd name="csX6" fmla="*/ 8850790 w 9754002"/>
-              <a:gd name="csY6" fmla="*/ 3046979 h 3100564"/>
-              <a:gd name="csX7" fmla="*/ 9312803 w 9754002"/>
-              <a:gd name="csY7" fmla="*/ 1988200 h 3100564"/>
-              <a:gd name="csX8" fmla="*/ 5270192 w 9754002"/>
-              <a:gd name="csY8" fmla="*/ 1410684 h 3100564"/>
-              <a:gd name="csX9" fmla="*/ 4326916 w 9754002"/>
-              <a:gd name="csY9" fmla="*/ 1025673 h 3100564"/>
-              <a:gd name="csX10" fmla="*/ 3739775 w 9754002"/>
-              <a:gd name="csY10" fmla="*/ 226776 h 3100564"/>
-              <a:gd name="csX11" fmla="*/ 2767624 w 9754002"/>
-              <a:gd name="csY11" fmla="*/ 82397 h 3100564"/>
-            </a:gdLst>
-            <a:ahLst/>
-            <a:cxnLst>
-              <a:cxn ang="0">
-                <a:pos x="csX0" y="csY0"/>
-              </a:cxn>
-              <a:cxn ang="0">
-                <a:pos x="csX1" y="csY1"/>
-              </a:cxn>
-              <a:cxn ang="0">
-                <a:pos x="csX2" y="csY2"/>
-              </a:cxn>
-              <a:cxn ang="0">
-                <a:pos x="csX3" y="csY3"/>
-              </a:cxn>
-              <a:cxn ang="0">
-                <a:pos x="csX4" y="csY4"/>
-              </a:cxn>
-              <a:cxn ang="0">
-                <a:pos x="csX5" y="csY5"/>
-              </a:cxn>
-              <a:cxn ang="0">
-                <a:pos x="csX6" y="csY6"/>
-              </a:cxn>
-              <a:cxn ang="0">
-                <a:pos x="csX7" y="csY7"/>
-              </a:cxn>
-              <a:cxn ang="0">
-                <a:pos x="csX8" y="csY8"/>
-              </a:cxn>
-              <a:cxn ang="0">
-                <a:pos x="csX9" y="csY9"/>
-              </a:cxn>
-              <a:cxn ang="0">
-                <a:pos x="csX10" y="csY10"/>
-              </a:cxn>
-              <a:cxn ang="0">
-                <a:pos x="csX11" y="csY11"/>
-              </a:cxn>
-            </a:cxnLst>
-            <a:rect l="l" t="t" r="r" b="b"/>
-            <a:pathLst>
-              <a:path w="9754002" h="3100564">
-                <a:moveTo>
-                  <a:pt x="2767624" y="82397"/>
-                </a:moveTo>
-                <a:cubicBezTo>
-                  <a:pt x="2587952" y="58334"/>
-                  <a:pt x="2661746" y="82397"/>
-                  <a:pt x="2661746" y="82397"/>
-                </a:cubicBezTo>
-                <a:cubicBezTo>
-                  <a:pt x="2379405" y="71168"/>
-                  <a:pt x="1487463" y="-39522"/>
-                  <a:pt x="1073577" y="15021"/>
-                </a:cubicBezTo>
-                <a:cubicBezTo>
-                  <a:pt x="659691" y="69564"/>
-                  <a:pt x="324411" y="80793"/>
-                  <a:pt x="178428" y="409656"/>
-                </a:cubicBezTo>
-                <a:cubicBezTo>
-                  <a:pt x="32445" y="738519"/>
-                  <a:pt x="-145623" y="1582335"/>
-                  <a:pt x="197678" y="1988200"/>
-                </a:cubicBezTo>
-                <a:cubicBezTo>
-                  <a:pt x="540979" y="2394065"/>
-                  <a:pt x="796049" y="2668385"/>
-                  <a:pt x="2238234" y="2844848"/>
-                </a:cubicBezTo>
-                <a:cubicBezTo>
-                  <a:pt x="3680419" y="3021311"/>
-                  <a:pt x="7671695" y="3189754"/>
-                  <a:pt x="8850790" y="3046979"/>
-                </a:cubicBezTo>
-                <a:cubicBezTo>
-                  <a:pt x="10029885" y="2904204"/>
-                  <a:pt x="9909569" y="2260916"/>
-                  <a:pt x="9312803" y="1988200"/>
-                </a:cubicBezTo>
-                <a:cubicBezTo>
-                  <a:pt x="8716037" y="1715484"/>
-                  <a:pt x="6101173" y="1571105"/>
-                  <a:pt x="5270192" y="1410684"/>
-                </a:cubicBezTo>
-                <a:cubicBezTo>
-                  <a:pt x="4439211" y="1250263"/>
-                  <a:pt x="4581986" y="1222991"/>
-                  <a:pt x="4326916" y="1025673"/>
-                </a:cubicBezTo>
-                <a:cubicBezTo>
-                  <a:pt x="4071847" y="828355"/>
-                  <a:pt x="4001261" y="387197"/>
-                  <a:pt x="3739775" y="226776"/>
-                </a:cubicBezTo>
-                <a:cubicBezTo>
-                  <a:pt x="3478289" y="66355"/>
-                  <a:pt x="2947296" y="106460"/>
-                  <a:pt x="2767624" y="82397"/>
-                </a:cubicBezTo>
-                <a:close/>
-              </a:path>
-            </a:pathLst>
-          </a:custGeom>
-          <a:solidFill>
-            <a:schemeClr val="bg1">
-              <a:alpha val="46000"/>
-            </a:schemeClr>
-          </a:solidFill>
-          <a:ln>
-            <a:solidFill>
-              <a:schemeClr val="bg1"/>
-            </a:solidFill>
-          </a:ln>
-        </p:spPr>
-        <p:style>
-          <a:lnRef idx="2">
-            <a:schemeClr val="accent1">
-              <a:shade val="15000"/>
-            </a:schemeClr>
-          </a:lnRef>
-          <a:fillRef idx="1">
-            <a:schemeClr val="accent1"/>
-          </a:fillRef>
-          <a:effectRef idx="0">
-            <a:schemeClr val="accent1"/>
-          </a:effectRef>
-          <a:fontRef idx="minor">
-            <a:schemeClr val="lt1"/>
-          </a:fontRef>
-        </p:style>
-        <p:txBody>
-          <a:bodyPr rtlCol="0" anchor="ctr"/>
-          <a:lstStyle/>
-          <a:p>
-            <a:pPr algn="ctr"/>
-            <a:endParaRPr lang="en-NL"/>
-          </a:p>
-        </p:txBody>
-      </p:sp>
-      <p:sp>
-        <p:nvSpPr>
-          <p:cNvPr id="365" name="TextBox 364">
-            <a:extLst>
-              <a:ext uri="{FF2B5EF4-FFF2-40B4-BE49-F238E27FC236}">
-                <a16:creationId xmlns:a16="http://schemas.microsoft.com/office/drawing/2014/main" id="{CE151728-266E-162D-F895-72F04792FFF7}"/>
-              </a:ext>
-            </a:extLst>
-          </p:cNvPr>
-          <p:cNvSpPr txBox="1"/>
-          <p:nvPr/>
-        </p:nvSpPr>
-        <p:spPr>
-          <a:xfrm>
-            <a:off x="3435957" y="7188788"/>
-            <a:ext cx="1631865" cy="338554"/>
-          </a:xfrm>
-          <a:prstGeom prst="rect">
-            <a:avLst/>
-          </a:prstGeom>
-          <a:noFill/>
-        </p:spPr>
-        <p:txBody>
-          <a:bodyPr wrap="square" rtlCol="0">
-            <a:spAutoFit/>
-          </a:bodyPr>
-          <a:lstStyle/>
-          <a:p>
-            <a:pPr algn="r" defTabSz="1097280">
-              <a:defRPr/>
-            </a:pPr>
-            <a:r>
-              <a:rPr lang="en-US" sz="1600" i="1" kern="0" dirty="0">
-                <a:solidFill>
-                  <a:prstClr val="black"/>
-                </a:solidFill>
-                <a:latin typeface="Calibri" panose="020F0502020204030204" pitchFamily="34" charset="0"/>
-                <a:ea typeface="Calibri" panose="020F0502020204030204" pitchFamily="34" charset="0"/>
-                <a:cs typeface="Calibri" panose="020F0502020204030204" pitchFamily="34" charset="0"/>
-              </a:rPr>
-              <a:t>Discrete datasets</a:t>
-            </a:r>
-          </a:p>
-        </p:txBody>
-      </p:sp>
-      <p:cxnSp>
-        <p:nvCxnSpPr>
-          <p:cNvPr id="366" name="Straight Arrow Connector 365">
-            <a:extLst>
-              <a:ext uri="{FF2B5EF4-FFF2-40B4-BE49-F238E27FC236}">
-                <a16:creationId xmlns:a16="http://schemas.microsoft.com/office/drawing/2014/main" id="{034AA2DA-8E22-8059-0512-B3445DB612ED}"/>
-              </a:ext>
-            </a:extLst>
-          </p:cNvPr>
-          <p:cNvCxnSpPr>
-            <a:cxnSpLocks/>
-          </p:cNvCxnSpPr>
-          <p:nvPr/>
-        </p:nvCxnSpPr>
-        <p:spPr>
-          <a:xfrm flipH="1">
-            <a:off x="6124275" y="7794849"/>
-            <a:ext cx="742633" cy="316559"/>
-          </a:xfrm>
-          <a:prstGeom prst="straightConnector1">
-            <a:avLst/>
-          </a:prstGeom>
-          <a:ln w="76200">
-            <a:headEnd type="triangle" w="med" len="med"/>
-            <a:tailEnd type="triangle" w="med" len="med"/>
-          </a:ln>
-        </p:spPr>
-        <p:style>
-          <a:lnRef idx="1">
-            <a:schemeClr val="dk1"/>
-          </a:lnRef>
-          <a:fillRef idx="0">
-            <a:schemeClr val="dk1"/>
-          </a:fillRef>
-          <a:effectRef idx="0">
-            <a:schemeClr val="dk1"/>
-          </a:effectRef>
-          <a:fontRef idx="minor">
-            <a:schemeClr val="tx1"/>
-          </a:fontRef>
-        </p:style>
-      </p:cxnSp>
-      <p:sp>
-        <p:nvSpPr>
-          <p:cNvPr id="367" name="TextBox 366">
-            <a:extLst>
-              <a:ext uri="{FF2B5EF4-FFF2-40B4-BE49-F238E27FC236}">
-                <a16:creationId xmlns:a16="http://schemas.microsoft.com/office/drawing/2014/main" id="{B2BB0D1C-39B1-FBE4-11DE-CD210D3F42FA}"/>
-              </a:ext>
-            </a:extLst>
-          </p:cNvPr>
-          <p:cNvSpPr txBox="1"/>
-          <p:nvPr/>
-        </p:nvSpPr>
-        <p:spPr>
-          <a:xfrm>
-            <a:off x="6401907" y="9002637"/>
-            <a:ext cx="1627753" cy="830997"/>
-          </a:xfrm>
-          <a:prstGeom prst="rect">
-            <a:avLst/>
-          </a:prstGeom>
-          <a:noFill/>
-        </p:spPr>
-        <p:txBody>
-          <a:bodyPr wrap="square" rtlCol="0">
-            <a:spAutoFit/>
-          </a:bodyPr>
-          <a:lstStyle/>
-          <a:p>
-            <a:pPr algn="r" defTabSz="1097280">
-              <a:defRPr/>
-            </a:pPr>
-            <a:r>
-              <a:rPr lang="en-US" sz="1600" i="1" kern="0" dirty="0">
-                <a:solidFill>
-                  <a:prstClr val="black"/>
-                </a:solidFill>
-                <a:latin typeface="Calibri" panose="020F0502020204030204" pitchFamily="34" charset="0"/>
-                <a:ea typeface="Calibri" panose="020F0502020204030204" pitchFamily="34" charset="0"/>
-                <a:cs typeface="Calibri" panose="020F0502020204030204" pitchFamily="34" charset="0"/>
-              </a:rPr>
-              <a:t>Discrete datasets</a:t>
-            </a:r>
-          </a:p>
-          <a:p>
-            <a:pPr algn="r" defTabSz="1097280">
-              <a:defRPr/>
-            </a:pPr>
-            <a:r>
-              <a:rPr lang="en-US" sz="1600" i="1" kern="0" dirty="0">
-                <a:solidFill>
-                  <a:prstClr val="black"/>
-                </a:solidFill>
-                <a:latin typeface="Calibri" panose="020F0502020204030204" pitchFamily="34" charset="0"/>
-                <a:ea typeface="Calibri" panose="020F0502020204030204" pitchFamily="34" charset="0"/>
-                <a:cs typeface="Calibri" panose="020F0502020204030204" pitchFamily="34" charset="0"/>
-              </a:rPr>
-              <a:t>Requires setting</a:t>
-            </a:r>
-          </a:p>
-          <a:p>
-            <a:pPr algn="r" defTabSz="1097280">
-              <a:defRPr/>
-            </a:pPr>
-            <a:r>
-              <a:rPr lang="en-US" sz="1600" i="1" kern="0" dirty="0">
-                <a:solidFill>
-                  <a:prstClr val="black"/>
-                </a:solidFill>
-                <a:latin typeface="Calibri" panose="020F0502020204030204" pitchFamily="34" charset="0"/>
-                <a:ea typeface="Calibri" panose="020F0502020204030204" pitchFamily="34" charset="0"/>
-                <a:cs typeface="Calibri" panose="020F0502020204030204" pitchFamily="34" charset="0"/>
-              </a:rPr>
-              <a:t>Root node</a:t>
-            </a:r>
-          </a:p>
-        </p:txBody>
-      </p:sp>
-      <p:sp>
-        <p:nvSpPr>
-          <p:cNvPr id="368" name="Rectangle: Rounded Corners 367">
-            <a:extLst>
-              <a:ext uri="{FF2B5EF4-FFF2-40B4-BE49-F238E27FC236}">
-                <a16:creationId xmlns:a16="http://schemas.microsoft.com/office/drawing/2014/main" id="{DBCFE042-849E-9B3F-20C5-7355E949A9B5}"/>
-              </a:ext>
-            </a:extLst>
-          </p:cNvPr>
-          <p:cNvSpPr/>
-          <p:nvPr/>
-        </p:nvSpPr>
-        <p:spPr>
-          <a:xfrm>
-            <a:off x="9608301" y="9127478"/>
-            <a:ext cx="1047568" cy="463190"/>
-          </a:xfrm>
-          <a:prstGeom prst="roundRect">
-            <a:avLst/>
-          </a:prstGeom>
-          <a:solidFill>
-            <a:schemeClr val="bg1">
-              <a:lumMod val="85000"/>
-            </a:schemeClr>
-          </a:solidFill>
-          <a:ln>
-            <a:solidFill>
-              <a:schemeClr val="tx2">
-                <a:lumMod val="90000"/>
-                <a:lumOff val="10000"/>
-              </a:schemeClr>
-            </a:solidFill>
-          </a:ln>
-        </p:spPr>
-        <p:style>
-          <a:lnRef idx="2">
-            <a:schemeClr val="accent1">
-              <a:shade val="15000"/>
-            </a:schemeClr>
-          </a:lnRef>
-          <a:fillRef idx="1">
-            <a:schemeClr val="accent1"/>
-          </a:fillRef>
-          <a:effectRef idx="0">
-            <a:schemeClr val="accent1"/>
-          </a:effectRef>
-          <a:fontRef idx="minor">
-            <a:schemeClr val="lt1"/>
-          </a:fontRef>
-        </p:style>
-        <p:txBody>
-          <a:bodyPr rtlCol="0" anchor="ctr"/>
-          <a:lstStyle/>
-          <a:p>
-            <a:pPr algn="ctr" defTabSz="1097280">
-              <a:defRPr/>
-            </a:pPr>
-            <a:r>
-              <a:rPr lang="en-US" kern="0" dirty="0">
-                <a:solidFill>
-                  <a:prstClr val="black"/>
-                </a:solidFill>
-                <a:latin typeface="Calibri" panose="020F0502020204030204" pitchFamily="34" charset="0"/>
-                <a:ea typeface="Calibri" panose="020F0502020204030204" pitchFamily="34" charset="0"/>
-                <a:cs typeface="Calibri" panose="020F0502020204030204" pitchFamily="34" charset="0"/>
-              </a:rPr>
-              <a:t>TAN</a:t>
-            </a:r>
-          </a:p>
-        </p:txBody>
-      </p:sp>
-      <p:sp>
-        <p:nvSpPr>
-          <p:cNvPr id="369" name="Rectangle: Rounded Corners 368">
-            <a:extLst>
-              <a:ext uri="{FF2B5EF4-FFF2-40B4-BE49-F238E27FC236}">
-                <a16:creationId xmlns:a16="http://schemas.microsoft.com/office/drawing/2014/main" id="{9FE0626A-89F0-D54D-D2C5-D181FD043205}"/>
-              </a:ext>
-            </a:extLst>
-          </p:cNvPr>
-          <p:cNvSpPr/>
-          <p:nvPr/>
-        </p:nvSpPr>
-        <p:spPr>
-          <a:xfrm>
-            <a:off x="8107675" y="8883990"/>
-            <a:ext cx="1345712" cy="463190"/>
-          </a:xfrm>
-          <a:prstGeom prst="roundRect">
-            <a:avLst/>
-          </a:prstGeom>
-          <a:solidFill>
-            <a:schemeClr val="bg1">
-              <a:lumMod val="85000"/>
-            </a:schemeClr>
-          </a:solidFill>
-          <a:ln>
-            <a:solidFill>
-              <a:schemeClr val="tx2">
-                <a:lumMod val="90000"/>
-                <a:lumOff val="10000"/>
-              </a:schemeClr>
-            </a:solidFill>
-          </a:ln>
-        </p:spPr>
-        <p:style>
-          <a:lnRef idx="2">
-            <a:schemeClr val="accent1">
-              <a:shade val="15000"/>
-            </a:schemeClr>
-          </a:lnRef>
-          <a:fillRef idx="1">
-            <a:schemeClr val="accent1"/>
-          </a:fillRef>
-          <a:effectRef idx="0">
-            <a:schemeClr val="accent1"/>
-          </a:effectRef>
-          <a:fontRef idx="minor">
-            <a:schemeClr val="lt1"/>
-          </a:fontRef>
-        </p:style>
-        <p:txBody>
-          <a:bodyPr rtlCol="0" anchor="ctr"/>
-          <a:lstStyle/>
-          <a:p>
-            <a:pPr algn="ctr" defTabSz="1097280">
-              <a:defRPr/>
-            </a:pPr>
-            <a:r>
-              <a:rPr lang="en-US" kern="0" dirty="0" err="1">
-                <a:solidFill>
-                  <a:prstClr val="black"/>
-                </a:solidFill>
-                <a:latin typeface="Calibri" panose="020F0502020204030204" pitchFamily="34" charset="0"/>
-                <a:ea typeface="Calibri" panose="020F0502020204030204" pitchFamily="34" charset="0"/>
-                <a:cs typeface="Calibri" panose="020F0502020204030204" pitchFamily="34" charset="0"/>
-              </a:rPr>
-              <a:t>NaiveBayes</a:t>
-            </a:r>
-            <a:endParaRPr lang="nl-NL" kern="0" dirty="0">
-              <a:solidFill>
-                <a:prstClr val="black"/>
-              </a:solidFill>
-              <a:latin typeface="Calibri" panose="020F0502020204030204" pitchFamily="34" charset="0"/>
-              <a:ea typeface="Calibri" panose="020F0502020204030204" pitchFamily="34" charset="0"/>
-              <a:cs typeface="Calibri" panose="020F0502020204030204" pitchFamily="34" charset="0"/>
-            </a:endParaRPr>
-          </a:p>
-        </p:txBody>
-      </p:sp>
-      <p:sp>
-        <p:nvSpPr>
-          <p:cNvPr id="370" name="Rectangle: Rounded Corners 369">
-            <a:extLst>
-              <a:ext uri="{FF2B5EF4-FFF2-40B4-BE49-F238E27FC236}">
-                <a16:creationId xmlns:a16="http://schemas.microsoft.com/office/drawing/2014/main" id="{4E6858B3-6FD5-FBBD-EAB1-4A28AAB3329E}"/>
-              </a:ext>
-            </a:extLst>
-          </p:cNvPr>
-          <p:cNvSpPr/>
-          <p:nvPr/>
-        </p:nvSpPr>
-        <p:spPr>
-          <a:xfrm>
-            <a:off x="8115734" y="9452364"/>
-            <a:ext cx="1303198" cy="463190"/>
-          </a:xfrm>
-          <a:prstGeom prst="roundRect">
-            <a:avLst/>
-          </a:prstGeom>
-          <a:solidFill>
-            <a:schemeClr val="bg1">
-              <a:lumMod val="85000"/>
-            </a:schemeClr>
-          </a:solidFill>
-          <a:ln>
-            <a:solidFill>
-              <a:schemeClr val="tx2">
-                <a:lumMod val="90000"/>
-                <a:lumOff val="10000"/>
-              </a:schemeClr>
-            </a:solidFill>
-          </a:ln>
-        </p:spPr>
-        <p:style>
-          <a:lnRef idx="2">
-            <a:schemeClr val="accent1">
-              <a:shade val="15000"/>
-            </a:schemeClr>
-          </a:lnRef>
-          <a:fillRef idx="1">
-            <a:schemeClr val="accent1"/>
-          </a:fillRef>
-          <a:effectRef idx="0">
-            <a:schemeClr val="accent1"/>
-          </a:effectRef>
-          <a:fontRef idx="minor">
-            <a:schemeClr val="lt1"/>
-          </a:fontRef>
-        </p:style>
-        <p:txBody>
-          <a:bodyPr rtlCol="0" anchor="ctr"/>
-          <a:lstStyle/>
-          <a:p>
-            <a:pPr algn="ctr" defTabSz="1097280">
-              <a:defRPr/>
-            </a:pPr>
-            <a:r>
-              <a:rPr lang="en-US" kern="0" dirty="0">
-                <a:solidFill>
-                  <a:prstClr val="black"/>
-                </a:solidFill>
-                <a:latin typeface="Calibri" panose="020F0502020204030204" pitchFamily="34" charset="0"/>
-                <a:ea typeface="Calibri" panose="020F0502020204030204" pitchFamily="34" charset="0"/>
-                <a:cs typeface="Calibri" panose="020F0502020204030204" pitchFamily="34" charset="0"/>
-              </a:rPr>
-              <a:t>Chow-Liu</a:t>
-            </a:r>
-            <a:endParaRPr lang="nl-NL" kern="0" dirty="0">
-              <a:solidFill>
-                <a:prstClr val="black"/>
-              </a:solidFill>
-              <a:latin typeface="Calibri" panose="020F0502020204030204" pitchFamily="34" charset="0"/>
-              <a:ea typeface="Calibri" panose="020F0502020204030204" pitchFamily="34" charset="0"/>
-              <a:cs typeface="Calibri" panose="020F0502020204030204" pitchFamily="34" charset="0"/>
-            </a:endParaRPr>
-          </a:p>
-        </p:txBody>
-      </p:sp>
-      <p:sp>
-        <p:nvSpPr>
-          <p:cNvPr id="371" name="Rectangle: Rounded Corners 370">
-            <a:extLst>
-              <a:ext uri="{FF2B5EF4-FFF2-40B4-BE49-F238E27FC236}">
-                <a16:creationId xmlns:a16="http://schemas.microsoft.com/office/drawing/2014/main" id="{5061BB80-2506-DE84-C26B-D1D906437332}"/>
-              </a:ext>
-            </a:extLst>
-          </p:cNvPr>
-          <p:cNvSpPr/>
-          <p:nvPr/>
-        </p:nvSpPr>
-        <p:spPr>
-          <a:xfrm>
-            <a:off x="2667562" y="7691476"/>
-            <a:ext cx="1807614" cy="463190"/>
-          </a:xfrm>
-          <a:prstGeom prst="roundRect">
-            <a:avLst/>
-          </a:prstGeom>
-          <a:solidFill>
-            <a:schemeClr val="bg1">
-              <a:lumMod val="95000"/>
-            </a:schemeClr>
-          </a:solidFill>
-          <a:ln>
-            <a:solidFill>
-              <a:schemeClr val="tx2">
-                <a:lumMod val="90000"/>
-                <a:lumOff val="10000"/>
-              </a:schemeClr>
-            </a:solidFill>
-          </a:ln>
-        </p:spPr>
-        <p:style>
-          <a:lnRef idx="2">
-            <a:schemeClr val="accent1">
-              <a:shade val="15000"/>
-            </a:schemeClr>
-          </a:lnRef>
-          <a:fillRef idx="1">
-            <a:schemeClr val="accent1"/>
-          </a:fillRef>
-          <a:effectRef idx="0">
-            <a:schemeClr val="accent1"/>
-          </a:effectRef>
-          <a:fontRef idx="minor">
-            <a:schemeClr val="lt1"/>
-          </a:fontRef>
-        </p:style>
-        <p:txBody>
-          <a:bodyPr rtlCol="0" anchor="ctr"/>
-          <a:lstStyle/>
-          <a:p>
-            <a:pPr algn="ctr"/>
-            <a:r>
-              <a:rPr lang="en-US" kern="0" dirty="0">
-                <a:solidFill>
-                  <a:prstClr val="black"/>
-                </a:solidFill>
-                <a:latin typeface="Calibri" panose="020F0502020204030204" pitchFamily="34" charset="0"/>
-                <a:ea typeface="Calibri" panose="020F0502020204030204" pitchFamily="34" charset="0"/>
-                <a:cs typeface="Calibri" panose="020F0502020204030204" pitchFamily="34" charset="0"/>
-              </a:rPr>
-              <a:t>Hill-</a:t>
-            </a:r>
-            <a:r>
-              <a:rPr lang="en-US" kern="0" dirty="0" err="1">
-                <a:solidFill>
-                  <a:prstClr val="black"/>
-                </a:solidFill>
-                <a:latin typeface="Calibri" panose="020F0502020204030204" pitchFamily="34" charset="0"/>
-                <a:ea typeface="Calibri" panose="020F0502020204030204" pitchFamily="34" charset="0"/>
-                <a:cs typeface="Calibri" panose="020F0502020204030204" pitchFamily="34" charset="0"/>
-              </a:rPr>
-              <a:t>Climbsearch</a:t>
-            </a:r>
-            <a:endParaRPr lang="nl-NL" kern="0" dirty="0">
-              <a:solidFill>
-                <a:prstClr val="black"/>
-              </a:solidFill>
-              <a:latin typeface="Calibri" panose="020F0502020204030204" pitchFamily="34" charset="0"/>
-              <a:ea typeface="Calibri" panose="020F0502020204030204" pitchFamily="34" charset="0"/>
-              <a:cs typeface="Calibri" panose="020F0502020204030204" pitchFamily="34" charset="0"/>
-            </a:endParaRPr>
-          </a:p>
-        </p:txBody>
-      </p:sp>
-      <p:sp>
-        <p:nvSpPr>
-          <p:cNvPr id="372" name="Rectangle: Rounded Corners 371">
-            <a:extLst>
-              <a:ext uri="{FF2B5EF4-FFF2-40B4-BE49-F238E27FC236}">
-                <a16:creationId xmlns:a16="http://schemas.microsoft.com/office/drawing/2014/main" id="{47866911-FF1D-92A5-3B53-98EEAD449DBA}"/>
-              </a:ext>
-            </a:extLst>
-          </p:cNvPr>
-          <p:cNvSpPr/>
-          <p:nvPr/>
-        </p:nvSpPr>
-        <p:spPr>
-          <a:xfrm>
-            <a:off x="2145263" y="7161894"/>
-            <a:ext cx="1260036" cy="463190"/>
-          </a:xfrm>
-          <a:prstGeom prst="roundRect">
-            <a:avLst/>
-          </a:prstGeom>
-          <a:solidFill>
-            <a:schemeClr val="bg1">
-              <a:lumMod val="95000"/>
-            </a:schemeClr>
-          </a:solidFill>
-          <a:ln>
-            <a:solidFill>
-              <a:schemeClr val="tx2">
-                <a:lumMod val="90000"/>
-                <a:lumOff val="10000"/>
-              </a:schemeClr>
-            </a:solidFill>
-          </a:ln>
-        </p:spPr>
-        <p:style>
-          <a:lnRef idx="2">
-            <a:schemeClr val="accent1">
-              <a:shade val="15000"/>
-            </a:schemeClr>
-          </a:lnRef>
-          <a:fillRef idx="1">
-            <a:schemeClr val="accent1"/>
-          </a:fillRef>
-          <a:effectRef idx="0">
-            <a:schemeClr val="accent1"/>
-          </a:effectRef>
-          <a:fontRef idx="minor">
-            <a:schemeClr val="lt1"/>
-          </a:fontRef>
-        </p:style>
-        <p:txBody>
-          <a:bodyPr rtlCol="0" anchor="ctr"/>
-          <a:lstStyle/>
-          <a:p>
-            <a:pPr algn="ctr" defTabSz="1097280">
-              <a:defRPr/>
-            </a:pPr>
-            <a:r>
-              <a:rPr lang="en-US" kern="0" dirty="0">
-                <a:solidFill>
-                  <a:prstClr val="black"/>
-                </a:solidFill>
-                <a:latin typeface="Calibri" panose="020F0502020204030204" pitchFamily="34" charset="0"/>
-                <a:ea typeface="Calibri" panose="020F0502020204030204" pitchFamily="34" charset="0"/>
-                <a:cs typeface="Calibri" panose="020F0502020204030204" pitchFamily="34" charset="0"/>
-              </a:rPr>
-              <a:t>Exhaustive</a:t>
-            </a:r>
-            <a:endParaRPr lang="nl-NL" kern="0" dirty="0">
-              <a:solidFill>
-                <a:prstClr val="black"/>
-              </a:solidFill>
-              <a:latin typeface="Calibri" panose="020F0502020204030204" pitchFamily="34" charset="0"/>
-              <a:ea typeface="Calibri" panose="020F0502020204030204" pitchFamily="34" charset="0"/>
-              <a:cs typeface="Calibri" panose="020F0502020204030204" pitchFamily="34" charset="0"/>
-            </a:endParaRPr>
-          </a:p>
-        </p:txBody>
-      </p:sp>
-      <p:sp>
-        <p:nvSpPr>
-          <p:cNvPr id="373" name="TextBox 372">
-            <a:extLst>
-              <a:ext uri="{FF2B5EF4-FFF2-40B4-BE49-F238E27FC236}">
-                <a16:creationId xmlns:a16="http://schemas.microsoft.com/office/drawing/2014/main" id="{48C60C20-86DA-FD6D-1F91-0A889960D7F8}"/>
-              </a:ext>
-            </a:extLst>
-          </p:cNvPr>
-          <p:cNvSpPr txBox="1"/>
-          <p:nvPr/>
-        </p:nvSpPr>
-        <p:spPr>
-          <a:xfrm>
-            <a:off x="2080678" y="8591298"/>
-            <a:ext cx="1807614" cy="585383"/>
-          </a:xfrm>
-          <a:prstGeom prst="rect">
-            <a:avLst/>
-          </a:prstGeom>
-          <a:noFill/>
-        </p:spPr>
-        <p:txBody>
-          <a:bodyPr wrap="square" rtlCol="0">
-            <a:spAutoFit/>
-          </a:bodyPr>
-          <a:lstStyle/>
-          <a:p>
-            <a:pPr algn="r" defTabSz="1097280">
-              <a:defRPr/>
-            </a:pPr>
-            <a:r>
-              <a:rPr lang="en-US" sz="1600" i="1" kern="0" dirty="0">
-                <a:solidFill>
-                  <a:prstClr val="black"/>
-                </a:solidFill>
-                <a:latin typeface="Calibri" panose="020F0502020204030204" pitchFamily="34" charset="0"/>
-                <a:ea typeface="Calibri" panose="020F0502020204030204" pitchFamily="34" charset="0"/>
-                <a:cs typeface="Calibri" panose="020F0502020204030204" pitchFamily="34" charset="0"/>
-              </a:rPr>
-              <a:t>Continuous and hybrid datasets</a:t>
-            </a:r>
-          </a:p>
-        </p:txBody>
-      </p:sp>
-      <p:sp>
-        <p:nvSpPr>
-          <p:cNvPr id="374" name="Rectangle: Rounded Corners 373">
-            <a:extLst>
-              <a:ext uri="{FF2B5EF4-FFF2-40B4-BE49-F238E27FC236}">
-                <a16:creationId xmlns:a16="http://schemas.microsoft.com/office/drawing/2014/main" id="{8BED6550-5AC7-80AD-5F64-D1C9AE58348A}"/>
-              </a:ext>
-            </a:extLst>
-          </p:cNvPr>
-          <p:cNvSpPr/>
-          <p:nvPr/>
-        </p:nvSpPr>
-        <p:spPr>
-          <a:xfrm>
-            <a:off x="3498423" y="9159006"/>
-            <a:ext cx="1778123" cy="463190"/>
-          </a:xfrm>
-          <a:prstGeom prst="roundRect">
-            <a:avLst/>
-          </a:prstGeom>
-          <a:solidFill>
-            <a:schemeClr val="bg1">
-              <a:lumMod val="85000"/>
-            </a:schemeClr>
-          </a:solidFill>
-          <a:ln>
-            <a:solidFill>
-              <a:schemeClr val="tx2">
-                <a:lumMod val="90000"/>
-                <a:lumOff val="10000"/>
-              </a:schemeClr>
-            </a:solidFill>
-          </a:ln>
-        </p:spPr>
-        <p:style>
-          <a:lnRef idx="2">
-            <a:schemeClr val="accent1">
-              <a:shade val="15000"/>
-            </a:schemeClr>
-          </a:lnRef>
-          <a:fillRef idx="1">
-            <a:schemeClr val="accent1"/>
-          </a:fillRef>
-          <a:effectRef idx="0">
-            <a:schemeClr val="accent1"/>
-          </a:effectRef>
-          <a:fontRef idx="minor">
-            <a:schemeClr val="lt1"/>
-          </a:fontRef>
-        </p:style>
-        <p:txBody>
-          <a:bodyPr rtlCol="0" anchor="ctr"/>
-          <a:lstStyle/>
-          <a:p>
-            <a:pPr algn="ctr"/>
-            <a:r>
-              <a:rPr lang="en-US" dirty="0">
-                <a:solidFill>
-                  <a:schemeClr val="tx1"/>
-                </a:solidFill>
-              </a:rPr>
-              <a:t>Direct-</a:t>
-            </a:r>
-            <a:r>
-              <a:rPr lang="en-US" dirty="0" err="1">
-                <a:solidFill>
-                  <a:schemeClr val="tx1"/>
-                </a:solidFill>
-              </a:rPr>
-              <a:t>LiNGAM</a:t>
-            </a:r>
-            <a:endParaRPr lang="en-US" dirty="0">
-              <a:solidFill>
-                <a:schemeClr val="tx1"/>
-              </a:solidFill>
-            </a:endParaRPr>
-          </a:p>
-        </p:txBody>
-      </p:sp>
-      <p:sp>
-        <p:nvSpPr>
-          <p:cNvPr id="375" name="Rectangle: Rounded Corners 374">
-            <a:extLst>
-              <a:ext uri="{FF2B5EF4-FFF2-40B4-BE49-F238E27FC236}">
-                <a16:creationId xmlns:a16="http://schemas.microsoft.com/office/drawing/2014/main" id="{31B1335D-0292-D6DE-D46C-F9FC9492EF37}"/>
-              </a:ext>
-            </a:extLst>
-          </p:cNvPr>
-          <p:cNvSpPr/>
-          <p:nvPr/>
-        </p:nvSpPr>
-        <p:spPr>
-          <a:xfrm>
-            <a:off x="3990325" y="8622878"/>
-            <a:ext cx="1778123" cy="463190"/>
-          </a:xfrm>
-          <a:prstGeom prst="roundRect">
-            <a:avLst/>
-          </a:prstGeom>
-          <a:solidFill>
-            <a:schemeClr val="bg1">
-              <a:lumMod val="85000"/>
-            </a:schemeClr>
-          </a:solidFill>
-          <a:ln>
-            <a:solidFill>
-              <a:schemeClr val="tx2">
-                <a:lumMod val="90000"/>
-                <a:lumOff val="10000"/>
-              </a:schemeClr>
-            </a:solidFill>
-          </a:ln>
-        </p:spPr>
-        <p:style>
-          <a:lnRef idx="2">
-            <a:schemeClr val="accent1">
-              <a:shade val="15000"/>
-            </a:schemeClr>
-          </a:lnRef>
-          <a:fillRef idx="1">
-            <a:schemeClr val="accent1"/>
-          </a:fillRef>
-          <a:effectRef idx="0">
-            <a:schemeClr val="accent1"/>
-          </a:effectRef>
-          <a:fontRef idx="minor">
-            <a:schemeClr val="lt1"/>
-          </a:fontRef>
-        </p:style>
-        <p:txBody>
-          <a:bodyPr rtlCol="0" anchor="ctr"/>
-          <a:lstStyle/>
-          <a:p>
-            <a:pPr algn="ctr"/>
-            <a:r>
-              <a:rPr lang="en-US" dirty="0">
-                <a:solidFill>
-                  <a:schemeClr val="tx1"/>
-                </a:solidFill>
-              </a:rPr>
-              <a:t>ICA-</a:t>
-            </a:r>
-            <a:r>
-              <a:rPr lang="en-US" dirty="0" err="1">
-                <a:solidFill>
-                  <a:schemeClr val="tx1"/>
-                </a:solidFill>
-              </a:rPr>
-              <a:t>LiNGAM</a:t>
-            </a:r>
-            <a:endParaRPr lang="en-US" dirty="0">
               <a:solidFill>
                 <a:schemeClr val="tx1"/>
               </a:solidFill>
@@ -10211,7 +9263,7 @@
         </p:nvCxnSpPr>
         <p:spPr>
           <a:xfrm flipV="1">
-            <a:off x="14508050" y="8539959"/>
+            <a:off x="14552905" y="8674949"/>
             <a:ext cx="0" cy="650910"/>
           </a:xfrm>
           <a:prstGeom prst="straightConnector1">
@@ -10316,6 +9368,935 @@
           </a:p>
         </p:txBody>
       </p:sp>
+      <p:sp>
+        <p:nvSpPr>
+          <p:cNvPr id="262" name="Freeform: Shape 261">
+            <a:extLst>
+              <a:ext uri="{FF2B5EF4-FFF2-40B4-BE49-F238E27FC236}">
+                <a16:creationId xmlns:a16="http://schemas.microsoft.com/office/drawing/2014/main" id="{45EB97E2-CEE2-825C-5427-1534B406E115}"/>
+              </a:ext>
+            </a:extLst>
+          </p:cNvPr>
+          <p:cNvSpPr/>
+          <p:nvPr/>
+        </p:nvSpPr>
+        <p:spPr>
+          <a:xfrm>
+            <a:off x="1672113" y="6963902"/>
+            <a:ext cx="7976007" cy="3170891"/>
+          </a:xfrm>
+          <a:custGeom>
+            <a:avLst/>
+            <a:gdLst>
+              <a:gd name="csX0" fmla="*/ 2680983 w 7976007"/>
+              <a:gd name="csY0" fmla="*/ 102123 h 3170891"/>
+              <a:gd name="csX1" fmla="*/ 534549 w 7976007"/>
+              <a:gd name="csY1" fmla="*/ 102123 h 3170891"/>
+              <a:gd name="csX2" fmla="*/ 34035 w 7976007"/>
+              <a:gd name="csY2" fmla="*/ 1257154 h 3170891"/>
+              <a:gd name="csX3" fmla="*/ 1217943 w 7976007"/>
+              <a:gd name="csY3" fmla="*/ 2739445 h 3170891"/>
+              <a:gd name="csX4" fmla="*/ 7512865 w 7976007"/>
+              <a:gd name="csY4" fmla="*/ 3008952 h 3170891"/>
+              <a:gd name="csX5" fmla="*/ 6964225 w 7976007"/>
+              <a:gd name="csY5" fmla="*/ 496759 h 3170891"/>
+              <a:gd name="csX6" fmla="*/ 2680983 w 7976007"/>
+              <a:gd name="csY6" fmla="*/ 102123 h 3170891"/>
+            </a:gdLst>
+            <a:ahLst/>
+            <a:cxnLst>
+              <a:cxn ang="0">
+                <a:pos x="csX0" y="csY0"/>
+              </a:cxn>
+              <a:cxn ang="0">
+                <a:pos x="csX1" y="csY1"/>
+              </a:cxn>
+              <a:cxn ang="0">
+                <a:pos x="csX2" y="csY2"/>
+              </a:cxn>
+              <a:cxn ang="0">
+                <a:pos x="csX3" y="csY3"/>
+              </a:cxn>
+              <a:cxn ang="0">
+                <a:pos x="csX4" y="csY4"/>
+              </a:cxn>
+              <a:cxn ang="0">
+                <a:pos x="csX5" y="csY5"/>
+              </a:cxn>
+              <a:cxn ang="0">
+                <a:pos x="csX6" y="csY6"/>
+              </a:cxn>
+            </a:cxnLst>
+            <a:rect l="l" t="t" r="r" b="b"/>
+            <a:pathLst>
+              <a:path w="7976007" h="3170891">
+                <a:moveTo>
+                  <a:pt x="2680983" y="102123"/>
+                </a:moveTo>
+                <a:cubicBezTo>
+                  <a:pt x="1609370" y="36350"/>
+                  <a:pt x="975707" y="-90382"/>
+                  <a:pt x="534549" y="102123"/>
+                </a:cubicBezTo>
+                <a:cubicBezTo>
+                  <a:pt x="93391" y="294628"/>
+                  <a:pt x="-79864" y="817600"/>
+                  <a:pt x="34035" y="1257154"/>
+                </a:cubicBezTo>
+                <a:cubicBezTo>
+                  <a:pt x="147934" y="1696708"/>
+                  <a:pt x="-28529" y="2447479"/>
+                  <a:pt x="1217943" y="2739445"/>
+                </a:cubicBezTo>
+                <a:cubicBezTo>
+                  <a:pt x="2464415" y="3031411"/>
+                  <a:pt x="6555152" y="3382733"/>
+                  <a:pt x="7512865" y="3008952"/>
+                </a:cubicBezTo>
+                <a:cubicBezTo>
+                  <a:pt x="8470578" y="2635171"/>
+                  <a:pt x="7771143" y="981230"/>
+                  <a:pt x="6964225" y="496759"/>
+                </a:cubicBezTo>
+                <a:cubicBezTo>
+                  <a:pt x="6157307" y="12288"/>
+                  <a:pt x="3752596" y="167896"/>
+                  <a:pt x="2680983" y="102123"/>
+                </a:cubicBezTo>
+                <a:close/>
+              </a:path>
+            </a:pathLst>
+          </a:custGeom>
+          <a:solidFill>
+            <a:schemeClr val="bg1">
+              <a:alpha val="46000"/>
+            </a:schemeClr>
+          </a:solidFill>
+          <a:ln>
+            <a:solidFill>
+              <a:schemeClr val="bg1"/>
+            </a:solidFill>
+          </a:ln>
+        </p:spPr>
+        <p:style>
+          <a:lnRef idx="2">
+            <a:schemeClr val="accent1">
+              <a:shade val="15000"/>
+            </a:schemeClr>
+          </a:lnRef>
+          <a:fillRef idx="1">
+            <a:schemeClr val="accent1"/>
+          </a:fillRef>
+          <a:effectRef idx="0">
+            <a:schemeClr val="accent1"/>
+          </a:effectRef>
+          <a:fontRef idx="minor">
+            <a:schemeClr val="lt1"/>
+          </a:fontRef>
+        </p:style>
+        <p:txBody>
+          <a:bodyPr rtlCol="0" anchor="ctr"/>
+          <a:lstStyle/>
+          <a:p>
+            <a:pPr algn="ctr"/>
+            <a:endParaRPr lang="en-NL" dirty="0"/>
+          </a:p>
+        </p:txBody>
+      </p:sp>
+      <p:sp>
+        <p:nvSpPr>
+          <p:cNvPr id="286" name="TextBox 285">
+            <a:extLst>
+              <a:ext uri="{FF2B5EF4-FFF2-40B4-BE49-F238E27FC236}">
+                <a16:creationId xmlns:a16="http://schemas.microsoft.com/office/drawing/2014/main" id="{B6BE0652-0473-C00F-86B0-FDE0793CF798}"/>
+              </a:ext>
+            </a:extLst>
+          </p:cNvPr>
+          <p:cNvSpPr txBox="1"/>
+          <p:nvPr/>
+        </p:nvSpPr>
+        <p:spPr>
+          <a:xfrm>
+            <a:off x="1835432" y="7303780"/>
+            <a:ext cx="1631865" cy="338554"/>
+          </a:xfrm>
+          <a:prstGeom prst="rect">
+            <a:avLst/>
+          </a:prstGeom>
+          <a:noFill/>
+        </p:spPr>
+        <p:txBody>
+          <a:bodyPr wrap="square" rtlCol="0">
+            <a:spAutoFit/>
+          </a:bodyPr>
+          <a:lstStyle/>
+          <a:p>
+            <a:pPr algn="r" defTabSz="1097280">
+              <a:defRPr/>
+            </a:pPr>
+            <a:r>
+              <a:rPr lang="en-US" sz="1600" i="1" kern="0" dirty="0">
+                <a:solidFill>
+                  <a:prstClr val="black"/>
+                </a:solidFill>
+                <a:latin typeface="Calibri" panose="020F0502020204030204" pitchFamily="34" charset="0"/>
+                <a:ea typeface="Calibri" panose="020F0502020204030204" pitchFamily="34" charset="0"/>
+                <a:cs typeface="Calibri" panose="020F0502020204030204" pitchFamily="34" charset="0"/>
+              </a:rPr>
+              <a:t>Discrete datasets</a:t>
+            </a:r>
+          </a:p>
+        </p:txBody>
+      </p:sp>
+      <p:sp>
+        <p:nvSpPr>
+          <p:cNvPr id="289" name="TextBox 288">
+            <a:extLst>
+              <a:ext uri="{FF2B5EF4-FFF2-40B4-BE49-F238E27FC236}">
+                <a16:creationId xmlns:a16="http://schemas.microsoft.com/office/drawing/2014/main" id="{9E34A4B5-7251-4A94-0B98-0F5732D91784}"/>
+              </a:ext>
+            </a:extLst>
+          </p:cNvPr>
+          <p:cNvSpPr txBox="1"/>
+          <p:nvPr/>
+        </p:nvSpPr>
+        <p:spPr>
+          <a:xfrm>
+            <a:off x="6559965" y="7598639"/>
+            <a:ext cx="1858459" cy="830997"/>
+          </a:xfrm>
+          <a:prstGeom prst="rect">
+            <a:avLst/>
+          </a:prstGeom>
+          <a:noFill/>
+        </p:spPr>
+        <p:txBody>
+          <a:bodyPr wrap="square" rtlCol="0">
+            <a:spAutoFit/>
+          </a:bodyPr>
+          <a:lstStyle/>
+          <a:p>
+            <a:pPr defTabSz="1097280">
+              <a:defRPr/>
+            </a:pPr>
+            <a:r>
+              <a:rPr lang="en-US" sz="1600" i="1" kern="0" dirty="0">
+                <a:solidFill>
+                  <a:prstClr val="black"/>
+                </a:solidFill>
+                <a:latin typeface="Calibri" panose="020F0502020204030204" pitchFamily="34" charset="0"/>
+                <a:ea typeface="Calibri" panose="020F0502020204030204" pitchFamily="34" charset="0"/>
+                <a:cs typeface="Calibri" panose="020F0502020204030204" pitchFamily="34" charset="0"/>
+              </a:rPr>
+              <a:t>Discrete datasets</a:t>
+            </a:r>
+          </a:p>
+          <a:p>
+            <a:pPr defTabSz="1097280">
+              <a:defRPr/>
+            </a:pPr>
+            <a:r>
+              <a:rPr lang="en-US" sz="1600" i="1" kern="0" dirty="0">
+                <a:solidFill>
+                  <a:prstClr val="black"/>
+                </a:solidFill>
+                <a:latin typeface="Calibri" panose="020F0502020204030204" pitchFamily="34" charset="0"/>
+                <a:ea typeface="Calibri" panose="020F0502020204030204" pitchFamily="34" charset="0"/>
+                <a:cs typeface="Calibri" panose="020F0502020204030204" pitchFamily="34" charset="0"/>
+              </a:rPr>
+              <a:t>Requires setting Root node</a:t>
+            </a:r>
+          </a:p>
+        </p:txBody>
+      </p:sp>
+      <p:sp>
+        <p:nvSpPr>
+          <p:cNvPr id="293" name="Rectangle: Rounded Corners 292">
+            <a:extLst>
+              <a:ext uri="{FF2B5EF4-FFF2-40B4-BE49-F238E27FC236}">
+                <a16:creationId xmlns:a16="http://schemas.microsoft.com/office/drawing/2014/main" id="{D674AD23-A69C-4CA4-ED70-041874343B0D}"/>
+              </a:ext>
+            </a:extLst>
+          </p:cNvPr>
+          <p:cNvSpPr/>
+          <p:nvPr/>
+        </p:nvSpPr>
+        <p:spPr>
+          <a:xfrm>
+            <a:off x="8073559" y="9064323"/>
+            <a:ext cx="1047568" cy="463190"/>
+          </a:xfrm>
+          <a:prstGeom prst="roundRect">
+            <a:avLst/>
+          </a:prstGeom>
+          <a:solidFill>
+            <a:schemeClr val="bg1">
+              <a:lumMod val="85000"/>
+            </a:schemeClr>
+          </a:solidFill>
+          <a:ln>
+            <a:solidFill>
+              <a:schemeClr val="tx2">
+                <a:lumMod val="90000"/>
+                <a:lumOff val="10000"/>
+              </a:schemeClr>
+            </a:solidFill>
+          </a:ln>
+        </p:spPr>
+        <p:style>
+          <a:lnRef idx="2">
+            <a:schemeClr val="accent1">
+              <a:shade val="15000"/>
+            </a:schemeClr>
+          </a:lnRef>
+          <a:fillRef idx="1">
+            <a:schemeClr val="accent1"/>
+          </a:fillRef>
+          <a:effectRef idx="0">
+            <a:schemeClr val="accent1"/>
+          </a:effectRef>
+          <a:fontRef idx="minor">
+            <a:schemeClr val="lt1"/>
+          </a:fontRef>
+        </p:style>
+        <p:txBody>
+          <a:bodyPr rtlCol="0" anchor="ctr"/>
+          <a:lstStyle/>
+          <a:p>
+            <a:pPr algn="ctr" defTabSz="1097280">
+              <a:defRPr/>
+            </a:pPr>
+            <a:r>
+              <a:rPr lang="en-US" kern="0" dirty="0">
+                <a:solidFill>
+                  <a:prstClr val="black"/>
+                </a:solidFill>
+                <a:latin typeface="Calibri" panose="020F0502020204030204" pitchFamily="34" charset="0"/>
+                <a:ea typeface="Calibri" panose="020F0502020204030204" pitchFamily="34" charset="0"/>
+                <a:cs typeface="Calibri" panose="020F0502020204030204" pitchFamily="34" charset="0"/>
+              </a:rPr>
+              <a:t>TAN</a:t>
+            </a:r>
+          </a:p>
+        </p:txBody>
+      </p:sp>
+      <p:sp>
+        <p:nvSpPr>
+          <p:cNvPr id="295" name="Rectangle: Rounded Corners 294">
+            <a:extLst>
+              <a:ext uri="{FF2B5EF4-FFF2-40B4-BE49-F238E27FC236}">
+                <a16:creationId xmlns:a16="http://schemas.microsoft.com/office/drawing/2014/main" id="{EE9D2AE4-8ABB-7436-D50E-8EF948A548B8}"/>
+              </a:ext>
+            </a:extLst>
+          </p:cNvPr>
+          <p:cNvSpPr/>
+          <p:nvPr/>
+        </p:nvSpPr>
+        <p:spPr>
+          <a:xfrm>
+            <a:off x="6695415" y="8495949"/>
+            <a:ext cx="1345712" cy="463190"/>
+          </a:xfrm>
+          <a:prstGeom prst="roundRect">
+            <a:avLst/>
+          </a:prstGeom>
+          <a:solidFill>
+            <a:schemeClr val="bg1">
+              <a:lumMod val="85000"/>
+            </a:schemeClr>
+          </a:solidFill>
+          <a:ln>
+            <a:solidFill>
+              <a:schemeClr val="tx2">
+                <a:lumMod val="90000"/>
+                <a:lumOff val="10000"/>
+              </a:schemeClr>
+            </a:solidFill>
+          </a:ln>
+        </p:spPr>
+        <p:style>
+          <a:lnRef idx="2">
+            <a:schemeClr val="accent1">
+              <a:shade val="15000"/>
+            </a:schemeClr>
+          </a:lnRef>
+          <a:fillRef idx="1">
+            <a:schemeClr val="accent1"/>
+          </a:fillRef>
+          <a:effectRef idx="0">
+            <a:schemeClr val="accent1"/>
+          </a:effectRef>
+          <a:fontRef idx="minor">
+            <a:schemeClr val="lt1"/>
+          </a:fontRef>
+        </p:style>
+        <p:txBody>
+          <a:bodyPr rtlCol="0" anchor="ctr"/>
+          <a:lstStyle/>
+          <a:p>
+            <a:pPr algn="ctr" defTabSz="1097280">
+              <a:defRPr/>
+            </a:pPr>
+            <a:r>
+              <a:rPr lang="en-US" kern="0" dirty="0" err="1">
+                <a:solidFill>
+                  <a:prstClr val="black"/>
+                </a:solidFill>
+                <a:latin typeface="Calibri" panose="020F0502020204030204" pitchFamily="34" charset="0"/>
+                <a:ea typeface="Calibri" panose="020F0502020204030204" pitchFamily="34" charset="0"/>
+                <a:cs typeface="Calibri" panose="020F0502020204030204" pitchFamily="34" charset="0"/>
+              </a:rPr>
+              <a:t>NaiveBayes</a:t>
+            </a:r>
+            <a:endParaRPr lang="nl-NL" kern="0" dirty="0">
+              <a:solidFill>
+                <a:prstClr val="black"/>
+              </a:solidFill>
+              <a:latin typeface="Calibri" panose="020F0502020204030204" pitchFamily="34" charset="0"/>
+              <a:ea typeface="Calibri" panose="020F0502020204030204" pitchFamily="34" charset="0"/>
+              <a:cs typeface="Calibri" panose="020F0502020204030204" pitchFamily="34" charset="0"/>
+            </a:endParaRPr>
+          </a:p>
+        </p:txBody>
+      </p:sp>
+      <p:sp>
+        <p:nvSpPr>
+          <p:cNvPr id="297" name="Rectangle: Rounded Corners 296">
+            <a:extLst>
+              <a:ext uri="{FF2B5EF4-FFF2-40B4-BE49-F238E27FC236}">
+                <a16:creationId xmlns:a16="http://schemas.microsoft.com/office/drawing/2014/main" id="{9E64887C-32A9-1AAA-836B-D33EABCE5C88}"/>
+              </a:ext>
+            </a:extLst>
+          </p:cNvPr>
+          <p:cNvSpPr/>
+          <p:nvPr/>
+        </p:nvSpPr>
+        <p:spPr>
+          <a:xfrm>
+            <a:off x="6703474" y="9064323"/>
+            <a:ext cx="1303198" cy="463190"/>
+          </a:xfrm>
+          <a:prstGeom prst="roundRect">
+            <a:avLst/>
+          </a:prstGeom>
+          <a:solidFill>
+            <a:schemeClr val="bg1">
+              <a:lumMod val="85000"/>
+            </a:schemeClr>
+          </a:solidFill>
+          <a:ln>
+            <a:solidFill>
+              <a:schemeClr val="tx2">
+                <a:lumMod val="90000"/>
+                <a:lumOff val="10000"/>
+              </a:schemeClr>
+            </a:solidFill>
+          </a:ln>
+        </p:spPr>
+        <p:style>
+          <a:lnRef idx="2">
+            <a:schemeClr val="accent1">
+              <a:shade val="15000"/>
+            </a:schemeClr>
+          </a:lnRef>
+          <a:fillRef idx="1">
+            <a:schemeClr val="accent1"/>
+          </a:fillRef>
+          <a:effectRef idx="0">
+            <a:schemeClr val="accent1"/>
+          </a:effectRef>
+          <a:fontRef idx="minor">
+            <a:schemeClr val="lt1"/>
+          </a:fontRef>
+        </p:style>
+        <p:txBody>
+          <a:bodyPr rtlCol="0" anchor="ctr"/>
+          <a:lstStyle/>
+          <a:p>
+            <a:pPr algn="ctr" defTabSz="1097280">
+              <a:defRPr/>
+            </a:pPr>
+            <a:r>
+              <a:rPr lang="en-US" kern="0" dirty="0">
+                <a:solidFill>
+                  <a:prstClr val="black"/>
+                </a:solidFill>
+                <a:latin typeface="Calibri" panose="020F0502020204030204" pitchFamily="34" charset="0"/>
+                <a:ea typeface="Calibri" panose="020F0502020204030204" pitchFamily="34" charset="0"/>
+                <a:cs typeface="Calibri" panose="020F0502020204030204" pitchFamily="34" charset="0"/>
+              </a:rPr>
+              <a:t>Chow-Liu</a:t>
+            </a:r>
+            <a:endParaRPr lang="nl-NL" kern="0" dirty="0">
+              <a:solidFill>
+                <a:prstClr val="black"/>
+              </a:solidFill>
+              <a:latin typeface="Calibri" panose="020F0502020204030204" pitchFamily="34" charset="0"/>
+              <a:ea typeface="Calibri" panose="020F0502020204030204" pitchFamily="34" charset="0"/>
+              <a:cs typeface="Calibri" panose="020F0502020204030204" pitchFamily="34" charset="0"/>
+            </a:endParaRPr>
+          </a:p>
+        </p:txBody>
+      </p:sp>
+      <p:sp>
+        <p:nvSpPr>
+          <p:cNvPr id="299" name="Rectangle: Rounded Corners 298">
+            <a:extLst>
+              <a:ext uri="{FF2B5EF4-FFF2-40B4-BE49-F238E27FC236}">
+                <a16:creationId xmlns:a16="http://schemas.microsoft.com/office/drawing/2014/main" id="{D1C94561-9F4D-178C-426C-440A174378E7}"/>
+              </a:ext>
+            </a:extLst>
+          </p:cNvPr>
+          <p:cNvSpPr/>
+          <p:nvPr/>
+        </p:nvSpPr>
+        <p:spPr>
+          <a:xfrm>
+            <a:off x="3150083" y="7665246"/>
+            <a:ext cx="1807614" cy="463190"/>
+          </a:xfrm>
+          <a:prstGeom prst="roundRect">
+            <a:avLst/>
+          </a:prstGeom>
+          <a:solidFill>
+            <a:schemeClr val="bg1">
+              <a:lumMod val="95000"/>
+            </a:schemeClr>
+          </a:solidFill>
+          <a:ln>
+            <a:solidFill>
+              <a:schemeClr val="tx2">
+                <a:lumMod val="90000"/>
+                <a:lumOff val="10000"/>
+              </a:schemeClr>
+            </a:solidFill>
+          </a:ln>
+        </p:spPr>
+        <p:style>
+          <a:lnRef idx="2">
+            <a:schemeClr val="accent1">
+              <a:shade val="15000"/>
+            </a:schemeClr>
+          </a:lnRef>
+          <a:fillRef idx="1">
+            <a:schemeClr val="accent1"/>
+          </a:fillRef>
+          <a:effectRef idx="0">
+            <a:schemeClr val="accent1"/>
+          </a:effectRef>
+          <a:fontRef idx="minor">
+            <a:schemeClr val="lt1"/>
+          </a:fontRef>
+        </p:style>
+        <p:txBody>
+          <a:bodyPr rtlCol="0" anchor="ctr"/>
+          <a:lstStyle/>
+          <a:p>
+            <a:pPr algn="ctr"/>
+            <a:r>
+              <a:rPr lang="en-US" kern="0" dirty="0">
+                <a:solidFill>
+                  <a:prstClr val="black"/>
+                </a:solidFill>
+                <a:latin typeface="Calibri" panose="020F0502020204030204" pitchFamily="34" charset="0"/>
+                <a:ea typeface="Calibri" panose="020F0502020204030204" pitchFamily="34" charset="0"/>
+                <a:cs typeface="Calibri" panose="020F0502020204030204" pitchFamily="34" charset="0"/>
+              </a:rPr>
+              <a:t>Hill-</a:t>
+            </a:r>
+            <a:r>
+              <a:rPr lang="en-US" kern="0" dirty="0" err="1">
+                <a:solidFill>
+                  <a:prstClr val="black"/>
+                </a:solidFill>
+                <a:latin typeface="Calibri" panose="020F0502020204030204" pitchFamily="34" charset="0"/>
+                <a:ea typeface="Calibri" panose="020F0502020204030204" pitchFamily="34" charset="0"/>
+                <a:cs typeface="Calibri" panose="020F0502020204030204" pitchFamily="34" charset="0"/>
+              </a:rPr>
+              <a:t>Climbsearch</a:t>
+            </a:r>
+            <a:endParaRPr lang="nl-NL" kern="0" dirty="0">
+              <a:solidFill>
+                <a:prstClr val="black"/>
+              </a:solidFill>
+              <a:latin typeface="Calibri" panose="020F0502020204030204" pitchFamily="34" charset="0"/>
+              <a:ea typeface="Calibri" panose="020F0502020204030204" pitchFamily="34" charset="0"/>
+              <a:cs typeface="Calibri" panose="020F0502020204030204" pitchFamily="34" charset="0"/>
+            </a:endParaRPr>
+          </a:p>
+        </p:txBody>
+      </p:sp>
+      <p:sp>
+        <p:nvSpPr>
+          <p:cNvPr id="301" name="Rectangle: Rounded Corners 300">
+            <a:extLst>
+              <a:ext uri="{FF2B5EF4-FFF2-40B4-BE49-F238E27FC236}">
+                <a16:creationId xmlns:a16="http://schemas.microsoft.com/office/drawing/2014/main" id="{2465C7B3-53AB-E676-1939-86FFD88EBE20}"/>
+              </a:ext>
+            </a:extLst>
+          </p:cNvPr>
+          <p:cNvSpPr/>
+          <p:nvPr/>
+        </p:nvSpPr>
+        <p:spPr>
+          <a:xfrm>
+            <a:off x="1840280" y="7669931"/>
+            <a:ext cx="1260036" cy="463190"/>
+          </a:xfrm>
+          <a:prstGeom prst="roundRect">
+            <a:avLst/>
+          </a:prstGeom>
+          <a:solidFill>
+            <a:schemeClr val="bg1">
+              <a:lumMod val="95000"/>
+            </a:schemeClr>
+          </a:solidFill>
+          <a:ln>
+            <a:solidFill>
+              <a:schemeClr val="tx2">
+                <a:lumMod val="90000"/>
+                <a:lumOff val="10000"/>
+              </a:schemeClr>
+            </a:solidFill>
+          </a:ln>
+        </p:spPr>
+        <p:style>
+          <a:lnRef idx="2">
+            <a:schemeClr val="accent1">
+              <a:shade val="15000"/>
+            </a:schemeClr>
+          </a:lnRef>
+          <a:fillRef idx="1">
+            <a:schemeClr val="accent1"/>
+          </a:fillRef>
+          <a:effectRef idx="0">
+            <a:schemeClr val="accent1"/>
+          </a:effectRef>
+          <a:fontRef idx="minor">
+            <a:schemeClr val="lt1"/>
+          </a:fontRef>
+        </p:style>
+        <p:txBody>
+          <a:bodyPr rtlCol="0" anchor="ctr"/>
+          <a:lstStyle/>
+          <a:p>
+            <a:pPr algn="ctr" defTabSz="1097280">
+              <a:defRPr/>
+            </a:pPr>
+            <a:r>
+              <a:rPr lang="en-US" kern="0" dirty="0">
+                <a:solidFill>
+                  <a:prstClr val="black"/>
+                </a:solidFill>
+                <a:latin typeface="Calibri" panose="020F0502020204030204" pitchFamily="34" charset="0"/>
+                <a:ea typeface="Calibri" panose="020F0502020204030204" pitchFamily="34" charset="0"/>
+                <a:cs typeface="Calibri" panose="020F0502020204030204" pitchFamily="34" charset="0"/>
+              </a:rPr>
+              <a:t>Exhaustive</a:t>
+            </a:r>
+            <a:endParaRPr lang="nl-NL" kern="0" dirty="0">
+              <a:solidFill>
+                <a:prstClr val="black"/>
+              </a:solidFill>
+              <a:latin typeface="Calibri" panose="020F0502020204030204" pitchFamily="34" charset="0"/>
+              <a:ea typeface="Calibri" panose="020F0502020204030204" pitchFamily="34" charset="0"/>
+              <a:cs typeface="Calibri" panose="020F0502020204030204" pitchFamily="34" charset="0"/>
+            </a:endParaRPr>
+          </a:p>
+        </p:txBody>
+      </p:sp>
+      <p:sp>
+        <p:nvSpPr>
+          <p:cNvPr id="315" name="TextBox 314">
+            <a:extLst>
+              <a:ext uri="{FF2B5EF4-FFF2-40B4-BE49-F238E27FC236}">
+                <a16:creationId xmlns:a16="http://schemas.microsoft.com/office/drawing/2014/main" id="{4D5B4335-A210-E264-5766-EB53006CF771}"/>
+              </a:ext>
+            </a:extLst>
+          </p:cNvPr>
+          <p:cNvSpPr txBox="1"/>
+          <p:nvPr/>
+        </p:nvSpPr>
+        <p:spPr>
+          <a:xfrm>
+            <a:off x="2646040" y="8467142"/>
+            <a:ext cx="1377603" cy="830997"/>
+          </a:xfrm>
+          <a:prstGeom prst="rect">
+            <a:avLst/>
+          </a:prstGeom>
+          <a:noFill/>
+        </p:spPr>
+        <p:txBody>
+          <a:bodyPr wrap="square" rtlCol="0">
+            <a:spAutoFit/>
+          </a:bodyPr>
+          <a:lstStyle/>
+          <a:p>
+            <a:pPr algn="r" defTabSz="1097280">
+              <a:defRPr/>
+            </a:pPr>
+            <a:r>
+              <a:rPr lang="en-US" sz="1600" i="1" kern="0" dirty="0">
+                <a:solidFill>
+                  <a:prstClr val="black"/>
+                </a:solidFill>
+                <a:latin typeface="Calibri" panose="020F0502020204030204" pitchFamily="34" charset="0"/>
+                <a:ea typeface="Calibri" panose="020F0502020204030204" pitchFamily="34" charset="0"/>
+                <a:cs typeface="Calibri" panose="020F0502020204030204" pitchFamily="34" charset="0"/>
+              </a:rPr>
+              <a:t>Continuous and hybrid datasets</a:t>
+            </a:r>
+          </a:p>
+        </p:txBody>
+      </p:sp>
+      <p:sp>
+        <p:nvSpPr>
+          <p:cNvPr id="318" name="Rectangle: Rounded Corners 317">
+            <a:extLst>
+              <a:ext uri="{FF2B5EF4-FFF2-40B4-BE49-F238E27FC236}">
+                <a16:creationId xmlns:a16="http://schemas.microsoft.com/office/drawing/2014/main" id="{BC4D8017-7452-2991-FCC8-02009AF17CBF}"/>
+              </a:ext>
+            </a:extLst>
+          </p:cNvPr>
+          <p:cNvSpPr/>
+          <p:nvPr/>
+        </p:nvSpPr>
+        <p:spPr>
+          <a:xfrm>
+            <a:off x="4099550" y="9074144"/>
+            <a:ext cx="1778123" cy="463190"/>
+          </a:xfrm>
+          <a:prstGeom prst="roundRect">
+            <a:avLst/>
+          </a:prstGeom>
+          <a:solidFill>
+            <a:schemeClr val="bg1">
+              <a:lumMod val="85000"/>
+            </a:schemeClr>
+          </a:solidFill>
+          <a:ln>
+            <a:solidFill>
+              <a:schemeClr val="tx2">
+                <a:lumMod val="90000"/>
+                <a:lumOff val="10000"/>
+              </a:schemeClr>
+            </a:solidFill>
+          </a:ln>
+        </p:spPr>
+        <p:style>
+          <a:lnRef idx="2">
+            <a:schemeClr val="accent1">
+              <a:shade val="15000"/>
+            </a:schemeClr>
+          </a:lnRef>
+          <a:fillRef idx="1">
+            <a:schemeClr val="accent1"/>
+          </a:fillRef>
+          <a:effectRef idx="0">
+            <a:schemeClr val="accent1"/>
+          </a:effectRef>
+          <a:fontRef idx="minor">
+            <a:schemeClr val="lt1"/>
+          </a:fontRef>
+        </p:style>
+        <p:txBody>
+          <a:bodyPr rtlCol="0" anchor="ctr"/>
+          <a:lstStyle/>
+          <a:p>
+            <a:pPr algn="ctr"/>
+            <a:r>
+              <a:rPr lang="en-US" dirty="0">
+                <a:solidFill>
+                  <a:schemeClr val="tx1"/>
+                </a:solidFill>
+              </a:rPr>
+              <a:t>Direct-</a:t>
+            </a:r>
+            <a:r>
+              <a:rPr lang="en-US" dirty="0" err="1">
+                <a:solidFill>
+                  <a:schemeClr val="tx1"/>
+                </a:solidFill>
+              </a:rPr>
+              <a:t>LiNGAM</a:t>
+            </a:r>
+            <a:endParaRPr lang="en-US" dirty="0">
+              <a:solidFill>
+                <a:schemeClr val="tx1"/>
+              </a:solidFill>
+            </a:endParaRPr>
+          </a:p>
+        </p:txBody>
+      </p:sp>
+      <p:sp>
+        <p:nvSpPr>
+          <p:cNvPr id="321" name="Rectangle: Rounded Corners 320">
+            <a:extLst>
+              <a:ext uri="{FF2B5EF4-FFF2-40B4-BE49-F238E27FC236}">
+                <a16:creationId xmlns:a16="http://schemas.microsoft.com/office/drawing/2014/main" id="{2952B713-19DC-099B-898D-1C40141D10B1}"/>
+              </a:ext>
+            </a:extLst>
+          </p:cNvPr>
+          <p:cNvSpPr/>
+          <p:nvPr/>
+        </p:nvSpPr>
+        <p:spPr>
+          <a:xfrm>
+            <a:off x="4087028" y="8530971"/>
+            <a:ext cx="1778123" cy="463190"/>
+          </a:xfrm>
+          <a:prstGeom prst="roundRect">
+            <a:avLst/>
+          </a:prstGeom>
+          <a:solidFill>
+            <a:schemeClr val="bg1">
+              <a:lumMod val="85000"/>
+            </a:schemeClr>
+          </a:solidFill>
+          <a:ln>
+            <a:solidFill>
+              <a:schemeClr val="tx2">
+                <a:lumMod val="90000"/>
+                <a:lumOff val="10000"/>
+              </a:schemeClr>
+            </a:solidFill>
+          </a:ln>
+        </p:spPr>
+        <p:style>
+          <a:lnRef idx="2">
+            <a:schemeClr val="accent1">
+              <a:shade val="15000"/>
+            </a:schemeClr>
+          </a:lnRef>
+          <a:fillRef idx="1">
+            <a:schemeClr val="accent1"/>
+          </a:fillRef>
+          <a:effectRef idx="0">
+            <a:schemeClr val="accent1"/>
+          </a:effectRef>
+          <a:fontRef idx="minor">
+            <a:schemeClr val="lt1"/>
+          </a:fontRef>
+        </p:style>
+        <p:txBody>
+          <a:bodyPr rtlCol="0" anchor="ctr"/>
+          <a:lstStyle/>
+          <a:p>
+            <a:pPr algn="ctr"/>
+            <a:r>
+              <a:rPr lang="en-US" dirty="0">
+                <a:solidFill>
+                  <a:schemeClr val="tx1"/>
+                </a:solidFill>
+              </a:rPr>
+              <a:t>ICA-</a:t>
+            </a:r>
+            <a:r>
+              <a:rPr lang="en-US" dirty="0" err="1">
+                <a:solidFill>
+                  <a:schemeClr val="tx1"/>
+                </a:solidFill>
+              </a:rPr>
+              <a:t>LiNGAM</a:t>
+            </a:r>
+            <a:endParaRPr lang="en-US" dirty="0">
+              <a:solidFill>
+                <a:schemeClr val="tx1"/>
+              </a:solidFill>
+            </a:endParaRPr>
+          </a:p>
+        </p:txBody>
+      </p:sp>
+      <p:cxnSp>
+        <p:nvCxnSpPr>
+          <p:cNvPr id="322" name="Straight Arrow Connector 321">
+            <a:extLst>
+              <a:ext uri="{FF2B5EF4-FFF2-40B4-BE49-F238E27FC236}">
+                <a16:creationId xmlns:a16="http://schemas.microsoft.com/office/drawing/2014/main" id="{034AA2DA-8E22-8059-0512-B3445DB612ED}"/>
+              </a:ext>
+            </a:extLst>
+          </p:cNvPr>
+          <p:cNvCxnSpPr>
+            <a:cxnSpLocks/>
+          </p:cNvCxnSpPr>
+          <p:nvPr/>
+        </p:nvCxnSpPr>
+        <p:spPr>
+          <a:xfrm flipH="1">
+            <a:off x="6169749" y="6485192"/>
+            <a:ext cx="353540" cy="691057"/>
+          </a:xfrm>
+          <a:prstGeom prst="straightConnector1">
+            <a:avLst/>
+          </a:prstGeom>
+          <a:ln w="76200">
+            <a:headEnd type="triangle" w="med" len="med"/>
+            <a:tailEnd type="triangle" w="med" len="med"/>
+          </a:ln>
+        </p:spPr>
+        <p:style>
+          <a:lnRef idx="1">
+            <a:schemeClr val="dk1"/>
+          </a:lnRef>
+          <a:fillRef idx="0">
+            <a:schemeClr val="dk1"/>
+          </a:fillRef>
+          <a:effectRef idx="0">
+            <a:schemeClr val="dk1"/>
+          </a:effectRef>
+          <a:fontRef idx="minor">
+            <a:schemeClr val="tx1"/>
+          </a:fontRef>
+        </p:style>
+      </p:cxnSp>
+      <p:cxnSp>
+        <p:nvCxnSpPr>
+          <p:cNvPr id="327" name="Straight Arrow Connector 326">
+            <a:extLst>
+              <a:ext uri="{FF2B5EF4-FFF2-40B4-BE49-F238E27FC236}">
+                <a16:creationId xmlns:a16="http://schemas.microsoft.com/office/drawing/2014/main" id="{2E1CD296-E70C-ACB7-D024-E69269C44E98}"/>
+              </a:ext>
+            </a:extLst>
+          </p:cNvPr>
+          <p:cNvCxnSpPr>
+            <a:cxnSpLocks/>
+          </p:cNvCxnSpPr>
+          <p:nvPr/>
+        </p:nvCxnSpPr>
+        <p:spPr>
+          <a:xfrm>
+            <a:off x="11475367" y="4268892"/>
+            <a:ext cx="1931906" cy="1524591"/>
+          </a:xfrm>
+          <a:prstGeom prst="straightConnector1">
+            <a:avLst/>
+          </a:prstGeom>
+          <a:ln w="76200">
+            <a:solidFill>
+              <a:schemeClr val="accent2">
+                <a:lumMod val="50000"/>
+              </a:schemeClr>
+            </a:solidFill>
+            <a:headEnd type="none" w="med" len="med"/>
+            <a:tailEnd type="triangle" w="med" len="med"/>
+          </a:ln>
+        </p:spPr>
+        <p:style>
+          <a:lnRef idx="1">
+            <a:schemeClr val="dk1"/>
+          </a:lnRef>
+          <a:fillRef idx="0">
+            <a:schemeClr val="dk1"/>
+          </a:fillRef>
+          <a:effectRef idx="0">
+            <a:schemeClr val="dk1"/>
+          </a:effectRef>
+          <a:fontRef idx="minor">
+            <a:schemeClr val="tx1"/>
+          </a:fontRef>
+        </p:style>
+      </p:cxnSp>
     </p:spTree>
     <p:extLst>
       <p:ext uri="{BB962C8B-B14F-4D97-AF65-F5344CB8AC3E}">
